--- a/brasil-seguro.pptx
+++ b/brasil-seguro.pptx
@@ -21,9 +21,10 @@
     <p:sldId id="269" r:id="rId15"/>
     <p:sldId id="270" r:id="rId16"/>
     <p:sldId id="271" r:id="rId17"/>
+    <p:sldId id="272" r:id="rId18"/>
   </p:sldIdLst>
   <p:notesMasterIdLst>
-    <p:notesMasterId r:id="rId18"/>
+    <p:notesMasterId r:id="rId19"/>
   </p:notesMasterIdLst>
   <p:sldSz cx="12192000" cy="6858000"/>
   <p:notesSz cx="6858000" cy="12192000"/>
@@ -605,7 +606,7 @@
           <a:p>
             <a:r>
               <a:rPr lang="en-US" dirty="0"/>
-              <a:t>Confiança e inclusão (40 s). A resposta ao caso misantropia está aqui: assinatura, dupla aprovação, auditoria. E ninguém fica de fora: idosos, pessoas com deficiência e quem tem pouca leitura.</a:t>
+              <a:t>Telas (40 s). Tela inicial limpa: status, passos, Estou bem. Isso é real? combate boatos. Locais são cadastrados pelo próprio município e estado; no Rio, pontos de resfriamento seguem o Decreto 54.740/2024. Guias aparecem na ordem dos riscos da região.</a:t>
             </a:r>
             <a:endParaRPr lang="en-US" dirty="0"/>
           </a:p>
@@ -693,7 +694,7 @@
           <a:p>
             <a:r>
               <a:rPr lang="en-US" dirty="0"/>
-              <a:t>Demo (60 s). Abrir o site pelo QR. Mostrar Urca: status, 3 passos, Estou bem. Trocar para Complexo do Alemão: outro risco, outra orientação. Mostrar a aba Guias ordenada por região.</a:t>
+              <a:t>Confiança e inclusão (40 s). A resposta ao caso misantropia está aqui: assinatura, dupla aprovação, auditoria. E ninguém fica de fora: idosos, pessoas com deficiência e quem tem pouca leitura.</a:t>
             </a:r>
             <a:endParaRPr lang="en-US" dirty="0"/>
           </a:p>
@@ -781,7 +782,7 @@
           <a:p>
             <a:r>
               <a:rPr lang="en-US" dirty="0"/>
-              <a:t>Governança (40 s). Segue a Lei 12.608/2012: União fornece, estado coordena, município executa. Nada de sistema pesado: navegador, formulário e celular.</a:t>
+              <a:t>Demo (60 s). Abrir o site pelo QR. Mostrar Urca: status, 3 passos, Estou bem. Trocar para Complexo do Alemão: outro risco, outra orientação. Mostrar a aba Guias ordenada por região.</a:t>
             </a:r>
             <a:endParaRPr lang="en-US" dirty="0"/>
           </a:p>
@@ -869,7 +870,7 @@
           <a:p>
             <a:r>
               <a:rPr lang="en-US" dirty="0"/>
-              <a:t>Viabilidade (40 s). O custo é baixo porque não criamos infraestrutura nova; o retorno, segundo o Banco Mundial, chega a 36 vezes.</a:t>
+              <a:t>Governança (40 s). Segue a Lei 12.608/2012: União fornece, estado coordena, município executa. Nada de sistema pesado: navegador, formulário e celular.</a:t>
             </a:r>
             <a:endParaRPr lang="en-US" dirty="0"/>
           </a:p>
@@ -957,7 +958,7 @@
           <a:p>
             <a:r>
               <a:rPr lang="en-US" dirty="0"/>
-              <a:t>Objetivos (30 s). Começar pelo Rio neste verão, expandir para os estados mais atingidos e chegar ao país inteiro.</a:t>
+              <a:t>Viabilidade (40 s). O custo é baixo porque não criamos infraestrutura nova; o retorno, segundo o Banco Mundial, chega a 36 vezes.</a:t>
             </a:r>
             <a:endParaRPr lang="en-US" dirty="0"/>
           </a:p>
@@ -1045,7 +1046,7 @@
           <a:p>
             <a:r>
               <a:rPr lang="en-US" dirty="0"/>
-              <a:t>Referências.</a:t>
+              <a:t>Objetivos (30 s). Começar pelo Rio neste verão, expandir para os estados mais atingidos e chegar ao país inteiro.</a:t>
             </a:r>
             <a:endParaRPr lang="en-US" dirty="0"/>
           </a:p>
@@ -1133,7 +1134,7 @@
           <a:p>
             <a:r>
               <a:rPr lang="en-US" dirty="0"/>
-              <a:t>Fechamento (20 s). Repetir a frase final e convidar a abrir o QR.</a:t>
+              <a:t>Referências.</a:t>
             </a:r>
             <a:endParaRPr lang="en-US" dirty="0"/>
           </a:p>
@@ -1157,6 +1158,94 @@
             <a:fld id="{F7021451-1387-4CA6-816F-3879F97B5CBC}" type="slidenum">
               <a:rPr lang="en-US"/>
               <a:t>16</a:t>
+            </a:fld>
+            <a:endParaRPr lang="en-US"/>
+          </a:p>
+        </p:txBody>
+      </p:sp>
+    </p:spTree>
+    <p:extLst>
+      <p:ext uri="{BB962C8B-B14F-4D97-AF65-F5344CB8AC3E}">
+        <p14:creationId xmlns:p14="http://schemas.microsoft.com/office/powerpoint/2010/main" val="1024086991"/>
+      </p:ext>
+    </p:extLst>
+  </p:cSld>
+  <p:clrMapOvr>
+    <a:masterClrMapping/>
+  </p:clrMapOvr>
+</p:notes>
+</file>
+
+<file path=ppt/notesSlides/notesSlide17.xml><?xml version="1.0" encoding="utf-8"?>
+<p:notes xmlns:a="http://schemas.openxmlformats.org/drawingml/2006/main" xmlns:r="http://schemas.openxmlformats.org/officeDocument/2006/relationships" xmlns:p="http://schemas.openxmlformats.org/presentationml/2006/main">
+  <p:cSld>
+    <p:spTree>
+      <p:nvGrpSpPr>
+        <p:cNvPr id="1" name=""/>
+        <p:cNvGrpSpPr/>
+        <p:nvPr/>
+      </p:nvGrpSpPr>
+      <p:grpSpPr>
+        <a:xfrm>
+          <a:off x="0" y="0"/>
+          <a:ext cx="0" cy="0"/>
+          <a:chOff x="0" y="0"/>
+          <a:chExt cx="0" cy="0"/>
+        </a:xfrm>
+      </p:grpSpPr>
+      <p:sp>
+        <p:nvSpPr>
+          <p:cNvPr id="2" name="Slide Image Placeholder 1"/>
+          <p:cNvSpPr>
+            <a:spLocks noGrp="1" noRot="1" noChangeAspect="1"/>
+          </p:cNvSpPr>
+          <p:nvPr>
+            <p:ph type="sldImg"/>
+          </p:nvPr>
+        </p:nvSpPr>
+        <p:spPr/>
+      </p:sp>
+      <p:sp>
+        <p:nvSpPr>
+          <p:cNvPr id="3" name="Notes Placeholder 2"/>
+          <p:cNvSpPr>
+            <a:spLocks noGrp="1"/>
+          </p:cNvSpPr>
+          <p:nvPr>
+            <p:ph type="body" idx="1"/>
+          </p:nvPr>
+        </p:nvSpPr>
+        <p:spPr/>
+        <p:txBody>
+          <a:bodyPr/>
+          <a:lstStyle/>
+          <a:p>
+            <a:r>
+              <a:rPr lang="en-US" dirty="0"/>
+              <a:t>Fechamento (20 s). Repetir a frase final e convidar a abrir o QR.</a:t>
+            </a:r>
+            <a:endParaRPr lang="en-US" dirty="0"/>
+          </a:p>
+        </p:txBody>
+      </p:sp>
+      <p:sp>
+        <p:nvSpPr>
+          <p:cNvPr id="4" name="Slide Number Placeholder 3"/>
+          <p:cNvSpPr>
+            <a:spLocks noGrp="1"/>
+          </p:cNvSpPr>
+          <p:nvPr>
+            <p:ph type="sldNum" sz="quarter" idx="10"/>
+          </p:nvPr>
+        </p:nvSpPr>
+        <p:spPr/>
+        <p:txBody>
+          <a:bodyPr/>
+          <a:lstStyle/>
+          <a:p>
+            <a:fld id="{F7021451-1387-4CA6-816F-3879F97B5CBC}" type="slidenum">
+              <a:rPr lang="en-US"/>
+              <a:t>17</a:t>
             </a:fld>
             <a:endParaRPr lang="en-US"/>
           </a:p>
@@ -2113,7 +2202,7 @@
         <p:txBody>
           <a:bodyPr wrap="square" rtlCol="0"/>
           <a:lstStyle>
-            <a:lvl1pPr indent="0" marL="0">
+            <a:lvl1pPr algn="l" indent="0" marL="0">
               <a:buNone/>
               <a:defRPr lang="en-US" sz="3000" b="1" dirty="0">
                 <a:solidFill>
@@ -2126,7 +2215,7 @@
             </a:lvl1pPr>
           </a:lstStyle>
           <a:p>
-            <a:pPr indent="0" marL="0">
+            <a:pPr algn="l" indent="0" marL="0">
               <a:buNone/>
             </a:pPr>
             <a:endParaRPr lang="en-US" sz="3000" dirty="0"/>
@@ -3041,7 +3130,7 @@
           <a:bodyPr wrap="square" lIns="0" tIns="0" rIns="0" bIns="0" rtlCol="0" anchor="t"/>
           <a:lstStyle/>
           <a:p>
-            <a:pPr indent="0" marL="0">
+            <a:pPr algn="l" indent="0" marL="0">
               <a:buNone/>
             </a:pPr>
             <a:r>
@@ -3053,34 +3142,52 @@
                 <a:ea typeface="Montserrat" pitchFamily="34" charset="-122"/>
                 <a:cs typeface="Montserrat" pitchFamily="34" charset="-120"/>
               </a:rPr>
-              <a:t>Seguro contra ataques. Feito para todos.</a:t>
+              <a:t>O que o cidadão vê: claro, calmo e em ordem.</a:t>
             </a:r>
             <a:endParaRPr lang="en-US" sz="3000" dirty="0"/>
           </a:p>
         </p:txBody>
       </p:sp>
-      <p:sp>
-        <p:nvSpPr>
-          <p:cNvPr id="3" name="Shape 1"/>
+      <p:pic>
+        <p:nvPicPr>
+          <p:cNvPr id="3" name="Image 0" descr="s-urca.png">    </p:cNvPr>
+          <p:cNvPicPr>
+            <a:picLocks noChangeAspect="1"/>
+          </p:cNvPicPr>
+          <p:nvPr/>
+        </p:nvPicPr>
+        <p:blipFill>
+          <a:blip r:embed="rId1"/>
+          <a:srcRect l="0" r="0" t="0" b="0"/>
+          <a:stretch/>
+        </p:blipFill>
+        <p:spPr>
+          <a:xfrm>
+            <a:off x="640080" y="1600200"/>
+            <a:ext cx="2377440" cy="3794760"/>
+          </a:xfrm>
+          <a:prstGeom prst="rect">
+            <a:avLst/>
+          </a:prstGeom>
+        </p:spPr>
+      </p:pic>
+      <p:sp>
+        <p:nvSpPr>
+          <p:cNvPr id="4" name="Shape 1"/>
           <p:cNvSpPr/>
           <p:nvPr/>
         </p:nvSpPr>
         <p:spPr>
           <a:xfrm>
-            <a:off x="502920" y="1737360"/>
-            <a:ext cx="5486400" cy="4069080"/>
-          </a:xfrm>
-          <a:prstGeom prst="roundRect">
-            <a:avLst>
-              <a:gd name="adj" fmla="val 2697"/>
-            </a:avLst>
-          </a:prstGeom>
-          <a:solidFill>
-            <a:srgbClr val="071D41"/>
-          </a:solidFill>
+            <a:off x="640080" y="1600200"/>
+            <a:ext cx="2377440" cy="3794760"/>
+          </a:xfrm>
+          <a:prstGeom prst="rect">
+            <a:avLst/>
+          </a:prstGeom>
           <a:ln w="12700">
             <a:solidFill>
-              <a:srgbClr val="071D41"/>
+              <a:srgbClr val="C9D2DE"/>
             </a:solidFill>
             <a:prstDash val="solid"/>
           </a:ln>
@@ -3088,47 +3195,166 @@
       </p:sp>
       <p:sp>
         <p:nvSpPr>
-          <p:cNvPr id="4" name="Shape 2"/>
+          <p:cNvPr id="5" name="Text 2"/>
+          <p:cNvSpPr txBox="1"/>
+          <p:nvPr/>
+        </p:nvSpPr>
+        <p:spPr>
+          <a:xfrm>
+            <a:off x="502920" y="5486400"/>
+            <a:ext cx="2651760" cy="548640"/>
+          </a:xfrm>
+          <a:prstGeom prst="rect">
+            <a:avLst/>
+          </a:prstGeom>
+          <a:noFill/>
+          <a:ln/>
+        </p:spPr>
+        <p:txBody>
+          <a:bodyPr wrap="square" lIns="0" tIns="0" rIns="0" bIns="0" rtlCol="0" anchor="t"/>
+          <a:lstStyle/>
+          <a:p>
+            <a:pPr algn="ctr" indent="0" marL="0">
+              <a:buNone/>
+            </a:pPr>
+            <a:r>
+              <a:rPr lang="en-US" sz="1400" b="1" dirty="0">
+                <a:solidFill>
+                  <a:srgbClr val="071D41"/>
+                </a:solidFill>
+              </a:rPr>
+              <a:t>Agora</a:t>
+            </a:r>
+            <a:endParaRPr lang="en-US" sz="1400" dirty="0"/>
+          </a:p>
+          <a:p>
+            <a:pPr algn="ctr" indent="0" marL="0">
+              <a:buNone/>
+            </a:pPr>
+            <a:r>
+              <a:rPr lang="en-US" sz="1200" dirty="0">
+                <a:solidFill>
+                  <a:srgbClr val="5D6673"/>
+                </a:solidFill>
+              </a:rPr>
+              <a:t>Status e 3 passos em ordem</a:t>
+            </a:r>
+            <a:endParaRPr lang="en-US" sz="1400" dirty="0"/>
+          </a:p>
+        </p:txBody>
+      </p:sp>
+      <p:pic>
+        <p:nvPicPr>
+          <p:cNvPr id="6" name="Image 1" descr="s-alertas.png">    </p:cNvPr>
+          <p:cNvPicPr>
+            <a:picLocks noChangeAspect="1"/>
+          </p:cNvPicPr>
+          <p:nvPr/>
+        </p:nvPicPr>
+        <p:blipFill>
+          <a:blip r:embed="rId2"/>
+          <a:srcRect l="0" r="0" t="0" b="0"/>
+          <a:stretch/>
+        </p:blipFill>
+        <p:spPr>
+          <a:xfrm>
+            <a:off x="3474720" y="1600200"/>
+            <a:ext cx="2377440" cy="3794760"/>
+          </a:xfrm>
+          <a:prstGeom prst="rect">
+            <a:avLst/>
+          </a:prstGeom>
+        </p:spPr>
+      </p:pic>
+      <p:sp>
+        <p:nvSpPr>
+          <p:cNvPr id="7" name="Shape 3"/>
           <p:cNvSpPr/>
           <p:nvPr/>
         </p:nvSpPr>
         <p:spPr>
           <a:xfrm>
-            <a:off x="822960" y="2011680"/>
-            <a:ext cx="731520" cy="731520"/>
-          </a:xfrm>
-          <a:prstGeom prst="ellipse">
-            <a:avLst/>
-          </a:prstGeom>
-          <a:solidFill>
-            <a:srgbClr val="E86F25"/>
-          </a:solidFill>
+            <a:off x="3474720" y="1600200"/>
+            <a:ext cx="2377440" cy="3794760"/>
+          </a:xfrm>
+          <a:prstGeom prst="rect">
+            <a:avLst/>
+          </a:prstGeom>
           <a:ln w="12700">
             <a:solidFill>
-              <a:srgbClr val="E86F25"/>
+              <a:srgbClr val="C9D2DE"/>
             </a:solidFill>
             <a:prstDash val="solid"/>
           </a:ln>
         </p:spPr>
       </p:sp>
+      <p:sp>
+        <p:nvSpPr>
+          <p:cNvPr id="8" name="Text 4"/>
+          <p:cNvSpPr txBox="1"/>
+          <p:nvPr/>
+        </p:nvSpPr>
+        <p:spPr>
+          <a:xfrm>
+            <a:off x="3337560" y="5486400"/>
+            <a:ext cx="2651760" cy="548640"/>
+          </a:xfrm>
+          <a:prstGeom prst="rect">
+            <a:avLst/>
+          </a:prstGeom>
+          <a:noFill/>
+          <a:ln/>
+        </p:spPr>
+        <p:txBody>
+          <a:bodyPr wrap="square" lIns="0" tIns="0" rIns="0" bIns="0" rtlCol="0" anchor="t"/>
+          <a:lstStyle/>
+          <a:p>
+            <a:pPr algn="ctr" indent="0" marL="0">
+              <a:buNone/>
+            </a:pPr>
+            <a:r>
+              <a:rPr lang="en-US" sz="1400" b="1" dirty="0">
+                <a:solidFill>
+                  <a:srgbClr val="071D41"/>
+                </a:solidFill>
+              </a:rPr>
+              <a:t>Isso é real?</a:t>
+            </a:r>
+            <a:endParaRPr lang="en-US" sz="1400" dirty="0"/>
+          </a:p>
+          <a:p>
+            <a:pPr algn="ctr" indent="0" marL="0">
+              <a:buNone/>
+            </a:pPr>
+            <a:r>
+              <a:rPr lang="en-US" sz="1200" dirty="0">
+                <a:solidFill>
+                  <a:srgbClr val="5D6673"/>
+                </a:solidFill>
+              </a:rPr>
+              <a:t>Alerta oficial × boato</a:t>
+            </a:r>
+            <a:endParaRPr lang="en-US" sz="1400" dirty="0"/>
+          </a:p>
+        </p:txBody>
+      </p:sp>
       <p:pic>
         <p:nvPicPr>
-          <p:cNvPr id="5" name="Image 0" descr="preencoded.png">    </p:cNvPr>
+          <p:cNvPr id="9" name="Image 2" descr="s-locais.png">    </p:cNvPr>
           <p:cNvPicPr>
             <a:picLocks noChangeAspect="1"/>
           </p:cNvPicPr>
           <p:nvPr/>
         </p:nvPicPr>
         <p:blipFill>
-          <a:blip r:embed="rId1"/>
-          <a:stretch>
-            <a:fillRect/>
-          </a:stretch>
+          <a:blip r:embed="rId3"/>
+          <a:srcRect l="0" r="0" t="0" b="0"/>
+          <a:stretch/>
         </p:blipFill>
         <p:spPr>
           <a:xfrm>
-            <a:off x="1005840" y="2194560"/>
-            <a:ext cx="365760" cy="365760"/>
+            <a:off x="6309360" y="1600200"/>
+            <a:ext cx="2377440" cy="3794760"/>
           </a:xfrm>
           <a:prstGeom prst="rect">
             <a:avLst/>
@@ -3137,177 +3363,21 @@
       </p:pic>
       <p:sp>
         <p:nvSpPr>
-          <p:cNvPr id="6" name="Text 3"/>
-          <p:cNvSpPr txBox="1"/>
-          <p:nvPr/>
-        </p:nvSpPr>
-        <p:spPr>
-          <a:xfrm>
-            <a:off x="1737360" y="2148840"/>
-            <a:ext cx="4023360" cy="457200"/>
-          </a:xfrm>
-          <a:prstGeom prst="rect">
-            <a:avLst/>
-          </a:prstGeom>
-          <a:noFill/>
-          <a:ln/>
-        </p:spPr>
-        <p:txBody>
-          <a:bodyPr wrap="square" lIns="0" tIns="0" rIns="0" bIns="0" rtlCol="0" anchor="t"/>
-          <a:lstStyle/>
-          <a:p>
-            <a:pPr indent="0" marL="0">
-              <a:buNone/>
-            </a:pPr>
-            <a:r>
-              <a:rPr lang="en-US" sz="2100" b="1" dirty="0">
-                <a:solidFill>
-                  <a:srgbClr val="FFFFFF"/>
-                </a:solidFill>
-                <a:latin typeface="Montserrat" pitchFamily="34" charset="0"/>
-                <a:ea typeface="Montserrat" pitchFamily="34" charset="-122"/>
-                <a:cs typeface="Montserrat" pitchFamily="34" charset="-120"/>
-              </a:rPr>
-              <a:t>Segurança e confiança</a:t>
-            </a:r>
-            <a:endParaRPr lang="en-US" sz="2100" dirty="0"/>
-          </a:p>
-        </p:txBody>
-      </p:sp>
-      <p:sp>
-        <p:nvSpPr>
-          <p:cNvPr id="7" name="Text 4"/>
-          <p:cNvSpPr txBox="1"/>
-          <p:nvPr/>
-        </p:nvSpPr>
-        <p:spPr>
-          <a:xfrm>
-            <a:off x="822960" y="2971800"/>
-            <a:ext cx="4937760" cy="2743200"/>
-          </a:xfrm>
-          <a:prstGeom prst="rect">
-            <a:avLst/>
-          </a:prstGeom>
-          <a:noFill/>
-          <a:ln/>
-        </p:spPr>
-        <p:txBody>
-          <a:bodyPr wrap="square" lIns="0" tIns="0" rIns="0" bIns="0" rtlCol="0" anchor="t"/>
-          <a:lstStyle/>
-          <a:p>
-            <a:pPr marL="342900" indent="-342900">
-              <a:spcAft>
-                <a:spcPts val="800"/>
-              </a:spcAft>
-              <a:buSzPct val="100000"/>
-              <a:buChar char="•"/>
-            </a:pPr>
-            <a:r>
-              <a:rPr lang="en-US" sz="1400" dirty="0">
-                <a:solidFill>
-                  <a:srgbClr val="FFFFFF"/>
-                </a:solidFill>
-              </a:rPr>
-              <a:t>Assinatura digital ICP-Brasil em cada alerta (padrão CAP): alerta falso não abre o app</a:t>
-            </a:r>
-            <a:endParaRPr lang="en-US" sz="1400" dirty="0"/>
-          </a:p>
-          <a:p>
-            <a:pPr marL="342900" indent="-342900">
-              <a:spcAft>
-                <a:spcPts val="800"/>
-              </a:spcAft>
-              <a:buSzPct val="100000"/>
-              <a:buChar char="•"/>
-            </a:pPr>
-            <a:r>
-              <a:rPr lang="en-US" sz="1400" dirty="0">
-                <a:solidFill>
-                  <a:srgbClr val="FFFFFF"/>
-                </a:solidFill>
-              </a:rPr>
-              <a:t>Login com dois fatores e dupla aprovação para disparar</a:t>
-            </a:r>
-            <a:endParaRPr lang="en-US" sz="1400" dirty="0"/>
-          </a:p>
-          <a:p>
-            <a:pPr marL="342900" indent="-342900">
-              <a:spcAft>
-                <a:spcPts val="800"/>
-              </a:spcAft>
-              <a:buSzPct val="100000"/>
-              <a:buChar char="•"/>
-            </a:pPr>
-            <a:r>
-              <a:rPr lang="en-US" sz="1400" dirty="0">
-                <a:solidFill>
-                  <a:srgbClr val="FFFFFF"/>
-                </a:solidFill>
-              </a:rPr>
-              <a:t>Registro público de auditoria: quem aprovou, quando e o quê</a:t>
-            </a:r>
-            <a:endParaRPr lang="en-US" sz="1400" dirty="0"/>
-          </a:p>
-          <a:p>
-            <a:pPr marL="342900" indent="-342900">
-              <a:spcAft>
-                <a:spcPts val="800"/>
-              </a:spcAft>
-              <a:buSzPct val="100000"/>
-              <a:buChar char="•"/>
-            </a:pPr>
-            <a:r>
-              <a:rPr lang="en-US" sz="1400" dirty="0">
-                <a:solidFill>
-                  <a:srgbClr val="FFFFFF"/>
-                </a:solidFill>
-              </a:rPr>
-              <a:t>Localização processada no aparelho, sem envio (LGPD)</a:t>
-            </a:r>
-            <a:endParaRPr lang="en-US" sz="1400" dirty="0"/>
-          </a:p>
-          <a:p>
-            <a:pPr marL="342900" indent="-342900">
-              <a:spcAft>
-                <a:spcPts val="800"/>
-              </a:spcAft>
-              <a:buSzPct val="100000"/>
-              <a:buChar char="•"/>
-            </a:pPr>
-            <a:r>
-              <a:rPr lang="en-US" sz="1400" dirty="0">
-                <a:solidFill>
-                  <a:srgbClr val="FFFFFF"/>
-                </a:solidFill>
-              </a:rPr>
-              <a:t>Linguagem calma, sem pânico: status e próximos passos</a:t>
-            </a:r>
-            <a:endParaRPr lang="en-US" sz="1400" dirty="0"/>
-          </a:p>
-        </p:txBody>
-      </p:sp>
-      <p:sp>
-        <p:nvSpPr>
-          <p:cNvPr id="8" name="Shape 5"/>
+          <p:cNvPr id="10" name="Shape 5"/>
           <p:cNvSpPr/>
           <p:nvPr/>
         </p:nvSpPr>
         <p:spPr>
           <a:xfrm>
-            <a:off x="6172200" y="1737360"/>
-            <a:ext cx="5486400" cy="4069080"/>
-          </a:xfrm>
-          <a:prstGeom prst="roundRect">
-            <a:avLst>
-              <a:gd name="adj" fmla="val 2697"/>
-            </a:avLst>
-          </a:prstGeom>
-          <a:solidFill>
-            <a:srgbClr val="F2F5FA"/>
-          </a:solidFill>
+            <a:off x="6309360" y="1600200"/>
+            <a:ext cx="2377440" cy="3794760"/>
+          </a:xfrm>
+          <a:prstGeom prst="rect">
+            <a:avLst/>
+          </a:prstGeom>
           <a:ln w="12700">
             <a:solidFill>
-              <a:srgbClr val="F2F5FA"/>
+              <a:srgbClr val="C9D2DE"/>
             </a:solidFill>
             <a:prstDash val="solid"/>
           </a:ln>
@@ -3315,199 +3385,144 @@
       </p:sp>
       <p:sp>
         <p:nvSpPr>
-          <p:cNvPr id="9" name="Shape 6"/>
+          <p:cNvPr id="11" name="Text 6"/>
+          <p:cNvSpPr txBox="1"/>
+          <p:nvPr/>
+        </p:nvSpPr>
+        <p:spPr>
+          <a:xfrm>
+            <a:off x="6172200" y="5486400"/>
+            <a:ext cx="2651760" cy="548640"/>
+          </a:xfrm>
+          <a:prstGeom prst="rect">
+            <a:avLst/>
+          </a:prstGeom>
+          <a:noFill/>
+          <a:ln/>
+        </p:spPr>
+        <p:txBody>
+          <a:bodyPr wrap="square" lIns="0" tIns="0" rIns="0" bIns="0" rtlCol="0" anchor="t"/>
+          <a:lstStyle/>
+          <a:p>
+            <a:pPr algn="ctr" indent="0" marL="0">
+              <a:buNone/>
+            </a:pPr>
+            <a:r>
+              <a:rPr lang="en-US" sz="1400" b="1" dirty="0">
+                <a:solidFill>
+                  <a:srgbClr val="071D41"/>
+                </a:solidFill>
+              </a:rPr>
+              <a:t>Locais seguros</a:t>
+            </a:r>
+            <a:endParaRPr lang="en-US" sz="1400" dirty="0"/>
+          </a:p>
+          <a:p>
+            <a:pPr algn="ctr" indent="0" marL="0">
+              <a:buNone/>
+            </a:pPr>
+            <a:r>
+              <a:rPr lang="en-US" sz="1200" dirty="0">
+                <a:solidFill>
+                  <a:srgbClr val="5D6673"/>
+                </a:solidFill>
+              </a:rPr>
+              <a:t>Cadastrados pelo município e estado</a:t>
+            </a:r>
+            <a:endParaRPr lang="en-US" sz="1400" dirty="0"/>
+          </a:p>
+        </p:txBody>
+      </p:sp>
+      <p:pic>
+        <p:nvPicPr>
+          <p:cNvPr id="12" name="Image 3" descr="s-guias.png">    </p:cNvPr>
+          <p:cNvPicPr>
+            <a:picLocks noChangeAspect="1"/>
+          </p:cNvPicPr>
+          <p:nvPr/>
+        </p:nvPicPr>
+        <p:blipFill>
+          <a:blip r:embed="rId4"/>
+          <a:srcRect l="0" r="0" t="0" b="0"/>
+          <a:stretch/>
+        </p:blipFill>
+        <p:spPr>
+          <a:xfrm>
+            <a:off x="9144000" y="1600200"/>
+            <a:ext cx="2377440" cy="3794760"/>
+          </a:xfrm>
+          <a:prstGeom prst="rect">
+            <a:avLst/>
+          </a:prstGeom>
+        </p:spPr>
+      </p:pic>
+      <p:sp>
+        <p:nvSpPr>
+          <p:cNvPr id="13" name="Shape 7"/>
           <p:cNvSpPr/>
           <p:nvPr/>
         </p:nvSpPr>
         <p:spPr>
           <a:xfrm>
-            <a:off x="6492240" y="2011680"/>
-            <a:ext cx="731520" cy="731520"/>
-          </a:xfrm>
-          <a:prstGeom prst="ellipse">
-            <a:avLst/>
-          </a:prstGeom>
-          <a:solidFill>
-            <a:srgbClr val="1351B4"/>
-          </a:solidFill>
+            <a:off x="9144000" y="1600200"/>
+            <a:ext cx="2377440" cy="3794760"/>
+          </a:xfrm>
+          <a:prstGeom prst="rect">
+            <a:avLst/>
+          </a:prstGeom>
           <a:ln w="12700">
             <a:solidFill>
-              <a:srgbClr val="1351B4"/>
+              <a:srgbClr val="C9D2DE"/>
             </a:solidFill>
             <a:prstDash val="solid"/>
           </a:ln>
         </p:spPr>
       </p:sp>
-      <p:pic>
-        <p:nvPicPr>
-          <p:cNvPr id="10" name="Image 1" descr="preencoded.png">    </p:cNvPr>
-          <p:cNvPicPr>
-            <a:picLocks noChangeAspect="1"/>
-          </p:cNvPicPr>
-          <p:nvPr/>
-        </p:nvPicPr>
-        <p:blipFill>
-          <a:blip r:embed="rId2"/>
-          <a:stretch>
-            <a:fillRect/>
-          </a:stretch>
-        </p:blipFill>
-        <p:spPr>
-          <a:xfrm>
-            <a:off x="6675120" y="2194560"/>
-            <a:ext cx="365760" cy="365760"/>
-          </a:xfrm>
-          <a:prstGeom prst="rect">
-            <a:avLst/>
-          </a:prstGeom>
-        </p:spPr>
-      </p:pic>
-      <p:sp>
-        <p:nvSpPr>
-          <p:cNvPr id="11" name="Text 7"/>
-          <p:cNvSpPr txBox="1"/>
-          <p:nvPr/>
-        </p:nvSpPr>
-        <p:spPr>
-          <a:xfrm>
-            <a:off x="7406640" y="2148840"/>
-            <a:ext cx="4023360" cy="457200"/>
-          </a:xfrm>
-          <a:prstGeom prst="rect">
-            <a:avLst/>
-          </a:prstGeom>
-          <a:noFill/>
-          <a:ln/>
-        </p:spPr>
-        <p:txBody>
-          <a:bodyPr wrap="square" lIns="0" tIns="0" rIns="0" bIns="0" rtlCol="0" anchor="t"/>
-          <a:lstStyle/>
-          <a:p>
-            <a:pPr indent="0" marL="0">
-              <a:buNone/>
-            </a:pPr>
-            <a:r>
-              <a:rPr lang="en-US" sz="2100" b="1" dirty="0">
+      <p:sp>
+        <p:nvSpPr>
+          <p:cNvPr id="14" name="Text 8"/>
+          <p:cNvSpPr txBox="1"/>
+          <p:nvPr/>
+        </p:nvSpPr>
+        <p:spPr>
+          <a:xfrm>
+            <a:off x="9006840" y="5486400"/>
+            <a:ext cx="2651760" cy="548640"/>
+          </a:xfrm>
+          <a:prstGeom prst="rect">
+            <a:avLst/>
+          </a:prstGeom>
+          <a:noFill/>
+          <a:ln/>
+        </p:spPr>
+        <p:txBody>
+          <a:bodyPr wrap="square" lIns="0" tIns="0" rIns="0" bIns="0" rtlCol="0" anchor="t"/>
+          <a:lstStyle/>
+          <a:p>
+            <a:pPr algn="ctr" indent="0" marL="0">
+              <a:buNone/>
+            </a:pPr>
+            <a:r>
+              <a:rPr lang="en-US" sz="1400" b="1" dirty="0">
                 <a:solidFill>
                   <a:srgbClr val="071D41"/>
                 </a:solidFill>
-                <a:latin typeface="Montserrat" pitchFamily="34" charset="0"/>
-                <a:ea typeface="Montserrat" pitchFamily="34" charset="-122"/>
-                <a:cs typeface="Montserrat" pitchFamily="34" charset="-120"/>
-              </a:rPr>
-              <a:t>Acessibilidade</a:t>
-            </a:r>
-            <a:endParaRPr lang="en-US" sz="2100" dirty="0"/>
-          </a:p>
-        </p:txBody>
-      </p:sp>
-      <p:sp>
-        <p:nvSpPr>
-          <p:cNvPr id="12" name="Text 8"/>
-          <p:cNvSpPr txBox="1"/>
-          <p:nvPr/>
-        </p:nvSpPr>
-        <p:spPr>
-          <a:xfrm>
-            <a:off x="6492240" y="2971800"/>
-            <a:ext cx="4937760" cy="2743200"/>
-          </a:xfrm>
-          <a:prstGeom prst="rect">
-            <a:avLst/>
-          </a:prstGeom>
-          <a:noFill/>
-          <a:ln/>
-        </p:spPr>
-        <p:txBody>
-          <a:bodyPr wrap="square" lIns="0" tIns="0" rIns="0" bIns="0" rtlCol="0" anchor="t"/>
-          <a:lstStyle/>
-          <a:p>
-            <a:pPr marL="342900" indent="-342900">
-              <a:spcAft>
-                <a:spcPts val="800"/>
-              </a:spcAft>
-              <a:buSzPct val="100000"/>
-              <a:buChar char="•"/>
-            </a:pPr>
-            <a:r>
-              <a:rPr lang="en-US" sz="1400" dirty="0">
-                <a:solidFill>
-                  <a:srgbClr val="1B1B1B"/>
-                </a:solidFill>
-              </a:rPr>
-              <a:t>Uma pergunta no primeiro acesso define o perfil</a:t>
+              </a:rPr>
+              <a:t>Guias</a:t>
             </a:r>
             <a:endParaRPr lang="en-US" sz="1400" dirty="0"/>
           </a:p>
           <a:p>
-            <a:pPr marL="342900" indent="-342900">
-              <a:spcAft>
-                <a:spcPts val="800"/>
-              </a:spcAft>
-              <a:buSzPct val="100000"/>
-              <a:buChar char="•"/>
-            </a:pPr>
-            <a:r>
-              <a:rPr lang="en-US" sz="1400" dirty="0">
-                <a:solidFill>
-                  <a:srgbClr val="1B1B1B"/>
-                </a:solidFill>
-              </a:rPr>
-              <a:t>Pessoa idosa: letra grande e linguagem simples</a:t>
-            </a:r>
-            <a:endParaRPr lang="en-US" sz="1400" dirty="0"/>
-          </a:p>
-          <a:p>
-            <a:pPr marL="342900" indent="-342900">
-              <a:spcAft>
-                <a:spcPts val="800"/>
-              </a:spcAft>
-              <a:buSzPct val="100000"/>
-              <a:buChar char="•"/>
-            </a:pPr>
-            <a:r>
-              <a:rPr lang="en-US" sz="1400" dirty="0">
-                <a:solidFill>
-                  <a:srgbClr val="1B1B1B"/>
-                </a:solidFill>
-              </a:rPr>
-              <a:t>Baixa visão: alto contraste; quem prefere ouvir: leitura em voz alta</a:t>
-            </a:r>
-            <a:endParaRPr lang="en-US" sz="1400" dirty="0"/>
-          </a:p>
-          <a:p>
-            <a:pPr marL="342900" indent="-342900">
-              <a:spcAft>
-                <a:spcPts val="800"/>
-              </a:spcAft>
-              <a:buSzPct val="100000"/>
-              <a:buChar char="•"/>
-            </a:pPr>
-            <a:r>
-              <a:rPr lang="en-US" sz="1400" dirty="0">
-                <a:solidFill>
-                  <a:srgbClr val="1B1B1B"/>
-                </a:solidFill>
-              </a:rPr>
-              <a:t>Pessoa surda: vídeo em Libras em cada alerta</a:t>
-            </a:r>
-            <a:endParaRPr lang="en-US" sz="1400" dirty="0"/>
-          </a:p>
-          <a:p>
-            <a:pPr marL="342900" indent="-342900">
-              <a:spcAft>
-                <a:spcPts val="800"/>
-              </a:spcAft>
-              <a:buSzPct val="100000"/>
-              <a:buChar char="•"/>
-            </a:pPr>
-            <a:r>
-              <a:rPr lang="en-US" sz="1400" dirty="0">
-                <a:solidFill>
-                  <a:srgbClr val="1B1B1B"/>
-                </a:solidFill>
-              </a:rPr>
-              <a:t>Meta: WCAG 2.1 nível AA</a:t>
+            <a:pPr algn="ctr" indent="0" marL="0">
+              <a:buNone/>
+            </a:pPr>
+            <a:r>
+              <a:rPr lang="en-US" sz="1200" dirty="0">
+                <a:solidFill>
+                  <a:srgbClr val="5D6673"/>
+                </a:solidFill>
+              </a:rPr>
+              <a:t>Ordenados pelos riscos da região</a:t>
             </a:r>
             <a:endParaRPr lang="en-US" sz="1400" dirty="0"/>
           </a:p>
@@ -3606,7 +3621,7 @@
           <a:bodyPr wrap="square" lIns="0" tIns="0" rIns="0" bIns="0" rtlCol="0" anchor="t"/>
           <a:lstStyle/>
           <a:p>
-            <a:pPr indent="0" marL="0">
+            <a:pPr algn="l" indent="0" marL="0">
               <a:buNone/>
             </a:pPr>
             <a:r>
@@ -3618,311 +3633,26 @@
                 <a:ea typeface="Montserrat" pitchFamily="34" charset="-122"/>
                 <a:cs typeface="Montserrat" pitchFamily="34" charset="-120"/>
               </a:rPr>
-              <a:t>Experimente agora: cada bairro, a sua orientação.</a:t>
+              <a:t>Seguro contra ataques. Feito para todos.</a:t>
             </a:r>
             <a:endParaRPr lang="en-US" sz="3000" dirty="0"/>
           </a:p>
         </p:txBody>
       </p:sp>
-      <p:pic>
-        <p:nvPicPr>
-          <p:cNvPr id="3" name="Image 0" descr="s-urca.png">    </p:cNvPr>
-          <p:cNvPicPr>
-            <a:picLocks noChangeAspect="1"/>
-          </p:cNvPicPr>
-          <p:nvPr/>
-        </p:nvPicPr>
-        <p:blipFill>
-          <a:blip r:embed="rId1"/>
-          <a:srcRect l="0" r="0" t="0" b="0"/>
-          <a:stretch/>
-        </p:blipFill>
-        <p:spPr>
-          <a:xfrm>
-            <a:off x="502920" y="1645920"/>
-            <a:ext cx="2377440" cy="3657600"/>
-          </a:xfrm>
-          <a:prstGeom prst="rect">
-            <a:avLst/>
-          </a:prstGeom>
-        </p:spPr>
-      </p:pic>
-      <p:sp>
-        <p:nvSpPr>
-          <p:cNvPr id="4" name="Shape 1"/>
+      <p:sp>
+        <p:nvSpPr>
+          <p:cNvPr id="3" name="Shape 1"/>
           <p:cNvSpPr/>
           <p:nvPr/>
         </p:nvSpPr>
         <p:spPr>
           <a:xfrm>
-            <a:off x="502920" y="1645920"/>
-            <a:ext cx="2377440" cy="3657600"/>
-          </a:xfrm>
-          <a:prstGeom prst="rect">
-            <a:avLst/>
-          </a:prstGeom>
-          <a:ln w="12700">
-            <a:solidFill>
-              <a:srgbClr val="C9D2DE"/>
-            </a:solidFill>
-            <a:prstDash val="solid"/>
-          </a:ln>
-        </p:spPr>
-      </p:sp>
-      <p:sp>
-        <p:nvSpPr>
-          <p:cNvPr id="5" name="Text 2"/>
-          <p:cNvSpPr txBox="1"/>
-          <p:nvPr/>
-        </p:nvSpPr>
-        <p:spPr>
-          <a:xfrm>
-            <a:off x="502920" y="5394960"/>
-            <a:ext cx="2377440" cy="548640"/>
-          </a:xfrm>
-          <a:prstGeom prst="rect">
-            <a:avLst/>
-          </a:prstGeom>
-          <a:noFill/>
-          <a:ln/>
-        </p:spPr>
-        <p:txBody>
-          <a:bodyPr wrap="square" lIns="0" tIns="0" rIns="0" bIns="0" rtlCol="0" anchor="t"/>
-          <a:lstStyle/>
-          <a:p>
-            <a:pPr algn="ctr" indent="0" marL="0">
-              <a:buNone/>
-            </a:pPr>
-            <a:r>
-              <a:rPr lang="en-US" sz="1300" b="1" dirty="0">
-                <a:solidFill>
-                  <a:srgbClr val="071D41"/>
-                </a:solidFill>
-              </a:rPr>
-              <a:t>Urca (RJ)</a:t>
-            </a:r>
-            <a:endParaRPr lang="en-US" sz="1300" dirty="0"/>
-          </a:p>
-          <a:p>
-            <a:pPr algn="ctr" indent="0" marL="0">
-              <a:buNone/>
-            </a:pPr>
-            <a:r>
-              <a:rPr lang="en-US" sz="1300" dirty="0">
-                <a:solidFill>
-                  <a:srgbClr val="5D6673"/>
-                </a:solidFill>
-              </a:rPr>
-              <a:t>Calor extremo</a:t>
-            </a:r>
-            <a:endParaRPr lang="en-US" sz="1300" dirty="0"/>
-          </a:p>
-        </p:txBody>
-      </p:sp>
-      <p:pic>
-        <p:nvPicPr>
-          <p:cNvPr id="6" name="Image 1" descr="s-alemao.png">    </p:cNvPr>
-          <p:cNvPicPr>
-            <a:picLocks noChangeAspect="1"/>
-          </p:cNvPicPr>
-          <p:nvPr/>
-        </p:nvPicPr>
-        <p:blipFill>
-          <a:blip r:embed="rId2"/>
-          <a:srcRect l="0" r="0" t="0" b="0"/>
-          <a:stretch/>
-        </p:blipFill>
-        <p:spPr>
-          <a:xfrm>
-            <a:off x="3200400" y="1645920"/>
-            <a:ext cx="2377440" cy="3657600"/>
-          </a:xfrm>
-          <a:prstGeom prst="rect">
-            <a:avLst/>
-          </a:prstGeom>
-        </p:spPr>
-      </p:pic>
-      <p:sp>
-        <p:nvSpPr>
-          <p:cNvPr id="7" name="Shape 3"/>
-          <p:cNvSpPr/>
-          <p:nvPr/>
-        </p:nvSpPr>
-        <p:spPr>
-          <a:xfrm>
-            <a:off x="3200400" y="1645920"/>
-            <a:ext cx="2377440" cy="3657600"/>
-          </a:xfrm>
-          <a:prstGeom prst="rect">
-            <a:avLst/>
-          </a:prstGeom>
-          <a:ln w="12700">
-            <a:solidFill>
-              <a:srgbClr val="C9D2DE"/>
-            </a:solidFill>
-            <a:prstDash val="solid"/>
-          </a:ln>
-        </p:spPr>
-      </p:sp>
-      <p:sp>
-        <p:nvSpPr>
-          <p:cNvPr id="8" name="Text 4"/>
-          <p:cNvSpPr txBox="1"/>
-          <p:nvPr/>
-        </p:nvSpPr>
-        <p:spPr>
-          <a:xfrm>
-            <a:off x="3200400" y="5394960"/>
-            <a:ext cx="2377440" cy="548640"/>
-          </a:xfrm>
-          <a:prstGeom prst="rect">
-            <a:avLst/>
-          </a:prstGeom>
-          <a:noFill/>
-          <a:ln/>
-        </p:spPr>
-        <p:txBody>
-          <a:bodyPr wrap="square" lIns="0" tIns="0" rIns="0" bIns="0" rtlCol="0" anchor="t"/>
-          <a:lstStyle/>
-          <a:p>
-            <a:pPr algn="ctr" indent="0" marL="0">
-              <a:buNone/>
-            </a:pPr>
-            <a:r>
-              <a:rPr lang="en-US" sz="1300" b="1" dirty="0">
-                <a:solidFill>
-                  <a:srgbClr val="071D41"/>
-                </a:solidFill>
-              </a:rPr>
-              <a:t>Complexo do Alemão (RJ)</a:t>
-            </a:r>
-            <a:endParaRPr lang="en-US" sz="1300" dirty="0"/>
-          </a:p>
-          <a:p>
-            <a:pPr algn="ctr" indent="0" marL="0">
-              <a:buNone/>
-            </a:pPr>
-            <a:r>
-              <a:rPr lang="en-US" sz="1300" dirty="0">
-                <a:solidFill>
-                  <a:srgbClr val="5D6673"/>
-                </a:solidFill>
-              </a:rPr>
-              <a:t>Risco de deslizamento</a:t>
-            </a:r>
-            <a:endParaRPr lang="en-US" sz="1300" dirty="0"/>
-          </a:p>
-        </p:txBody>
-      </p:sp>
-      <p:pic>
-        <p:nvPicPr>
-          <p:cNvPr id="9" name="Image 2" descr="s-pb.png">    </p:cNvPr>
-          <p:cNvPicPr>
-            <a:picLocks noChangeAspect="1"/>
-          </p:cNvPicPr>
-          <p:nvPr/>
-        </p:nvPicPr>
-        <p:blipFill>
-          <a:blip r:embed="rId3"/>
-          <a:srcRect l="0" r="0" t="0" b="0"/>
-          <a:stretch/>
-        </p:blipFill>
-        <p:spPr>
-          <a:xfrm>
-            <a:off x="5897880" y="1645920"/>
-            <a:ext cx="2377440" cy="3657600"/>
-          </a:xfrm>
-          <a:prstGeom prst="rect">
-            <a:avLst/>
-          </a:prstGeom>
-        </p:spPr>
-      </p:pic>
-      <p:sp>
-        <p:nvSpPr>
-          <p:cNvPr id="10" name="Shape 5"/>
-          <p:cNvSpPr/>
-          <p:nvPr/>
-        </p:nvSpPr>
-        <p:spPr>
-          <a:xfrm>
-            <a:off x="5897880" y="1645920"/>
-            <a:ext cx="2377440" cy="3657600"/>
-          </a:xfrm>
-          <a:prstGeom prst="rect">
-            <a:avLst/>
-          </a:prstGeom>
-          <a:ln w="12700">
-            <a:solidFill>
-              <a:srgbClr val="C9D2DE"/>
-            </a:solidFill>
-            <a:prstDash val="solid"/>
-          </a:ln>
-        </p:spPr>
-      </p:sp>
-      <p:sp>
-        <p:nvSpPr>
-          <p:cNvPr id="11" name="Text 6"/>
-          <p:cNvSpPr txBox="1"/>
-          <p:nvPr/>
-        </p:nvSpPr>
-        <p:spPr>
-          <a:xfrm>
-            <a:off x="5897880" y="5394960"/>
-            <a:ext cx="2377440" cy="548640"/>
-          </a:xfrm>
-          <a:prstGeom prst="rect">
-            <a:avLst/>
-          </a:prstGeom>
-          <a:noFill/>
-          <a:ln/>
-        </p:spPr>
-        <p:txBody>
-          <a:bodyPr wrap="square" lIns="0" tIns="0" rIns="0" bIns="0" rtlCol="0" anchor="t"/>
-          <a:lstStyle/>
-          <a:p>
-            <a:pPr algn="ctr" indent="0" marL="0">
-              <a:buNone/>
-            </a:pPr>
-            <a:r>
-              <a:rPr lang="en-US" sz="1300" b="1" dirty="0">
-                <a:solidFill>
-                  <a:srgbClr val="071D41"/>
-                </a:solidFill>
-              </a:rPr>
-              <a:t>Patos (PB)</a:t>
-            </a:r>
-            <a:endParaRPr lang="en-US" sz="1300" dirty="0"/>
-          </a:p>
-          <a:p>
-            <a:pPr algn="ctr" indent="0" marL="0">
-              <a:buNone/>
-            </a:pPr>
-            <a:r>
-              <a:rPr lang="en-US" sz="1300" dirty="0">
-                <a:solidFill>
-                  <a:srgbClr val="5D6673"/>
-                </a:solidFill>
-              </a:rPr>
-              <a:t>Seca severa</a:t>
-            </a:r>
-            <a:endParaRPr lang="en-US" sz="1300" dirty="0"/>
-          </a:p>
-        </p:txBody>
-      </p:sp>
-      <p:sp>
-        <p:nvSpPr>
-          <p:cNvPr id="12" name="Shape 7"/>
-          <p:cNvSpPr/>
-          <p:nvPr/>
-        </p:nvSpPr>
-        <p:spPr>
-          <a:xfrm>
-            <a:off x="8732520" y="1645920"/>
-            <a:ext cx="2926080" cy="4297680"/>
+            <a:off x="502920" y="1737360"/>
+            <a:ext cx="5486400" cy="4069080"/>
           </a:xfrm>
           <a:prstGeom prst="roundRect">
             <a:avLst>
-              <a:gd name="adj" fmla="val 3750"/>
+              <a:gd name="adj" fmla="val 2697"/>
             </a:avLst>
           </a:prstGeom>
           <a:solidFill>
@@ -3936,24 +3666,49 @@
           </a:ln>
         </p:spPr>
       </p:sp>
+      <p:sp>
+        <p:nvSpPr>
+          <p:cNvPr id="4" name="Shape 2"/>
+          <p:cNvSpPr/>
+          <p:nvPr/>
+        </p:nvSpPr>
+        <p:spPr>
+          <a:xfrm>
+            <a:off x="822960" y="2011680"/>
+            <a:ext cx="731520" cy="731520"/>
+          </a:xfrm>
+          <a:prstGeom prst="ellipse">
+            <a:avLst/>
+          </a:prstGeom>
+          <a:solidFill>
+            <a:srgbClr val="E86F25"/>
+          </a:solidFill>
+          <a:ln w="12700">
+            <a:solidFill>
+              <a:srgbClr val="E86F25"/>
+            </a:solidFill>
+            <a:prstDash val="solid"/>
+          </a:ln>
+        </p:spPr>
+      </p:sp>
       <p:pic>
         <p:nvPicPr>
-          <p:cNvPr id="13" name="Image 3" descr="qr-urca.png">    </p:cNvPr>
+          <p:cNvPr id="5" name="Image 0" descr="preencoded.png">    </p:cNvPr>
           <p:cNvPicPr>
             <a:picLocks noChangeAspect="1"/>
           </p:cNvPicPr>
           <p:nvPr/>
         </p:nvPicPr>
         <p:blipFill>
-          <a:blip r:embed="rId4"/>
+          <a:blip r:embed="rId1"/>
           <a:stretch>
             <a:fillRect/>
           </a:stretch>
         </p:blipFill>
         <p:spPr>
           <a:xfrm>
-            <a:off x="9006840" y="1920240"/>
-            <a:ext cx="2377440" cy="2377440"/>
+            <a:off x="1005840" y="2194560"/>
+            <a:ext cx="365760" cy="365760"/>
           </a:xfrm>
           <a:prstGeom prst="rect">
             <a:avLst/>
@@ -3962,109 +3717,379 @@
       </p:pic>
       <p:sp>
         <p:nvSpPr>
-          <p:cNvPr id="14" name="Text 8"/>
-          <p:cNvSpPr txBox="1"/>
-          <p:nvPr/>
-        </p:nvSpPr>
-        <p:spPr>
-          <a:xfrm>
-            <a:off x="8732520" y="4434840"/>
-            <a:ext cx="2926080" cy="365760"/>
-          </a:xfrm>
-          <a:prstGeom prst="rect">
-            <a:avLst/>
-          </a:prstGeom>
-          <a:noFill/>
-          <a:ln/>
-        </p:spPr>
-        <p:txBody>
-          <a:bodyPr wrap="square" lIns="0" tIns="0" rIns="0" bIns="0" rtlCol="0" anchor="t"/>
-          <a:lstStyle/>
-          <a:p>
-            <a:pPr algn="ctr" indent="0" marL="0">
-              <a:buNone/>
-            </a:pPr>
-            <a:r>
-              <a:rPr lang="en-US" sz="1600" b="1" dirty="0">
+          <p:cNvPr id="6" name="Text 3"/>
+          <p:cNvSpPr txBox="1"/>
+          <p:nvPr/>
+        </p:nvSpPr>
+        <p:spPr>
+          <a:xfrm>
+            <a:off x="1737360" y="2148840"/>
+            <a:ext cx="4023360" cy="457200"/>
+          </a:xfrm>
+          <a:prstGeom prst="rect">
+            <a:avLst/>
+          </a:prstGeom>
+          <a:noFill/>
+          <a:ln/>
+        </p:spPr>
+        <p:txBody>
+          <a:bodyPr wrap="square" lIns="0" tIns="0" rIns="0" bIns="0" rtlCol="0" anchor="t"/>
+          <a:lstStyle/>
+          <a:p>
+            <a:pPr indent="0" marL="0">
+              <a:buNone/>
+            </a:pPr>
+            <a:r>
+              <a:rPr lang="en-US" sz="2100" b="1" dirty="0">
                 <a:solidFill>
                   <a:srgbClr val="FFFFFF"/>
                 </a:solidFill>
-              </a:rPr>
-              <a:t>Aponte a câmera</a:t>
-            </a:r>
-            <a:endParaRPr lang="en-US" sz="1600" dirty="0"/>
-          </a:p>
-        </p:txBody>
-      </p:sp>
-      <p:sp>
-        <p:nvSpPr>
-          <p:cNvPr id="15" name="Text 9"/>
-          <p:cNvSpPr txBox="1"/>
-          <p:nvPr/>
-        </p:nvSpPr>
-        <p:spPr>
-          <a:xfrm>
-            <a:off x="8732520" y="4800600"/>
-            <a:ext cx="2926080" cy="320040"/>
-          </a:xfrm>
-          <a:prstGeom prst="rect">
-            <a:avLst/>
-          </a:prstGeom>
-          <a:noFill/>
-          <a:ln/>
-        </p:spPr>
-        <p:txBody>
-          <a:bodyPr wrap="square" lIns="0" tIns="0" rIns="0" bIns="0" rtlCol="0" anchor="t"/>
-          <a:lstStyle/>
-          <a:p>
-            <a:pPr algn="ctr" indent="0" marL="0">
-              <a:buNone/>
-            </a:pPr>
-            <a:r>
-              <a:rPr lang="en-US" sz="1100" dirty="0">
-                <a:solidFill>
-                  <a:srgbClr val="C9D7EE"/>
-                </a:solidFill>
-              </a:rPr>
-              <a:t>brasilseguro.kbrianps.com.br/rj/urca</a:t>
-            </a:r>
-            <a:endParaRPr lang="en-US" sz="1100" dirty="0"/>
-          </a:p>
-        </p:txBody>
-      </p:sp>
-      <p:sp>
-        <p:nvSpPr>
-          <p:cNvPr id="16" name="Text 10"/>
-          <p:cNvSpPr txBox="1"/>
-          <p:nvPr/>
-        </p:nvSpPr>
-        <p:spPr>
-          <a:xfrm>
-            <a:off x="8732520" y="5212080"/>
-            <a:ext cx="2926080" cy="548640"/>
-          </a:xfrm>
-          <a:prstGeom prst="rect">
-            <a:avLst/>
-          </a:prstGeom>
-          <a:noFill/>
-          <a:ln/>
-        </p:spPr>
-        <p:txBody>
-          <a:bodyPr wrap="square" lIns="0" tIns="0" rIns="0" bIns="0" rtlCol="0" anchor="t"/>
-          <a:lstStyle/>
-          <a:p>
-            <a:pPr algn="ctr" indent="0" marL="0">
-              <a:buNone/>
-            </a:pPr>
-            <a:r>
-              <a:rPr lang="en-US" sz="1050" dirty="0">
-                <a:solidFill>
-                  <a:srgbClr val="9FB3D1"/>
-                </a:solidFill>
-              </a:rPr>
-              <a:t>Protótipo estático com dados simulados · celular e computador</a:t>
-            </a:r>
-            <a:endParaRPr lang="en-US" sz="1050" dirty="0"/>
+                <a:latin typeface="Montserrat" pitchFamily="34" charset="0"/>
+                <a:ea typeface="Montserrat" pitchFamily="34" charset="-122"/>
+                <a:cs typeface="Montserrat" pitchFamily="34" charset="-120"/>
+              </a:rPr>
+              <a:t>Segurança e confiança</a:t>
+            </a:r>
+            <a:endParaRPr lang="en-US" sz="2100" dirty="0"/>
+          </a:p>
+        </p:txBody>
+      </p:sp>
+      <p:sp>
+        <p:nvSpPr>
+          <p:cNvPr id="7" name="Text 4"/>
+          <p:cNvSpPr txBox="1"/>
+          <p:nvPr/>
+        </p:nvSpPr>
+        <p:spPr>
+          <a:xfrm>
+            <a:off x="822960" y="2971800"/>
+            <a:ext cx="4937760" cy="2743200"/>
+          </a:xfrm>
+          <a:prstGeom prst="rect">
+            <a:avLst/>
+          </a:prstGeom>
+          <a:noFill/>
+          <a:ln/>
+        </p:spPr>
+        <p:txBody>
+          <a:bodyPr wrap="square" lIns="0" tIns="0" rIns="0" bIns="0" rtlCol="0" anchor="t"/>
+          <a:lstStyle/>
+          <a:p>
+            <a:pPr marL="342900" indent="-342900">
+              <a:spcAft>
+                <a:spcPts val="800"/>
+              </a:spcAft>
+              <a:buSzPct val="100000"/>
+              <a:buChar char="•"/>
+            </a:pPr>
+            <a:r>
+              <a:rPr lang="en-US" sz="1400" dirty="0">
+                <a:solidFill>
+                  <a:srgbClr val="FFFFFF"/>
+                </a:solidFill>
+              </a:rPr>
+              <a:t>Assinatura digital ICP-Brasil em cada alerta (padrão CAP): alerta falso não abre o app</a:t>
+            </a:r>
+            <a:endParaRPr lang="en-US" sz="1400" dirty="0"/>
+          </a:p>
+          <a:p>
+            <a:pPr marL="342900" indent="-342900">
+              <a:spcAft>
+                <a:spcPts val="800"/>
+              </a:spcAft>
+              <a:buSzPct val="100000"/>
+              <a:buChar char="•"/>
+            </a:pPr>
+            <a:r>
+              <a:rPr lang="en-US" sz="1400" dirty="0">
+                <a:solidFill>
+                  <a:srgbClr val="FFFFFF"/>
+                </a:solidFill>
+              </a:rPr>
+              <a:t>Login com dois fatores e dupla aprovação para disparar</a:t>
+            </a:r>
+            <a:endParaRPr lang="en-US" sz="1400" dirty="0"/>
+          </a:p>
+          <a:p>
+            <a:pPr marL="342900" indent="-342900">
+              <a:spcAft>
+                <a:spcPts val="800"/>
+              </a:spcAft>
+              <a:buSzPct val="100000"/>
+              <a:buChar char="•"/>
+            </a:pPr>
+            <a:r>
+              <a:rPr lang="en-US" sz="1400" dirty="0">
+                <a:solidFill>
+                  <a:srgbClr val="FFFFFF"/>
+                </a:solidFill>
+              </a:rPr>
+              <a:t>Registro público de auditoria: quem aprovou, quando e o quê</a:t>
+            </a:r>
+            <a:endParaRPr lang="en-US" sz="1400" dirty="0"/>
+          </a:p>
+          <a:p>
+            <a:pPr marL="342900" indent="-342900">
+              <a:spcAft>
+                <a:spcPts val="800"/>
+              </a:spcAft>
+              <a:buSzPct val="100000"/>
+              <a:buChar char="•"/>
+            </a:pPr>
+            <a:r>
+              <a:rPr lang="en-US" sz="1400" dirty="0">
+                <a:solidFill>
+                  <a:srgbClr val="FFFFFF"/>
+                </a:solidFill>
+              </a:rPr>
+              <a:t>Localização processada no aparelho, sem envio (LGPD)</a:t>
+            </a:r>
+            <a:endParaRPr lang="en-US" sz="1400" dirty="0"/>
+          </a:p>
+          <a:p>
+            <a:pPr marL="342900" indent="-342900">
+              <a:spcAft>
+                <a:spcPts val="800"/>
+              </a:spcAft>
+              <a:buSzPct val="100000"/>
+              <a:buChar char="•"/>
+            </a:pPr>
+            <a:r>
+              <a:rPr lang="en-US" sz="1400" dirty="0">
+                <a:solidFill>
+                  <a:srgbClr val="FFFFFF"/>
+                </a:solidFill>
+              </a:rPr>
+              <a:t>Linguagem calma, sem pânico: status e próximos passos</a:t>
+            </a:r>
+            <a:endParaRPr lang="en-US" sz="1400" dirty="0"/>
+          </a:p>
+        </p:txBody>
+      </p:sp>
+      <p:sp>
+        <p:nvSpPr>
+          <p:cNvPr id="8" name="Shape 5"/>
+          <p:cNvSpPr/>
+          <p:nvPr/>
+        </p:nvSpPr>
+        <p:spPr>
+          <a:xfrm>
+            <a:off x="6172200" y="1737360"/>
+            <a:ext cx="5486400" cy="4069080"/>
+          </a:xfrm>
+          <a:prstGeom prst="roundRect">
+            <a:avLst>
+              <a:gd name="adj" fmla="val 2697"/>
+            </a:avLst>
+          </a:prstGeom>
+          <a:solidFill>
+            <a:srgbClr val="F2F5FA"/>
+          </a:solidFill>
+          <a:ln w="12700">
+            <a:solidFill>
+              <a:srgbClr val="F2F5FA"/>
+            </a:solidFill>
+            <a:prstDash val="solid"/>
+          </a:ln>
+        </p:spPr>
+      </p:sp>
+      <p:sp>
+        <p:nvSpPr>
+          <p:cNvPr id="9" name="Shape 6"/>
+          <p:cNvSpPr/>
+          <p:nvPr/>
+        </p:nvSpPr>
+        <p:spPr>
+          <a:xfrm>
+            <a:off x="6492240" y="2011680"/>
+            <a:ext cx="731520" cy="731520"/>
+          </a:xfrm>
+          <a:prstGeom prst="ellipse">
+            <a:avLst/>
+          </a:prstGeom>
+          <a:solidFill>
+            <a:srgbClr val="1351B4"/>
+          </a:solidFill>
+          <a:ln w="12700">
+            <a:solidFill>
+              <a:srgbClr val="1351B4"/>
+            </a:solidFill>
+            <a:prstDash val="solid"/>
+          </a:ln>
+        </p:spPr>
+      </p:sp>
+      <p:pic>
+        <p:nvPicPr>
+          <p:cNvPr id="10" name="Image 1" descr="preencoded.png">    </p:cNvPr>
+          <p:cNvPicPr>
+            <a:picLocks noChangeAspect="1"/>
+          </p:cNvPicPr>
+          <p:nvPr/>
+        </p:nvPicPr>
+        <p:blipFill>
+          <a:blip r:embed="rId2"/>
+          <a:stretch>
+            <a:fillRect/>
+          </a:stretch>
+        </p:blipFill>
+        <p:spPr>
+          <a:xfrm>
+            <a:off x="6675120" y="2194560"/>
+            <a:ext cx="365760" cy="365760"/>
+          </a:xfrm>
+          <a:prstGeom prst="rect">
+            <a:avLst/>
+          </a:prstGeom>
+        </p:spPr>
+      </p:pic>
+      <p:sp>
+        <p:nvSpPr>
+          <p:cNvPr id="11" name="Text 7"/>
+          <p:cNvSpPr txBox="1"/>
+          <p:nvPr/>
+        </p:nvSpPr>
+        <p:spPr>
+          <a:xfrm>
+            <a:off x="7406640" y="2148840"/>
+            <a:ext cx="4023360" cy="457200"/>
+          </a:xfrm>
+          <a:prstGeom prst="rect">
+            <a:avLst/>
+          </a:prstGeom>
+          <a:noFill/>
+          <a:ln/>
+        </p:spPr>
+        <p:txBody>
+          <a:bodyPr wrap="square" lIns="0" tIns="0" rIns="0" bIns="0" rtlCol="0" anchor="t"/>
+          <a:lstStyle/>
+          <a:p>
+            <a:pPr indent="0" marL="0">
+              <a:buNone/>
+            </a:pPr>
+            <a:r>
+              <a:rPr lang="en-US" sz="2100" b="1" dirty="0">
+                <a:solidFill>
+                  <a:srgbClr val="071D41"/>
+                </a:solidFill>
+                <a:latin typeface="Montserrat" pitchFamily="34" charset="0"/>
+                <a:ea typeface="Montserrat" pitchFamily="34" charset="-122"/>
+                <a:cs typeface="Montserrat" pitchFamily="34" charset="-120"/>
+              </a:rPr>
+              <a:t>Acessibilidade</a:t>
+            </a:r>
+            <a:endParaRPr lang="en-US" sz="2100" dirty="0"/>
+          </a:p>
+        </p:txBody>
+      </p:sp>
+      <p:sp>
+        <p:nvSpPr>
+          <p:cNvPr id="12" name="Text 8"/>
+          <p:cNvSpPr txBox="1"/>
+          <p:nvPr/>
+        </p:nvSpPr>
+        <p:spPr>
+          <a:xfrm>
+            <a:off x="6492240" y="2971800"/>
+            <a:ext cx="4937760" cy="2743200"/>
+          </a:xfrm>
+          <a:prstGeom prst="rect">
+            <a:avLst/>
+          </a:prstGeom>
+          <a:noFill/>
+          <a:ln/>
+        </p:spPr>
+        <p:txBody>
+          <a:bodyPr wrap="square" lIns="0" tIns="0" rIns="0" bIns="0" rtlCol="0" anchor="t"/>
+          <a:lstStyle/>
+          <a:p>
+            <a:pPr marL="342900" indent="-342900">
+              <a:spcAft>
+                <a:spcPts val="800"/>
+              </a:spcAft>
+              <a:buSzPct val="100000"/>
+              <a:buChar char="•"/>
+            </a:pPr>
+            <a:r>
+              <a:rPr lang="en-US" sz="1400" dirty="0">
+                <a:solidFill>
+                  <a:srgbClr val="1B1B1B"/>
+                </a:solidFill>
+              </a:rPr>
+              <a:t>Uma pergunta no primeiro acesso define o perfil</a:t>
+            </a:r>
+            <a:endParaRPr lang="en-US" sz="1400" dirty="0"/>
+          </a:p>
+          <a:p>
+            <a:pPr marL="342900" indent="-342900">
+              <a:spcAft>
+                <a:spcPts val="800"/>
+              </a:spcAft>
+              <a:buSzPct val="100000"/>
+              <a:buChar char="•"/>
+            </a:pPr>
+            <a:r>
+              <a:rPr lang="en-US" sz="1400" dirty="0">
+                <a:solidFill>
+                  <a:srgbClr val="1B1B1B"/>
+                </a:solidFill>
+              </a:rPr>
+              <a:t>Pessoa idosa: letra grande e linguagem simples</a:t>
+            </a:r>
+            <a:endParaRPr lang="en-US" sz="1400" dirty="0"/>
+          </a:p>
+          <a:p>
+            <a:pPr marL="342900" indent="-342900">
+              <a:spcAft>
+                <a:spcPts val="800"/>
+              </a:spcAft>
+              <a:buSzPct val="100000"/>
+              <a:buChar char="•"/>
+            </a:pPr>
+            <a:r>
+              <a:rPr lang="en-US" sz="1400" dirty="0">
+                <a:solidFill>
+                  <a:srgbClr val="1B1B1B"/>
+                </a:solidFill>
+              </a:rPr>
+              <a:t>Baixa visão: alto contraste; quem prefere ouvir: leitura em voz alta</a:t>
+            </a:r>
+            <a:endParaRPr lang="en-US" sz="1400" dirty="0"/>
+          </a:p>
+          <a:p>
+            <a:pPr marL="342900" indent="-342900">
+              <a:spcAft>
+                <a:spcPts val="800"/>
+              </a:spcAft>
+              <a:buSzPct val="100000"/>
+              <a:buChar char="•"/>
+            </a:pPr>
+            <a:r>
+              <a:rPr lang="en-US" sz="1400" dirty="0">
+                <a:solidFill>
+                  <a:srgbClr val="1B1B1B"/>
+                </a:solidFill>
+              </a:rPr>
+              <a:t>Pessoa surda: vídeo em Libras em cada alerta</a:t>
+            </a:r>
+            <a:endParaRPr lang="en-US" sz="1400" dirty="0"/>
+          </a:p>
+          <a:p>
+            <a:pPr marL="342900" indent="-342900">
+              <a:spcAft>
+                <a:spcPts val="800"/>
+              </a:spcAft>
+              <a:buSzPct val="100000"/>
+              <a:buChar char="•"/>
+            </a:pPr>
+            <a:r>
+              <a:rPr lang="en-US" sz="1400" dirty="0">
+                <a:solidFill>
+                  <a:srgbClr val="1B1B1B"/>
+                </a:solidFill>
+              </a:rPr>
+              <a:t>Meta: WCAG 2.1 nível AA</a:t>
+            </a:r>
+            <a:endParaRPr lang="en-US" sz="1400" dirty="0"/>
           </a:p>
         </p:txBody>
       </p:sp>
@@ -4161,7 +4186,7 @@
           <a:bodyPr wrap="square" lIns="0" tIns="0" rIns="0" bIns="0" rtlCol="0" anchor="t"/>
           <a:lstStyle/>
           <a:p>
-            <a:pPr indent="0" marL="0">
+            <a:pPr algn="l" indent="0" marL="0">
               <a:buNone/>
             </a:pPr>
             <a:r>
@@ -4173,118 +4198,342 @@
                 <a:ea typeface="Montserrat" pitchFamily="34" charset="-122"/>
                 <a:cs typeface="Montserrat" pitchFamily="34" charset="-120"/>
               </a:rPr>
-              <a:t>Simples para quem opera: só navegador e celular.</a:t>
+              <a:t>Experimente agora: cada bairro, a sua orientação.</a:t>
             </a:r>
             <a:endParaRPr lang="en-US" sz="3000" dirty="0"/>
           </a:p>
         </p:txBody>
       </p:sp>
-      <p:sp>
-        <p:nvSpPr>
-          <p:cNvPr id="3" name="Text 1"/>
-          <p:cNvSpPr txBox="1"/>
-          <p:nvPr/>
-        </p:nvSpPr>
-        <p:spPr>
-          <a:xfrm>
-            <a:off x="502920" y="1417320"/>
-            <a:ext cx="11155680" cy="365760"/>
-          </a:xfrm>
-          <a:prstGeom prst="rect">
-            <a:avLst/>
-          </a:prstGeom>
-          <a:noFill/>
-          <a:ln/>
-        </p:spPr>
-        <p:txBody>
-          <a:bodyPr wrap="square" lIns="0" tIns="0" rIns="0" bIns="0" rtlCol="0" anchor="t"/>
-          <a:lstStyle/>
-          <a:p>
-            <a:pPr indent="0" marL="0">
-              <a:buNone/>
-            </a:pPr>
-            <a:r>
-              <a:rPr lang="en-US" sz="1500" dirty="0">
+      <p:pic>
+        <p:nvPicPr>
+          <p:cNvPr id="3" name="Image 0" descr="s-urca.png">    </p:cNvPr>
+          <p:cNvPicPr>
+            <a:picLocks noChangeAspect="1"/>
+          </p:cNvPicPr>
+          <p:nvPr/>
+        </p:nvPicPr>
+        <p:blipFill>
+          <a:blip r:embed="rId1"/>
+          <a:srcRect l="0" r="0" t="0" b="0"/>
+          <a:stretch/>
+        </p:blipFill>
+        <p:spPr>
+          <a:xfrm>
+            <a:off x="502920" y="1645920"/>
+            <a:ext cx="2377440" cy="3657600"/>
+          </a:xfrm>
+          <a:prstGeom prst="rect">
+            <a:avLst/>
+          </a:prstGeom>
+        </p:spPr>
+      </p:pic>
+      <p:sp>
+        <p:nvSpPr>
+          <p:cNvPr id="4" name="Shape 1"/>
+          <p:cNvSpPr/>
+          <p:nvPr/>
+        </p:nvSpPr>
+        <p:spPr>
+          <a:xfrm>
+            <a:off x="502920" y="1645920"/>
+            <a:ext cx="2377440" cy="3657600"/>
+          </a:xfrm>
+          <a:prstGeom prst="rect">
+            <a:avLst/>
+          </a:prstGeom>
+          <a:ln w="12700">
+            <a:solidFill>
+              <a:srgbClr val="C9D2DE"/>
+            </a:solidFill>
+            <a:prstDash val="solid"/>
+          </a:ln>
+        </p:spPr>
+      </p:sp>
+      <p:sp>
+        <p:nvSpPr>
+          <p:cNvPr id="5" name="Text 2"/>
+          <p:cNvSpPr txBox="1"/>
+          <p:nvPr/>
+        </p:nvSpPr>
+        <p:spPr>
+          <a:xfrm>
+            <a:off x="502920" y="5394960"/>
+            <a:ext cx="2377440" cy="548640"/>
+          </a:xfrm>
+          <a:prstGeom prst="rect">
+            <a:avLst/>
+          </a:prstGeom>
+          <a:noFill/>
+          <a:ln/>
+        </p:spPr>
+        <p:txBody>
+          <a:bodyPr wrap="square" lIns="0" tIns="0" rIns="0" bIns="0" rtlCol="0" anchor="t"/>
+          <a:lstStyle/>
+          <a:p>
+            <a:pPr algn="ctr" indent="0" marL="0">
+              <a:buNone/>
+            </a:pPr>
+            <a:r>
+              <a:rPr lang="en-US" sz="1300" b="1" dirty="0">
+                <a:solidFill>
+                  <a:srgbClr val="071D41"/>
+                </a:solidFill>
+              </a:rPr>
+              <a:t>Urca (RJ)</a:t>
+            </a:r>
+            <a:endParaRPr lang="en-US" sz="1300" dirty="0"/>
+          </a:p>
+          <a:p>
+            <a:pPr algn="ctr" indent="0" marL="0">
+              <a:buNone/>
+            </a:pPr>
+            <a:r>
+              <a:rPr lang="en-US" sz="1300" dirty="0">
                 <a:solidFill>
                   <a:srgbClr val="5D6673"/>
                 </a:solidFill>
               </a:rPr>
-              <a:t>Sem servidores locais e sem máquinas novas: a plataforma roda na nuvem de governo mantida pela União.</a:t>
-            </a:r>
-            <a:endParaRPr lang="en-US" sz="1500" dirty="0"/>
-          </a:p>
-        </p:txBody>
-      </p:sp>
-      <p:sp>
-        <p:nvSpPr>
-          <p:cNvPr id="4" name="Shape 2"/>
+              <a:t>Calor extremo</a:t>
+            </a:r>
+            <a:endParaRPr lang="en-US" sz="1300" dirty="0"/>
+          </a:p>
+        </p:txBody>
+      </p:sp>
+      <p:pic>
+        <p:nvPicPr>
+          <p:cNvPr id="6" name="Image 1" descr="s-alemao.png">    </p:cNvPr>
+          <p:cNvPicPr>
+            <a:picLocks noChangeAspect="1"/>
+          </p:cNvPicPr>
+          <p:nvPr/>
+        </p:nvPicPr>
+        <p:blipFill>
+          <a:blip r:embed="rId2"/>
+          <a:srcRect l="0" r="0" t="0" b="0"/>
+          <a:stretch/>
+        </p:blipFill>
+        <p:spPr>
+          <a:xfrm>
+            <a:off x="3200400" y="1645920"/>
+            <a:ext cx="2377440" cy="3657600"/>
+          </a:xfrm>
+          <a:prstGeom prst="rect">
+            <a:avLst/>
+          </a:prstGeom>
+        </p:spPr>
+      </p:pic>
+      <p:sp>
+        <p:nvSpPr>
+          <p:cNvPr id="7" name="Shape 3"/>
           <p:cNvSpPr/>
           <p:nvPr/>
         </p:nvSpPr>
         <p:spPr>
           <a:xfrm>
-            <a:off x="502920" y="1965960"/>
-            <a:ext cx="3611880" cy="3520440"/>
+            <a:off x="3200400" y="1645920"/>
+            <a:ext cx="2377440" cy="3657600"/>
+          </a:xfrm>
+          <a:prstGeom prst="rect">
+            <a:avLst/>
+          </a:prstGeom>
+          <a:ln w="12700">
+            <a:solidFill>
+              <a:srgbClr val="C9D2DE"/>
+            </a:solidFill>
+            <a:prstDash val="solid"/>
+          </a:ln>
+        </p:spPr>
+      </p:sp>
+      <p:sp>
+        <p:nvSpPr>
+          <p:cNvPr id="8" name="Text 4"/>
+          <p:cNvSpPr txBox="1"/>
+          <p:nvPr/>
+        </p:nvSpPr>
+        <p:spPr>
+          <a:xfrm>
+            <a:off x="3200400" y="5394960"/>
+            <a:ext cx="2377440" cy="548640"/>
+          </a:xfrm>
+          <a:prstGeom prst="rect">
+            <a:avLst/>
+          </a:prstGeom>
+          <a:noFill/>
+          <a:ln/>
+        </p:spPr>
+        <p:txBody>
+          <a:bodyPr wrap="square" lIns="0" tIns="0" rIns="0" bIns="0" rtlCol="0" anchor="t"/>
+          <a:lstStyle/>
+          <a:p>
+            <a:pPr algn="ctr" indent="0" marL="0">
+              <a:buNone/>
+            </a:pPr>
+            <a:r>
+              <a:rPr lang="en-US" sz="1300" b="1" dirty="0">
+                <a:solidFill>
+                  <a:srgbClr val="071D41"/>
+                </a:solidFill>
+              </a:rPr>
+              <a:t>Complexo do Alemão (RJ)</a:t>
+            </a:r>
+            <a:endParaRPr lang="en-US" sz="1300" dirty="0"/>
+          </a:p>
+          <a:p>
+            <a:pPr algn="ctr" indent="0" marL="0">
+              <a:buNone/>
+            </a:pPr>
+            <a:r>
+              <a:rPr lang="en-US" sz="1300" dirty="0">
+                <a:solidFill>
+                  <a:srgbClr val="5D6673"/>
+                </a:solidFill>
+              </a:rPr>
+              <a:t>Risco de deslizamento</a:t>
+            </a:r>
+            <a:endParaRPr lang="en-US" sz="1300" dirty="0"/>
+          </a:p>
+        </p:txBody>
+      </p:sp>
+      <p:pic>
+        <p:nvPicPr>
+          <p:cNvPr id="9" name="Image 2" descr="s-pb.png">    </p:cNvPr>
+          <p:cNvPicPr>
+            <a:picLocks noChangeAspect="1"/>
+          </p:cNvPicPr>
+          <p:nvPr/>
+        </p:nvPicPr>
+        <p:blipFill>
+          <a:blip r:embed="rId3"/>
+          <a:srcRect l="0" r="0" t="0" b="0"/>
+          <a:stretch/>
+        </p:blipFill>
+        <p:spPr>
+          <a:xfrm>
+            <a:off x="5897880" y="1645920"/>
+            <a:ext cx="2377440" cy="3657600"/>
+          </a:xfrm>
+          <a:prstGeom prst="rect">
+            <a:avLst/>
+          </a:prstGeom>
+        </p:spPr>
+      </p:pic>
+      <p:sp>
+        <p:nvSpPr>
+          <p:cNvPr id="10" name="Shape 5"/>
+          <p:cNvSpPr/>
+          <p:nvPr/>
+        </p:nvSpPr>
+        <p:spPr>
+          <a:xfrm>
+            <a:off x="5897880" y="1645920"/>
+            <a:ext cx="2377440" cy="3657600"/>
+          </a:xfrm>
+          <a:prstGeom prst="rect">
+            <a:avLst/>
+          </a:prstGeom>
+          <a:ln w="12700">
+            <a:solidFill>
+              <a:srgbClr val="C9D2DE"/>
+            </a:solidFill>
+            <a:prstDash val="solid"/>
+          </a:ln>
+        </p:spPr>
+      </p:sp>
+      <p:sp>
+        <p:nvSpPr>
+          <p:cNvPr id="11" name="Text 6"/>
+          <p:cNvSpPr txBox="1"/>
+          <p:nvPr/>
+        </p:nvSpPr>
+        <p:spPr>
+          <a:xfrm>
+            <a:off x="5897880" y="5394960"/>
+            <a:ext cx="2377440" cy="548640"/>
+          </a:xfrm>
+          <a:prstGeom prst="rect">
+            <a:avLst/>
+          </a:prstGeom>
+          <a:noFill/>
+          <a:ln/>
+        </p:spPr>
+        <p:txBody>
+          <a:bodyPr wrap="square" lIns="0" tIns="0" rIns="0" bIns="0" rtlCol="0" anchor="t"/>
+          <a:lstStyle/>
+          <a:p>
+            <a:pPr algn="ctr" indent="0" marL="0">
+              <a:buNone/>
+            </a:pPr>
+            <a:r>
+              <a:rPr lang="en-US" sz="1300" b="1" dirty="0">
+                <a:solidFill>
+                  <a:srgbClr val="071D41"/>
+                </a:solidFill>
+              </a:rPr>
+              <a:t>Patos (PB)</a:t>
+            </a:r>
+            <a:endParaRPr lang="en-US" sz="1300" dirty="0"/>
+          </a:p>
+          <a:p>
+            <a:pPr algn="ctr" indent="0" marL="0">
+              <a:buNone/>
+            </a:pPr>
+            <a:r>
+              <a:rPr lang="en-US" sz="1300" dirty="0">
+                <a:solidFill>
+                  <a:srgbClr val="5D6673"/>
+                </a:solidFill>
+              </a:rPr>
+              <a:t>Seca severa</a:t>
+            </a:r>
+            <a:endParaRPr lang="en-US" sz="1300" dirty="0"/>
+          </a:p>
+        </p:txBody>
+      </p:sp>
+      <p:sp>
+        <p:nvSpPr>
+          <p:cNvPr id="12" name="Shape 7"/>
+          <p:cNvSpPr/>
+          <p:nvPr/>
+        </p:nvSpPr>
+        <p:spPr>
+          <a:xfrm>
+            <a:off x="8732520" y="1645920"/>
+            <a:ext cx="2926080" cy="4297680"/>
           </a:xfrm>
           <a:prstGeom prst="roundRect">
             <a:avLst>
-              <a:gd name="adj" fmla="val 3117"/>
+              <a:gd name="adj" fmla="val 3750"/>
             </a:avLst>
           </a:prstGeom>
           <a:solidFill>
-            <a:srgbClr val="F2F5FA"/>
+            <a:srgbClr val="071D41"/>
           </a:solidFill>
           <a:ln w="12700">
             <a:solidFill>
-              <a:srgbClr val="F2F5FA"/>
+              <a:srgbClr val="071D41"/>
             </a:solidFill>
             <a:prstDash val="solid"/>
           </a:ln>
         </p:spPr>
       </p:sp>
-      <p:sp>
-        <p:nvSpPr>
-          <p:cNvPr id="5" name="Shape 3"/>
-          <p:cNvSpPr/>
-          <p:nvPr/>
-        </p:nvSpPr>
-        <p:spPr>
-          <a:xfrm>
-            <a:off x="777240" y="2194560"/>
-            <a:ext cx="731520" cy="731520"/>
-          </a:xfrm>
-          <a:prstGeom prst="ellipse">
-            <a:avLst/>
-          </a:prstGeom>
-          <a:solidFill>
-            <a:srgbClr val="1351B4"/>
-          </a:solidFill>
-          <a:ln w="12700">
-            <a:solidFill>
-              <a:srgbClr val="1351B4"/>
-            </a:solidFill>
-            <a:prstDash val="solid"/>
-          </a:ln>
-        </p:spPr>
-      </p:sp>
       <p:pic>
         <p:nvPicPr>
-          <p:cNvPr id="6" name="Image 0" descr="preencoded.png">    </p:cNvPr>
+          <p:cNvPr id="13" name="Image 3" descr="qr-urca.png">    </p:cNvPr>
           <p:cNvPicPr>
             <a:picLocks noChangeAspect="1"/>
           </p:cNvPicPr>
           <p:nvPr/>
         </p:nvPicPr>
         <p:blipFill>
-          <a:blip r:embed="rId1"/>
+          <a:blip r:embed="rId4"/>
           <a:stretch>
             <a:fillRect/>
           </a:stretch>
         </p:blipFill>
         <p:spPr>
           <a:xfrm>
-            <a:off x="960120" y="2377440"/>
-            <a:ext cx="365760" cy="365760"/>
+            <a:off x="9006840" y="1920240"/>
+            <a:ext cx="2377440" cy="2377440"/>
           </a:xfrm>
           <a:prstGeom prst="rect">
             <a:avLst/>
@@ -4293,74 +4542,71 @@
       </p:pic>
       <p:sp>
         <p:nvSpPr>
-          <p:cNvPr id="7" name="Text 4"/>
-          <p:cNvSpPr txBox="1"/>
-          <p:nvPr/>
-        </p:nvSpPr>
-        <p:spPr>
-          <a:xfrm>
-            <a:off x="1691640" y="2212848"/>
-            <a:ext cx="2286000" cy="411480"/>
-          </a:xfrm>
-          <a:prstGeom prst="rect">
-            <a:avLst/>
-          </a:prstGeom>
-          <a:noFill/>
-          <a:ln/>
-        </p:spPr>
-        <p:txBody>
-          <a:bodyPr wrap="square" lIns="0" tIns="0" rIns="0" bIns="0" rtlCol="0" anchor="t"/>
-          <a:lstStyle/>
-          <a:p>
-            <a:pPr indent="0" marL="0">
-              <a:buNone/>
-            </a:pPr>
-            <a:r>
-              <a:rPr lang="en-US" sz="2200" b="1" dirty="0">
-                <a:solidFill>
-                  <a:srgbClr val="071D41"/>
-                </a:solidFill>
-                <a:latin typeface="Montserrat" pitchFamily="34" charset="0"/>
-                <a:ea typeface="Montserrat" pitchFamily="34" charset="-122"/>
-                <a:cs typeface="Montserrat" pitchFamily="34" charset="-120"/>
-              </a:rPr>
-              <a:t>União</a:t>
-            </a:r>
-            <a:endParaRPr lang="en-US" sz="2200" dirty="0"/>
-          </a:p>
-        </p:txBody>
-      </p:sp>
-      <p:sp>
-        <p:nvSpPr>
-          <p:cNvPr id="8" name="Text 5"/>
-          <p:cNvSpPr txBox="1"/>
-          <p:nvPr/>
-        </p:nvSpPr>
-        <p:spPr>
-          <a:xfrm>
-            <a:off x="1691640" y="2633472"/>
-            <a:ext cx="2286000" cy="365760"/>
-          </a:xfrm>
-          <a:prstGeom prst="rect">
-            <a:avLst/>
-          </a:prstGeom>
-          <a:noFill/>
-          <a:ln/>
-        </p:spPr>
-        <p:txBody>
-          <a:bodyPr wrap="square" lIns="0" tIns="0" rIns="0" bIns="0" rtlCol="0" anchor="t"/>
-          <a:lstStyle/>
-          <a:p>
-            <a:pPr indent="0" marL="0">
+          <p:cNvPr id="14" name="Text 8"/>
+          <p:cNvSpPr txBox="1"/>
+          <p:nvPr/>
+        </p:nvSpPr>
+        <p:spPr>
+          <a:xfrm>
+            <a:off x="8732520" y="4434840"/>
+            <a:ext cx="2926080" cy="365760"/>
+          </a:xfrm>
+          <a:prstGeom prst="rect">
+            <a:avLst/>
+          </a:prstGeom>
+          <a:noFill/>
+          <a:ln/>
+        </p:spPr>
+        <p:txBody>
+          <a:bodyPr wrap="square" lIns="0" tIns="0" rIns="0" bIns="0" rtlCol="0" anchor="t"/>
+          <a:lstStyle/>
+          <a:p>
+            <a:pPr algn="ctr" indent="0" marL="0">
+              <a:buNone/>
+            </a:pPr>
+            <a:r>
+              <a:rPr lang="en-US" sz="1600" b="1" dirty="0">
+                <a:solidFill>
+                  <a:srgbClr val="FFFFFF"/>
+                </a:solidFill>
+              </a:rPr>
+              <a:t>Aponte a câmera</a:t>
+            </a:r>
+            <a:endParaRPr lang="en-US" sz="1600" dirty="0"/>
+          </a:p>
+        </p:txBody>
+      </p:sp>
+      <p:sp>
+        <p:nvSpPr>
+          <p:cNvPr id="15" name="Text 9"/>
+          <p:cNvSpPr txBox="1"/>
+          <p:nvPr/>
+        </p:nvSpPr>
+        <p:spPr>
+          <a:xfrm>
+            <a:off x="8732520" y="4800600"/>
+            <a:ext cx="2926080" cy="320040"/>
+          </a:xfrm>
+          <a:prstGeom prst="rect">
+            <a:avLst/>
+          </a:prstGeom>
+          <a:noFill/>
+          <a:ln/>
+        </p:spPr>
+        <p:txBody>
+          <a:bodyPr wrap="square" lIns="0" tIns="0" rIns="0" bIns="0" rtlCol="0" anchor="t"/>
+          <a:lstStyle/>
+          <a:p>
+            <a:pPr algn="ctr" indent="0" marL="0">
               <a:buNone/>
             </a:pPr>
             <a:r>
               <a:rPr lang="en-US" sz="1100" dirty="0">
                 <a:solidFill>
-                  <a:srgbClr val="5D6673"/>
-                </a:solidFill>
-              </a:rPr>
-              <a:t>Defesa Civil Nacional, Cemaden, Inmet</a:t>
+                  <a:srgbClr val="C9D7EE"/>
+                </a:solidFill>
+              </a:rPr>
+              <a:t>brasilseguro.kbrianps.com.br/rj/urca</a:t>
             </a:r>
             <a:endParaRPr lang="en-US" sz="1100" dirty="0"/>
           </a:p>
@@ -4368,1239 +4614,37 @@
       </p:sp>
       <p:sp>
         <p:nvSpPr>
-          <p:cNvPr id="9" name="Shape 6"/>
-          <p:cNvSpPr/>
-          <p:nvPr/>
-        </p:nvSpPr>
-        <p:spPr>
-          <a:xfrm>
-            <a:off x="777240" y="3246120"/>
-            <a:ext cx="384048" cy="384048"/>
-          </a:xfrm>
-          <a:prstGeom prst="ellipse">
-            <a:avLst/>
-          </a:prstGeom>
-          <a:solidFill>
-            <a:srgbClr val="FFFFFF"/>
-          </a:solidFill>
-          <a:ln w="15875">
-            <a:solidFill>
-              <a:srgbClr val="1351B4"/>
-            </a:solidFill>
-            <a:prstDash val="solid"/>
-          </a:ln>
-        </p:spPr>
-      </p:sp>
-      <p:sp>
-        <p:nvSpPr>
-          <p:cNvPr id="10" name="Text 7"/>
-          <p:cNvSpPr txBox="1"/>
-          <p:nvPr/>
-        </p:nvSpPr>
-        <p:spPr>
-          <a:xfrm>
-            <a:off x="777240" y="3246120"/>
-            <a:ext cx="384048" cy="384048"/>
-          </a:xfrm>
-          <a:prstGeom prst="rect">
-            <a:avLst/>
-          </a:prstGeom>
-          <a:noFill/>
-          <a:ln/>
-        </p:spPr>
-        <p:txBody>
-          <a:bodyPr wrap="square" lIns="0" tIns="0" rIns="0" bIns="0" rtlCol="0" anchor="ctr"/>
+          <p:cNvPr id="16" name="Text 10"/>
+          <p:cNvSpPr txBox="1"/>
+          <p:nvPr/>
+        </p:nvSpPr>
+        <p:spPr>
+          <a:xfrm>
+            <a:off x="8732520" y="5212080"/>
+            <a:ext cx="2926080" cy="548640"/>
+          </a:xfrm>
+          <a:prstGeom prst="rect">
+            <a:avLst/>
+          </a:prstGeom>
+          <a:noFill/>
+          <a:ln/>
+        </p:spPr>
+        <p:txBody>
+          <a:bodyPr wrap="square" lIns="0" tIns="0" rIns="0" bIns="0" rtlCol="0" anchor="t"/>
           <a:lstStyle/>
           <a:p>
             <a:pPr algn="ctr" indent="0" marL="0">
               <a:buNone/>
             </a:pPr>
             <a:r>
-              <a:rPr lang="en-US" sz="1300" b="1" dirty="0">
-                <a:solidFill>
-                  <a:srgbClr val="1351B4"/>
-                </a:solidFill>
-              </a:rPr>
-              <a:t>1</a:t>
-            </a:r>
-            <a:endParaRPr lang="en-US" sz="1300" dirty="0"/>
-          </a:p>
-        </p:txBody>
-      </p:sp>
-      <p:sp>
-        <p:nvSpPr>
-          <p:cNvPr id="11" name="Text 8"/>
-          <p:cNvSpPr txBox="1"/>
-          <p:nvPr/>
-        </p:nvSpPr>
-        <p:spPr>
-          <a:xfrm>
-            <a:off x="1280160" y="3227832"/>
-            <a:ext cx="2651760" cy="640080"/>
-          </a:xfrm>
-          <a:prstGeom prst="rect">
-            <a:avLst/>
-          </a:prstGeom>
-          <a:noFill/>
-          <a:ln/>
-        </p:spPr>
-        <p:txBody>
-          <a:bodyPr wrap="square" lIns="0" tIns="0" rIns="0" bIns="0" rtlCol="0" anchor="t"/>
-          <a:lstStyle/>
-          <a:p>
-            <a:pPr indent="0" marL="0">
-              <a:buNone/>
-            </a:pPr>
-            <a:r>
-              <a:rPr lang="en-US" sz="1350" dirty="0">
-                <a:solidFill>
-                  <a:srgbClr val="1B1B1B"/>
-                </a:solidFill>
-              </a:rPr>
-              <a:t>Mantém a plataforma na nuvem de governo</a:t>
-            </a:r>
-            <a:endParaRPr lang="en-US" sz="1350" dirty="0"/>
-          </a:p>
-        </p:txBody>
-      </p:sp>
-      <p:sp>
-        <p:nvSpPr>
-          <p:cNvPr id="12" name="Shape 9"/>
-          <p:cNvSpPr/>
-          <p:nvPr/>
-        </p:nvSpPr>
-        <p:spPr>
-          <a:xfrm>
-            <a:off x="777240" y="3959352"/>
-            <a:ext cx="384048" cy="384048"/>
-          </a:xfrm>
-          <a:prstGeom prst="ellipse">
-            <a:avLst/>
-          </a:prstGeom>
-          <a:solidFill>
-            <a:srgbClr val="FFFFFF"/>
-          </a:solidFill>
-          <a:ln w="15875">
-            <a:solidFill>
-              <a:srgbClr val="1351B4"/>
-            </a:solidFill>
-            <a:prstDash val="solid"/>
-          </a:ln>
-        </p:spPr>
-      </p:sp>
-      <p:sp>
-        <p:nvSpPr>
-          <p:cNvPr id="13" name="Text 10"/>
-          <p:cNvSpPr txBox="1"/>
-          <p:nvPr/>
-        </p:nvSpPr>
-        <p:spPr>
-          <a:xfrm>
-            <a:off x="777240" y="3959352"/>
-            <a:ext cx="384048" cy="384048"/>
-          </a:xfrm>
-          <a:prstGeom prst="rect">
-            <a:avLst/>
-          </a:prstGeom>
-          <a:noFill/>
-          <a:ln/>
-        </p:spPr>
-        <p:txBody>
-          <a:bodyPr wrap="square" lIns="0" tIns="0" rIns="0" bIns="0" rtlCol="0" anchor="ctr"/>
-          <a:lstStyle/>
-          <a:p>
-            <a:pPr algn="ctr" indent="0" marL="0">
-              <a:buNone/>
-            </a:pPr>
-            <a:r>
-              <a:rPr lang="en-US" sz="1300" b="1" dirty="0">
-                <a:solidFill>
-                  <a:srgbClr val="1351B4"/>
-                </a:solidFill>
-              </a:rPr>
-              <a:t>2</a:t>
-            </a:r>
-            <a:endParaRPr lang="en-US" sz="1300" dirty="0"/>
-          </a:p>
-        </p:txBody>
-      </p:sp>
-      <p:sp>
-        <p:nvSpPr>
-          <p:cNvPr id="14" name="Text 11"/>
-          <p:cNvSpPr txBox="1"/>
-          <p:nvPr/>
-        </p:nvSpPr>
-        <p:spPr>
-          <a:xfrm>
-            <a:off x="1280160" y="3941064"/>
-            <a:ext cx="2651760" cy="640080"/>
-          </a:xfrm>
-          <a:prstGeom prst="rect">
-            <a:avLst/>
-          </a:prstGeom>
-          <a:noFill/>
-          <a:ln/>
-        </p:spPr>
-        <p:txBody>
-          <a:bodyPr wrap="square" lIns="0" tIns="0" rIns="0" bIns="0" rtlCol="0" anchor="t"/>
-          <a:lstStyle/>
-          <a:p>
-            <a:pPr indent="0" marL="0">
-              <a:buNone/>
-            </a:pPr>
-            <a:r>
-              <a:rPr lang="en-US" sz="1350" dirty="0">
-                <a:solidFill>
-                  <a:srgbClr val="1B1B1B"/>
-                </a:solidFill>
-              </a:rPr>
-              <a:t>Envia o alerta oficial assinado (IDAP)</a:t>
-            </a:r>
-            <a:endParaRPr lang="en-US" sz="1350" dirty="0"/>
-          </a:p>
-        </p:txBody>
-      </p:sp>
-      <p:sp>
-        <p:nvSpPr>
-          <p:cNvPr id="15" name="Shape 12"/>
-          <p:cNvSpPr/>
-          <p:nvPr/>
-        </p:nvSpPr>
-        <p:spPr>
-          <a:xfrm>
-            <a:off x="777240" y="4672584"/>
-            <a:ext cx="384048" cy="384048"/>
-          </a:xfrm>
-          <a:prstGeom prst="ellipse">
-            <a:avLst/>
-          </a:prstGeom>
-          <a:solidFill>
-            <a:srgbClr val="FFFFFF"/>
-          </a:solidFill>
-          <a:ln w="15875">
-            <a:solidFill>
-              <a:srgbClr val="1351B4"/>
-            </a:solidFill>
-            <a:prstDash val="solid"/>
-          </a:ln>
-        </p:spPr>
-      </p:sp>
-      <p:sp>
-        <p:nvSpPr>
-          <p:cNvPr id="16" name="Text 13"/>
-          <p:cNvSpPr txBox="1"/>
-          <p:nvPr/>
-        </p:nvSpPr>
-        <p:spPr>
-          <a:xfrm>
-            <a:off x="777240" y="4672584"/>
-            <a:ext cx="384048" cy="384048"/>
-          </a:xfrm>
-          <a:prstGeom prst="rect">
-            <a:avLst/>
-          </a:prstGeom>
-          <a:noFill/>
-          <a:ln/>
-        </p:spPr>
-        <p:txBody>
-          <a:bodyPr wrap="square" lIns="0" tIns="0" rIns="0" bIns="0" rtlCol="0" anchor="ctr"/>
-          <a:lstStyle/>
-          <a:p>
-            <a:pPr algn="ctr" indent="0" marL="0">
-              <a:buNone/>
-            </a:pPr>
-            <a:r>
-              <a:rPr lang="en-US" sz="1300" b="1" dirty="0">
-                <a:solidFill>
-                  <a:srgbClr val="1351B4"/>
-                </a:solidFill>
-              </a:rPr>
-              <a:t>3</a:t>
-            </a:r>
-            <a:endParaRPr lang="en-US" sz="1300" dirty="0"/>
-          </a:p>
-        </p:txBody>
-      </p:sp>
-      <p:sp>
-        <p:nvSpPr>
-          <p:cNvPr id="17" name="Text 14"/>
-          <p:cNvSpPr txBox="1"/>
-          <p:nvPr/>
-        </p:nvSpPr>
-        <p:spPr>
-          <a:xfrm>
-            <a:off x="1280160" y="4654296"/>
-            <a:ext cx="2651760" cy="640080"/>
-          </a:xfrm>
-          <a:prstGeom prst="rect">
-            <a:avLst/>
-          </a:prstGeom>
-          <a:noFill/>
-          <a:ln/>
-        </p:spPr>
-        <p:txBody>
-          <a:bodyPr wrap="square" lIns="0" tIns="0" rIns="0" bIns="0" rtlCol="0" anchor="t"/>
-          <a:lstStyle/>
-          <a:p>
-            <a:pPr indent="0" marL="0">
-              <a:buNone/>
-            </a:pPr>
-            <a:r>
-              <a:rPr lang="en-US" sz="1350" dirty="0">
-                <a:solidFill>
-                  <a:srgbClr val="1B1B1B"/>
-                </a:solidFill>
-              </a:rPr>
-              <a:t>Publica modelos prontos de guias</a:t>
-            </a:r>
-            <a:endParaRPr lang="en-US" sz="1350" dirty="0"/>
-          </a:p>
-        </p:txBody>
-      </p:sp>
-      <p:sp>
-        <p:nvSpPr>
-          <p:cNvPr id="18" name="Shape 15"/>
-          <p:cNvSpPr/>
-          <p:nvPr/>
-        </p:nvSpPr>
-        <p:spPr>
-          <a:xfrm>
-            <a:off x="4297680" y="1965960"/>
-            <a:ext cx="3611880" cy="3520440"/>
-          </a:xfrm>
-          <a:prstGeom prst="roundRect">
-            <a:avLst>
-              <a:gd name="adj" fmla="val 3117"/>
-            </a:avLst>
-          </a:prstGeom>
-          <a:solidFill>
-            <a:srgbClr val="F2F5FA"/>
-          </a:solidFill>
-          <a:ln w="12700">
-            <a:solidFill>
-              <a:srgbClr val="F2F5FA"/>
-            </a:solidFill>
-            <a:prstDash val="solid"/>
-          </a:ln>
-        </p:spPr>
-      </p:sp>
-      <p:sp>
-        <p:nvSpPr>
-          <p:cNvPr id="19" name="Shape 16"/>
-          <p:cNvSpPr/>
-          <p:nvPr/>
-        </p:nvSpPr>
-        <p:spPr>
-          <a:xfrm>
-            <a:off x="4572000" y="2194560"/>
-            <a:ext cx="731520" cy="731520"/>
-          </a:xfrm>
-          <a:prstGeom prst="ellipse">
-            <a:avLst/>
-          </a:prstGeom>
-          <a:solidFill>
-            <a:srgbClr val="1351B4"/>
-          </a:solidFill>
-          <a:ln w="12700">
-            <a:solidFill>
-              <a:srgbClr val="1351B4"/>
-            </a:solidFill>
-            <a:prstDash val="solid"/>
-          </a:ln>
-        </p:spPr>
-      </p:sp>
-      <p:pic>
-        <p:nvPicPr>
-          <p:cNvPr id="20" name="Image 1" descr="preencoded.png">    </p:cNvPr>
-          <p:cNvPicPr>
-            <a:picLocks noChangeAspect="1"/>
-          </p:cNvPicPr>
-          <p:nvPr/>
-        </p:nvPicPr>
-        <p:blipFill>
-          <a:blip r:embed="rId2"/>
-          <a:stretch>
-            <a:fillRect/>
-          </a:stretch>
-        </p:blipFill>
-        <p:spPr>
-          <a:xfrm>
-            <a:off x="4754880" y="2377440"/>
-            <a:ext cx="365760" cy="365760"/>
-          </a:xfrm>
-          <a:prstGeom prst="rect">
-            <a:avLst/>
-          </a:prstGeom>
-        </p:spPr>
-      </p:pic>
-      <p:sp>
-        <p:nvSpPr>
-          <p:cNvPr id="21" name="Text 17"/>
-          <p:cNvSpPr txBox="1"/>
-          <p:nvPr/>
-        </p:nvSpPr>
-        <p:spPr>
-          <a:xfrm>
-            <a:off x="5486400" y="2212848"/>
-            <a:ext cx="2286000" cy="411480"/>
-          </a:xfrm>
-          <a:prstGeom prst="rect">
-            <a:avLst/>
-          </a:prstGeom>
-          <a:noFill/>
-          <a:ln/>
-        </p:spPr>
-        <p:txBody>
-          <a:bodyPr wrap="square" lIns="0" tIns="0" rIns="0" bIns="0" rtlCol="0" anchor="t"/>
-          <a:lstStyle/>
-          <a:p>
-            <a:pPr indent="0" marL="0">
-              <a:buNone/>
-            </a:pPr>
-            <a:r>
-              <a:rPr lang="en-US" sz="2200" b="1" dirty="0">
-                <a:solidFill>
-                  <a:srgbClr val="071D41"/>
-                </a:solidFill>
-                <a:latin typeface="Montserrat" pitchFamily="34" charset="0"/>
-                <a:ea typeface="Montserrat" pitchFamily="34" charset="-122"/>
-                <a:cs typeface="Montserrat" pitchFamily="34" charset="-120"/>
-              </a:rPr>
-              <a:t>Estado</a:t>
-            </a:r>
-            <a:endParaRPr lang="en-US" sz="2200" dirty="0"/>
-          </a:p>
-        </p:txBody>
-      </p:sp>
-      <p:sp>
-        <p:nvSpPr>
-          <p:cNvPr id="22" name="Text 18"/>
-          <p:cNvSpPr txBox="1"/>
-          <p:nvPr/>
-        </p:nvSpPr>
-        <p:spPr>
-          <a:xfrm>
-            <a:off x="5486400" y="2633472"/>
-            <a:ext cx="2286000" cy="365760"/>
-          </a:xfrm>
-          <a:prstGeom prst="rect">
-            <a:avLst/>
-          </a:prstGeom>
-          <a:noFill/>
-          <a:ln/>
-        </p:spPr>
-        <p:txBody>
-          <a:bodyPr wrap="square" lIns="0" tIns="0" rIns="0" bIns="0" rtlCol="0" anchor="t"/>
-          <a:lstStyle/>
-          <a:p>
-            <a:pPr indent="0" marL="0">
-              <a:buNone/>
-            </a:pPr>
-            <a:r>
-              <a:rPr lang="en-US" sz="1100" dirty="0">
-                <a:solidFill>
-                  <a:srgbClr val="5D6673"/>
-                </a:solidFill>
-              </a:rPr>
-              <a:t>Defesa Civil estadual</a:t>
-            </a:r>
-            <a:endParaRPr lang="en-US" sz="1100" dirty="0"/>
-          </a:p>
-        </p:txBody>
-      </p:sp>
-      <p:sp>
-        <p:nvSpPr>
-          <p:cNvPr id="23" name="Shape 19"/>
-          <p:cNvSpPr/>
-          <p:nvPr/>
-        </p:nvSpPr>
-        <p:spPr>
-          <a:xfrm>
-            <a:off x="4572000" y="3246120"/>
-            <a:ext cx="384048" cy="384048"/>
-          </a:xfrm>
-          <a:prstGeom prst="ellipse">
-            <a:avLst/>
-          </a:prstGeom>
-          <a:solidFill>
-            <a:srgbClr val="FFFFFF"/>
-          </a:solidFill>
-          <a:ln w="15875">
-            <a:solidFill>
-              <a:srgbClr val="1351B4"/>
-            </a:solidFill>
-            <a:prstDash val="solid"/>
-          </a:ln>
-        </p:spPr>
-      </p:sp>
-      <p:sp>
-        <p:nvSpPr>
-          <p:cNvPr id="24" name="Text 20"/>
-          <p:cNvSpPr txBox="1"/>
-          <p:nvPr/>
-        </p:nvSpPr>
-        <p:spPr>
-          <a:xfrm>
-            <a:off x="4572000" y="3246120"/>
-            <a:ext cx="384048" cy="384048"/>
-          </a:xfrm>
-          <a:prstGeom prst="rect">
-            <a:avLst/>
-          </a:prstGeom>
-          <a:noFill/>
-          <a:ln/>
-        </p:spPr>
-        <p:txBody>
-          <a:bodyPr wrap="square" lIns="0" tIns="0" rIns="0" bIns="0" rtlCol="0" anchor="ctr"/>
-          <a:lstStyle/>
-          <a:p>
-            <a:pPr algn="ctr" indent="0" marL="0">
-              <a:buNone/>
-            </a:pPr>
-            <a:r>
-              <a:rPr lang="en-US" sz="1300" b="1" dirty="0">
-                <a:solidFill>
-                  <a:srgbClr val="1351B4"/>
-                </a:solidFill>
-              </a:rPr>
-              <a:t>1</a:t>
-            </a:r>
-            <a:endParaRPr lang="en-US" sz="1300" dirty="0"/>
-          </a:p>
-        </p:txBody>
-      </p:sp>
-      <p:sp>
-        <p:nvSpPr>
-          <p:cNvPr id="25" name="Text 21"/>
-          <p:cNvSpPr txBox="1"/>
-          <p:nvPr/>
-        </p:nvSpPr>
-        <p:spPr>
-          <a:xfrm>
-            <a:off x="5074920" y="3227832"/>
-            <a:ext cx="2651760" cy="640080"/>
-          </a:xfrm>
-          <a:prstGeom prst="rect">
-            <a:avLst/>
-          </a:prstGeom>
-          <a:noFill/>
-          <a:ln/>
-        </p:spPr>
-        <p:txBody>
-          <a:bodyPr wrap="square" lIns="0" tIns="0" rIns="0" bIns="0" rtlCol="0" anchor="t"/>
-          <a:lstStyle/>
-          <a:p>
-            <a:pPr indent="0" marL="0">
-              <a:buNone/>
-            </a:pPr>
-            <a:r>
-              <a:rPr lang="en-US" sz="1350" dirty="0">
-                <a:solidFill>
-                  <a:srgbClr val="1B1B1B"/>
-                </a:solidFill>
-              </a:rPr>
-              <a:t>Aprova cada disparo (segunda assinatura)</a:t>
-            </a:r>
-            <a:endParaRPr lang="en-US" sz="1350" dirty="0"/>
-          </a:p>
-        </p:txBody>
-      </p:sp>
-      <p:sp>
-        <p:nvSpPr>
-          <p:cNvPr id="26" name="Shape 22"/>
-          <p:cNvSpPr/>
-          <p:nvPr/>
-        </p:nvSpPr>
-        <p:spPr>
-          <a:xfrm>
-            <a:off x="4572000" y="3959352"/>
-            <a:ext cx="384048" cy="384048"/>
-          </a:xfrm>
-          <a:prstGeom prst="ellipse">
-            <a:avLst/>
-          </a:prstGeom>
-          <a:solidFill>
-            <a:srgbClr val="FFFFFF"/>
-          </a:solidFill>
-          <a:ln w="15875">
-            <a:solidFill>
-              <a:srgbClr val="1351B4"/>
-            </a:solidFill>
-            <a:prstDash val="solid"/>
-          </a:ln>
-        </p:spPr>
-      </p:sp>
-      <p:sp>
-        <p:nvSpPr>
-          <p:cNvPr id="27" name="Text 23"/>
-          <p:cNvSpPr txBox="1"/>
-          <p:nvPr/>
-        </p:nvSpPr>
-        <p:spPr>
-          <a:xfrm>
-            <a:off x="4572000" y="3959352"/>
-            <a:ext cx="384048" cy="384048"/>
-          </a:xfrm>
-          <a:prstGeom prst="rect">
-            <a:avLst/>
-          </a:prstGeom>
-          <a:noFill/>
-          <a:ln/>
-        </p:spPr>
-        <p:txBody>
-          <a:bodyPr wrap="square" lIns="0" tIns="0" rIns="0" bIns="0" rtlCol="0" anchor="ctr"/>
-          <a:lstStyle/>
-          <a:p>
-            <a:pPr algn="ctr" indent="0" marL="0">
-              <a:buNone/>
-            </a:pPr>
-            <a:r>
-              <a:rPr lang="en-US" sz="1300" b="1" dirty="0">
-                <a:solidFill>
-                  <a:srgbClr val="1351B4"/>
-                </a:solidFill>
-              </a:rPr>
-              <a:t>2</a:t>
-            </a:r>
-            <a:endParaRPr lang="en-US" sz="1300" dirty="0"/>
-          </a:p>
-        </p:txBody>
-      </p:sp>
-      <p:sp>
-        <p:nvSpPr>
-          <p:cNvPr id="28" name="Text 24"/>
-          <p:cNvSpPr txBox="1"/>
-          <p:nvPr/>
-        </p:nvSpPr>
-        <p:spPr>
-          <a:xfrm>
-            <a:off x="5074920" y="3941064"/>
-            <a:ext cx="2651760" cy="640080"/>
-          </a:xfrm>
-          <a:prstGeom prst="rect">
-            <a:avLst/>
-          </a:prstGeom>
-          <a:noFill/>
-          <a:ln/>
-        </p:spPr>
-        <p:txBody>
-          <a:bodyPr wrap="square" lIns="0" tIns="0" rIns="0" bIns="0" rtlCol="0" anchor="t"/>
-          <a:lstStyle/>
-          <a:p>
-            <a:pPr indent="0" marL="0">
-              <a:buNone/>
-            </a:pPr>
-            <a:r>
-              <a:rPr lang="en-US" sz="1350" dirty="0">
-                <a:solidFill>
-                  <a:srgbClr val="1B1B1B"/>
-                </a:solidFill>
-              </a:rPr>
-              <a:t>Acompanha o painel do estado</a:t>
-            </a:r>
-            <a:endParaRPr lang="en-US" sz="1350" dirty="0"/>
-          </a:p>
-        </p:txBody>
-      </p:sp>
-      <p:sp>
-        <p:nvSpPr>
-          <p:cNvPr id="29" name="Shape 25"/>
-          <p:cNvSpPr/>
-          <p:nvPr/>
-        </p:nvSpPr>
-        <p:spPr>
-          <a:xfrm>
-            <a:off x="4572000" y="4672584"/>
-            <a:ext cx="384048" cy="384048"/>
-          </a:xfrm>
-          <a:prstGeom prst="ellipse">
-            <a:avLst/>
-          </a:prstGeom>
-          <a:solidFill>
-            <a:srgbClr val="FFFFFF"/>
-          </a:solidFill>
-          <a:ln w="15875">
-            <a:solidFill>
-              <a:srgbClr val="1351B4"/>
-            </a:solidFill>
-            <a:prstDash val="solid"/>
-          </a:ln>
-        </p:spPr>
-      </p:sp>
-      <p:sp>
-        <p:nvSpPr>
-          <p:cNvPr id="30" name="Text 26"/>
-          <p:cNvSpPr txBox="1"/>
-          <p:nvPr/>
-        </p:nvSpPr>
-        <p:spPr>
-          <a:xfrm>
-            <a:off x="4572000" y="4672584"/>
-            <a:ext cx="384048" cy="384048"/>
-          </a:xfrm>
-          <a:prstGeom prst="rect">
-            <a:avLst/>
-          </a:prstGeom>
-          <a:noFill/>
-          <a:ln/>
-        </p:spPr>
-        <p:txBody>
-          <a:bodyPr wrap="square" lIns="0" tIns="0" rIns="0" bIns="0" rtlCol="0" anchor="ctr"/>
-          <a:lstStyle/>
-          <a:p>
-            <a:pPr algn="ctr" indent="0" marL="0">
-              <a:buNone/>
-            </a:pPr>
-            <a:r>
-              <a:rPr lang="en-US" sz="1300" b="1" dirty="0">
-                <a:solidFill>
-                  <a:srgbClr val="1351B4"/>
-                </a:solidFill>
-              </a:rPr>
-              <a:t>3</a:t>
-            </a:r>
-            <a:endParaRPr lang="en-US" sz="1300" dirty="0"/>
-          </a:p>
-        </p:txBody>
-      </p:sp>
-      <p:sp>
-        <p:nvSpPr>
-          <p:cNvPr id="31" name="Text 27"/>
-          <p:cNvSpPr txBox="1"/>
-          <p:nvPr/>
-        </p:nvSpPr>
-        <p:spPr>
-          <a:xfrm>
-            <a:off x="5074920" y="4654296"/>
-            <a:ext cx="2651760" cy="640080"/>
-          </a:xfrm>
-          <a:prstGeom prst="rect">
-            <a:avLst/>
-          </a:prstGeom>
-          <a:noFill/>
-          <a:ln/>
-        </p:spPr>
-        <p:txBody>
-          <a:bodyPr wrap="square" lIns="0" tIns="0" rIns="0" bIns="0" rtlCol="0" anchor="t"/>
-          <a:lstStyle/>
-          <a:p>
-            <a:pPr indent="0" marL="0">
-              <a:buNone/>
-            </a:pPr>
-            <a:r>
-              <a:rPr lang="en-US" sz="1350" dirty="0">
-                <a:solidFill>
-                  <a:srgbClr val="1B1B1B"/>
-                </a:solidFill>
-              </a:rPr>
-              <a:t>Opera pelos municípios sem equipe</a:t>
-            </a:r>
-            <a:endParaRPr lang="en-US" sz="1350" dirty="0"/>
-          </a:p>
-        </p:txBody>
-      </p:sp>
-      <p:sp>
-        <p:nvSpPr>
-          <p:cNvPr id="32" name="Shape 28"/>
-          <p:cNvSpPr/>
-          <p:nvPr/>
-        </p:nvSpPr>
-        <p:spPr>
-          <a:xfrm>
-            <a:off x="8092440" y="1965960"/>
-            <a:ext cx="3611880" cy="3520440"/>
-          </a:xfrm>
-          <a:prstGeom prst="roundRect">
-            <a:avLst>
-              <a:gd name="adj" fmla="val 3117"/>
-            </a:avLst>
-          </a:prstGeom>
-          <a:solidFill>
-            <a:srgbClr val="F2F5FA"/>
-          </a:solidFill>
-          <a:ln w="12700">
-            <a:solidFill>
-              <a:srgbClr val="F2F5FA"/>
-            </a:solidFill>
-            <a:prstDash val="solid"/>
-          </a:ln>
-        </p:spPr>
-      </p:sp>
-      <p:sp>
-        <p:nvSpPr>
-          <p:cNvPr id="33" name="Shape 29"/>
-          <p:cNvSpPr/>
-          <p:nvPr/>
-        </p:nvSpPr>
-        <p:spPr>
-          <a:xfrm>
-            <a:off x="8366760" y="2194560"/>
-            <a:ext cx="731520" cy="731520"/>
-          </a:xfrm>
-          <a:prstGeom prst="ellipse">
-            <a:avLst/>
-          </a:prstGeom>
-          <a:solidFill>
-            <a:srgbClr val="1351B4"/>
-          </a:solidFill>
-          <a:ln w="12700">
-            <a:solidFill>
-              <a:srgbClr val="1351B4"/>
-            </a:solidFill>
-            <a:prstDash val="solid"/>
-          </a:ln>
-        </p:spPr>
-      </p:sp>
-      <p:pic>
-        <p:nvPicPr>
-          <p:cNvPr id="34" name="Image 2" descr="preencoded.png">    </p:cNvPr>
-          <p:cNvPicPr>
-            <a:picLocks noChangeAspect="1"/>
-          </p:cNvPicPr>
-          <p:nvPr/>
-        </p:nvPicPr>
-        <p:blipFill>
-          <a:blip r:embed="rId3"/>
-          <a:stretch>
-            <a:fillRect/>
-          </a:stretch>
-        </p:blipFill>
-        <p:spPr>
-          <a:xfrm>
-            <a:off x="8549640" y="2377440"/>
-            <a:ext cx="365760" cy="365760"/>
-          </a:xfrm>
-          <a:prstGeom prst="rect">
-            <a:avLst/>
-          </a:prstGeom>
-        </p:spPr>
-      </p:pic>
-      <p:sp>
-        <p:nvSpPr>
-          <p:cNvPr id="35" name="Text 30"/>
-          <p:cNvSpPr txBox="1"/>
-          <p:nvPr/>
-        </p:nvSpPr>
-        <p:spPr>
-          <a:xfrm>
-            <a:off x="9281160" y="2212848"/>
-            <a:ext cx="2286000" cy="411480"/>
-          </a:xfrm>
-          <a:prstGeom prst="rect">
-            <a:avLst/>
-          </a:prstGeom>
-          <a:noFill/>
-          <a:ln/>
-        </p:spPr>
-        <p:txBody>
-          <a:bodyPr wrap="square" lIns="0" tIns="0" rIns="0" bIns="0" rtlCol="0" anchor="t"/>
-          <a:lstStyle/>
-          <a:p>
-            <a:pPr indent="0" marL="0">
-              <a:buNone/>
-            </a:pPr>
-            <a:r>
-              <a:rPr lang="en-US" sz="2200" b="1" dirty="0">
-                <a:solidFill>
-                  <a:srgbClr val="071D41"/>
-                </a:solidFill>
-                <a:latin typeface="Montserrat" pitchFamily="34" charset="0"/>
-                <a:ea typeface="Montserrat" pitchFamily="34" charset="-122"/>
-                <a:cs typeface="Montserrat" pitchFamily="34" charset="-120"/>
-              </a:rPr>
-              <a:t>Município</a:t>
-            </a:r>
-            <a:endParaRPr lang="en-US" sz="2200" dirty="0"/>
-          </a:p>
-        </p:txBody>
-      </p:sp>
-      <p:sp>
-        <p:nvSpPr>
-          <p:cNvPr id="36" name="Text 31"/>
-          <p:cNvSpPr txBox="1"/>
-          <p:nvPr/>
-        </p:nvSpPr>
-        <p:spPr>
-          <a:xfrm>
-            <a:off x="9281160" y="2633472"/>
-            <a:ext cx="2286000" cy="365760"/>
-          </a:xfrm>
-          <a:prstGeom prst="rect">
-            <a:avLst/>
-          </a:prstGeom>
-          <a:noFill/>
-          <a:ln/>
-        </p:spPr>
-        <p:txBody>
-          <a:bodyPr wrap="square" lIns="0" tIns="0" rIns="0" bIns="0" rtlCol="0" anchor="t"/>
-          <a:lstStyle/>
-          <a:p>
-            <a:pPr indent="0" marL="0">
-              <a:buNone/>
-            </a:pPr>
-            <a:r>
-              <a:rPr lang="en-US" sz="1100" dirty="0">
-                <a:solidFill>
-                  <a:srgbClr val="5D6673"/>
-                </a:solidFill>
-              </a:rPr>
-              <a:t>Defesa Civil municipal</a:t>
-            </a:r>
-            <a:endParaRPr lang="en-US" sz="1100" dirty="0"/>
-          </a:p>
-        </p:txBody>
-      </p:sp>
-      <p:sp>
-        <p:nvSpPr>
-          <p:cNvPr id="37" name="Shape 32"/>
-          <p:cNvSpPr/>
-          <p:nvPr/>
-        </p:nvSpPr>
-        <p:spPr>
-          <a:xfrm>
-            <a:off x="8366760" y="3246120"/>
-            <a:ext cx="384048" cy="384048"/>
-          </a:xfrm>
-          <a:prstGeom prst="ellipse">
-            <a:avLst/>
-          </a:prstGeom>
-          <a:solidFill>
-            <a:srgbClr val="FFFFFF"/>
-          </a:solidFill>
-          <a:ln w="15875">
-            <a:solidFill>
-              <a:srgbClr val="1351B4"/>
-            </a:solidFill>
-            <a:prstDash val="solid"/>
-          </a:ln>
-        </p:spPr>
-      </p:sp>
-      <p:sp>
-        <p:nvSpPr>
-          <p:cNvPr id="38" name="Text 33"/>
-          <p:cNvSpPr txBox="1"/>
-          <p:nvPr/>
-        </p:nvSpPr>
-        <p:spPr>
-          <a:xfrm>
-            <a:off x="8366760" y="3246120"/>
-            <a:ext cx="384048" cy="384048"/>
-          </a:xfrm>
-          <a:prstGeom prst="rect">
-            <a:avLst/>
-          </a:prstGeom>
-          <a:noFill/>
-          <a:ln/>
-        </p:spPr>
-        <p:txBody>
-          <a:bodyPr wrap="square" lIns="0" tIns="0" rIns="0" bIns="0" rtlCol="0" anchor="ctr"/>
-          <a:lstStyle/>
-          <a:p>
-            <a:pPr algn="ctr" indent="0" marL="0">
-              <a:buNone/>
-            </a:pPr>
-            <a:r>
-              <a:rPr lang="en-US" sz="1300" b="1" dirty="0">
-                <a:solidFill>
-                  <a:srgbClr val="1351B4"/>
-                </a:solidFill>
-              </a:rPr>
-              <a:t>1</a:t>
-            </a:r>
-            <a:endParaRPr lang="en-US" sz="1300" dirty="0"/>
-          </a:p>
-        </p:txBody>
-      </p:sp>
-      <p:sp>
-        <p:nvSpPr>
-          <p:cNvPr id="39" name="Text 34"/>
-          <p:cNvSpPr txBox="1"/>
-          <p:nvPr/>
-        </p:nvSpPr>
-        <p:spPr>
-          <a:xfrm>
-            <a:off x="8869680" y="3227832"/>
-            <a:ext cx="2651760" cy="640080"/>
-          </a:xfrm>
-          <a:prstGeom prst="rect">
-            <a:avLst/>
-          </a:prstGeom>
-          <a:noFill/>
-          <a:ln/>
-        </p:spPr>
-        <p:txBody>
-          <a:bodyPr wrap="square" lIns="0" tIns="0" rIns="0" bIns="0" rtlCol="0" anchor="t"/>
-          <a:lstStyle/>
-          <a:p>
-            <a:pPr indent="0" marL="0">
-              <a:buNone/>
-            </a:pPr>
-            <a:r>
-              <a:rPr lang="en-US" sz="1350" dirty="0">
-                <a:solidFill>
-                  <a:srgbClr val="1B1B1B"/>
-                </a:solidFill>
-              </a:rPr>
-              <a:t>Atualiza abrigos e pontos de apoio num formulário</a:t>
-            </a:r>
-            <a:endParaRPr lang="en-US" sz="1350" dirty="0"/>
-          </a:p>
-        </p:txBody>
-      </p:sp>
-      <p:sp>
-        <p:nvSpPr>
-          <p:cNvPr id="40" name="Shape 35"/>
-          <p:cNvSpPr/>
-          <p:nvPr/>
-        </p:nvSpPr>
-        <p:spPr>
-          <a:xfrm>
-            <a:off x="8366760" y="3959352"/>
-            <a:ext cx="384048" cy="384048"/>
-          </a:xfrm>
-          <a:prstGeom prst="ellipse">
-            <a:avLst/>
-          </a:prstGeom>
-          <a:solidFill>
-            <a:srgbClr val="FFFFFF"/>
-          </a:solidFill>
-          <a:ln w="15875">
-            <a:solidFill>
-              <a:srgbClr val="1351B4"/>
-            </a:solidFill>
-            <a:prstDash val="solid"/>
-          </a:ln>
-        </p:spPr>
-      </p:sp>
-      <p:sp>
-        <p:nvSpPr>
-          <p:cNvPr id="41" name="Text 36"/>
-          <p:cNvSpPr txBox="1"/>
-          <p:nvPr/>
-        </p:nvSpPr>
-        <p:spPr>
-          <a:xfrm>
-            <a:off x="8366760" y="3959352"/>
-            <a:ext cx="384048" cy="384048"/>
-          </a:xfrm>
-          <a:prstGeom prst="rect">
-            <a:avLst/>
-          </a:prstGeom>
-          <a:noFill/>
-          <a:ln/>
-        </p:spPr>
-        <p:txBody>
-          <a:bodyPr wrap="square" lIns="0" tIns="0" rIns="0" bIns="0" rtlCol="0" anchor="ctr"/>
-          <a:lstStyle/>
-          <a:p>
-            <a:pPr algn="ctr" indent="0" marL="0">
-              <a:buNone/>
-            </a:pPr>
-            <a:r>
-              <a:rPr lang="en-US" sz="1300" b="1" dirty="0">
-                <a:solidFill>
-                  <a:srgbClr val="1351B4"/>
-                </a:solidFill>
-              </a:rPr>
-              <a:t>2</a:t>
-            </a:r>
-            <a:endParaRPr lang="en-US" sz="1300" dirty="0"/>
-          </a:p>
-        </p:txBody>
-      </p:sp>
-      <p:sp>
-        <p:nvSpPr>
-          <p:cNvPr id="42" name="Text 37"/>
-          <p:cNvSpPr txBox="1"/>
-          <p:nvPr/>
-        </p:nvSpPr>
-        <p:spPr>
-          <a:xfrm>
-            <a:off x="8869680" y="3941064"/>
-            <a:ext cx="2651760" cy="640080"/>
-          </a:xfrm>
-          <a:prstGeom prst="rect">
-            <a:avLst/>
-          </a:prstGeom>
-          <a:noFill/>
-          <a:ln/>
-        </p:spPr>
-        <p:txBody>
-          <a:bodyPr wrap="square" lIns="0" tIns="0" rIns="0" bIns="0" rtlCol="0" anchor="t"/>
-          <a:lstStyle/>
-          <a:p>
-            <a:pPr indent="0" marL="0">
-              <a:buNone/>
-            </a:pPr>
-            <a:r>
-              <a:rPr lang="en-US" sz="1350" dirty="0">
-                <a:solidFill>
-                  <a:srgbClr val="1B1B1B"/>
-                </a:solidFill>
-              </a:rPr>
-              <a:t>Escolhe a orientação local a partir de modelos</a:t>
-            </a:r>
-            <a:endParaRPr lang="en-US" sz="1350" dirty="0"/>
-          </a:p>
-        </p:txBody>
-      </p:sp>
-      <p:sp>
-        <p:nvSpPr>
-          <p:cNvPr id="43" name="Shape 38"/>
-          <p:cNvSpPr/>
-          <p:nvPr/>
-        </p:nvSpPr>
-        <p:spPr>
-          <a:xfrm>
-            <a:off x="8366760" y="4672584"/>
-            <a:ext cx="384048" cy="384048"/>
-          </a:xfrm>
-          <a:prstGeom prst="ellipse">
-            <a:avLst/>
-          </a:prstGeom>
-          <a:solidFill>
-            <a:srgbClr val="FFFFFF"/>
-          </a:solidFill>
-          <a:ln w="15875">
-            <a:solidFill>
-              <a:srgbClr val="1351B4"/>
-            </a:solidFill>
-            <a:prstDash val="solid"/>
-          </a:ln>
-        </p:spPr>
-      </p:sp>
-      <p:sp>
-        <p:nvSpPr>
-          <p:cNvPr id="44" name="Text 39"/>
-          <p:cNvSpPr txBox="1"/>
-          <p:nvPr/>
-        </p:nvSpPr>
-        <p:spPr>
-          <a:xfrm>
-            <a:off x="8366760" y="4672584"/>
-            <a:ext cx="384048" cy="384048"/>
-          </a:xfrm>
-          <a:prstGeom prst="rect">
-            <a:avLst/>
-          </a:prstGeom>
-          <a:noFill/>
-          <a:ln/>
-        </p:spPr>
-        <p:txBody>
-          <a:bodyPr wrap="square" lIns="0" tIns="0" rIns="0" bIns="0" rtlCol="0" anchor="ctr"/>
-          <a:lstStyle/>
-          <a:p>
-            <a:pPr algn="ctr" indent="0" marL="0">
-              <a:buNone/>
-            </a:pPr>
-            <a:r>
-              <a:rPr lang="en-US" sz="1300" b="1" dirty="0">
-                <a:solidFill>
-                  <a:srgbClr val="1351B4"/>
-                </a:solidFill>
-              </a:rPr>
-              <a:t>3</a:t>
-            </a:r>
-            <a:endParaRPr lang="en-US" sz="1300" dirty="0"/>
-          </a:p>
-        </p:txBody>
-      </p:sp>
-      <p:sp>
-        <p:nvSpPr>
-          <p:cNvPr id="45" name="Text 40"/>
-          <p:cNvSpPr txBox="1"/>
-          <p:nvPr/>
-        </p:nvSpPr>
-        <p:spPr>
-          <a:xfrm>
-            <a:off x="8869680" y="4654296"/>
-            <a:ext cx="2651760" cy="640080"/>
-          </a:xfrm>
-          <a:prstGeom prst="rect">
-            <a:avLst/>
-          </a:prstGeom>
-          <a:noFill/>
-          <a:ln/>
-        </p:spPr>
-        <p:txBody>
-          <a:bodyPr wrap="square" lIns="0" tIns="0" rIns="0" bIns="0" rtlCol="0" anchor="t"/>
-          <a:lstStyle/>
-          <a:p>
-            <a:pPr indent="0" marL="0">
-              <a:buNone/>
-            </a:pPr>
-            <a:r>
-              <a:rPr lang="en-US" sz="1350" dirty="0">
-                <a:solidFill>
-                  <a:srgbClr val="1B1B1B"/>
-                </a:solidFill>
-              </a:rPr>
-              <a:t>Responde aos pedidos de ajuda do bairro</a:t>
-            </a:r>
-            <a:endParaRPr lang="en-US" sz="1350" dirty="0"/>
-          </a:p>
-        </p:txBody>
-      </p:sp>
-      <p:sp>
-        <p:nvSpPr>
-          <p:cNvPr id="46" name="Shape 41"/>
-          <p:cNvSpPr/>
-          <p:nvPr/>
-        </p:nvSpPr>
-        <p:spPr>
-          <a:xfrm>
-            <a:off x="502920" y="5623560"/>
-            <a:ext cx="11155680" cy="502920"/>
-          </a:xfrm>
-          <a:prstGeom prst="roundRect">
-            <a:avLst>
-              <a:gd name="adj" fmla="val 21818"/>
-            </a:avLst>
-          </a:prstGeom>
-          <a:solidFill>
-            <a:srgbClr val="E3F5E1"/>
-          </a:solidFill>
-          <a:ln w="12700">
-            <a:solidFill>
-              <a:srgbClr val="E3F5E1"/>
-            </a:solidFill>
-            <a:prstDash val="solid"/>
-          </a:ln>
-        </p:spPr>
-      </p:sp>
-      <p:sp>
-        <p:nvSpPr>
-          <p:cNvPr id="47" name="Text 42"/>
-          <p:cNvSpPr txBox="1"/>
-          <p:nvPr/>
-        </p:nvSpPr>
-        <p:spPr>
-          <a:xfrm>
-            <a:off x="731520" y="5623560"/>
-            <a:ext cx="10789920" cy="502920"/>
-          </a:xfrm>
-          <a:prstGeom prst="rect">
-            <a:avLst/>
-          </a:prstGeom>
-          <a:noFill/>
-          <a:ln/>
-        </p:spPr>
-        <p:txBody>
-          <a:bodyPr wrap="square" lIns="0" tIns="0" rIns="0" bIns="0" rtlCol="0" anchor="ctr"/>
-          <a:lstStyle/>
-          <a:p>
-            <a:pPr indent="0" marL="0">
-              <a:buNone/>
-            </a:pPr>
-            <a:r>
-              <a:rPr lang="en-US" sz="1350" b="1" dirty="0">
-                <a:solidFill>
-                  <a:srgbClr val="168821"/>
-                </a:solidFill>
-              </a:rPr>
-              <a:t>Treinamento de 1 hora · um celular basta para operar · comunidade e voluntários confirmam no local pelo próprio app</a:t>
-            </a:r>
-            <a:endParaRPr lang="en-US" sz="1350" dirty="0"/>
+              <a:rPr lang="en-US" sz="1050" dirty="0">
+                <a:solidFill>
+                  <a:srgbClr val="9FB3D1"/>
+                </a:solidFill>
+              </a:rPr>
+              <a:t>Protótipo estático com dados simulados · celular e computador</a:t>
+            </a:r>
+            <a:endParaRPr lang="en-US" sz="1050" dirty="0"/>
           </a:p>
         </p:txBody>
       </p:sp>
@@ -5697,7 +4741,7 @@
           <a:bodyPr wrap="square" lIns="0" tIns="0" rIns="0" bIns="0" rtlCol="0" anchor="t"/>
           <a:lstStyle/>
           <a:p>
-            <a:pPr indent="0" marL="0">
+            <a:pPr algn="l" indent="0" marL="0">
               <a:buNone/>
             </a:pPr>
             <a:r>
@@ -5709,7 +4753,7 @@
                 <a:ea typeface="Montserrat" pitchFamily="34" charset="-122"/>
                 <a:cs typeface="Montserrat" pitchFamily="34" charset="-120"/>
               </a:rPr>
-              <a:t>Barato porque reaproveita o que o Brasil já tem.</a:t>
+              <a:t>Simples para quem opera: só navegador e celular.</a:t>
             </a:r>
             <a:endParaRPr lang="en-US" sz="3000" dirty="0"/>
           </a:p>
@@ -5717,26 +4761,62 @@
       </p:sp>
       <p:sp>
         <p:nvSpPr>
-          <p:cNvPr id="3" name="Shape 1"/>
+          <p:cNvPr id="3" name="Text 1"/>
+          <p:cNvSpPr txBox="1"/>
+          <p:nvPr/>
+        </p:nvSpPr>
+        <p:spPr>
+          <a:xfrm>
+            <a:off x="502920" y="1417320"/>
+            <a:ext cx="11155680" cy="365760"/>
+          </a:xfrm>
+          <a:prstGeom prst="rect">
+            <a:avLst/>
+          </a:prstGeom>
+          <a:noFill/>
+          <a:ln/>
+        </p:spPr>
+        <p:txBody>
+          <a:bodyPr wrap="square" lIns="0" tIns="0" rIns="0" bIns="0" rtlCol="0" anchor="t"/>
+          <a:lstStyle/>
+          <a:p>
+            <a:pPr indent="0" marL="0">
+              <a:buNone/>
+            </a:pPr>
+            <a:r>
+              <a:rPr lang="en-US" sz="1500" dirty="0">
+                <a:solidFill>
+                  <a:srgbClr val="5D6673"/>
+                </a:solidFill>
+              </a:rPr>
+              <a:t>Sem servidores locais e sem máquinas novas: a plataforma roda na nuvem de governo mantida pela União.</a:t>
+            </a:r>
+            <a:endParaRPr lang="en-US" sz="1500" dirty="0"/>
+          </a:p>
+        </p:txBody>
+      </p:sp>
+      <p:sp>
+        <p:nvSpPr>
+          <p:cNvPr id="4" name="Shape 2"/>
           <p:cNvSpPr/>
           <p:nvPr/>
         </p:nvSpPr>
         <p:spPr>
           <a:xfrm>
-            <a:off x="502920" y="1737360"/>
-            <a:ext cx="4937760" cy="4023360"/>
+            <a:off x="502920" y="1965960"/>
+            <a:ext cx="3611880" cy="3520440"/>
           </a:xfrm>
           <a:prstGeom prst="roundRect">
             <a:avLst>
-              <a:gd name="adj" fmla="val 2727"/>
+              <a:gd name="adj" fmla="val 3117"/>
             </a:avLst>
           </a:prstGeom>
           <a:solidFill>
-            <a:srgbClr val="071D41"/>
+            <a:srgbClr val="F2F5FA"/>
           </a:solidFill>
           <a:ln w="12700">
             <a:solidFill>
-              <a:srgbClr val="071D41"/>
+              <a:srgbClr val="F2F5FA"/>
             </a:solidFill>
             <a:prstDash val="solid"/>
           </a:ln>
@@ -5744,210 +4824,24 @@
       </p:sp>
       <p:sp>
         <p:nvSpPr>
-          <p:cNvPr id="4" name="Text 2"/>
-          <p:cNvSpPr txBox="1"/>
-          <p:nvPr/>
-        </p:nvSpPr>
-        <p:spPr>
-          <a:xfrm>
-            <a:off x="822960" y="2057400"/>
-            <a:ext cx="4480560" cy="914400"/>
-          </a:xfrm>
-          <a:prstGeom prst="rect">
-            <a:avLst/>
-          </a:prstGeom>
-          <a:noFill/>
-          <a:ln/>
-        </p:spPr>
-        <p:txBody>
-          <a:bodyPr wrap="square" lIns="0" tIns="0" rIns="0" bIns="0" rtlCol="0" anchor="t"/>
-          <a:lstStyle/>
-          <a:p>
-            <a:pPr indent="0" marL="0">
-              <a:buNone/>
-            </a:pPr>
-            <a:r>
-              <a:rPr lang="en-US" sz="3400" b="1" dirty="0">
-                <a:solidFill>
-                  <a:srgbClr val="E86F25"/>
-                </a:solidFill>
-                <a:latin typeface="Montserrat" pitchFamily="34" charset="0"/>
-                <a:ea typeface="Montserrat" pitchFamily="34" charset="-122"/>
-                <a:cs typeface="Montserrat" pitchFamily="34" charset="-120"/>
-              </a:rPr>
-              <a:t>US$ 1 → US$ 4 a 36</a:t>
-            </a:r>
-            <a:endParaRPr lang="en-US" sz="3400" dirty="0"/>
-          </a:p>
-        </p:txBody>
-      </p:sp>
-      <p:sp>
-        <p:nvSpPr>
-          <p:cNvPr id="5" name="Text 3"/>
-          <p:cNvSpPr txBox="1"/>
-          <p:nvPr/>
-        </p:nvSpPr>
-        <p:spPr>
-          <a:xfrm>
-            <a:off x="822960" y="3063240"/>
-            <a:ext cx="4297680" cy="1188720"/>
-          </a:xfrm>
-          <a:prstGeom prst="rect">
-            <a:avLst/>
-          </a:prstGeom>
-          <a:noFill/>
-          <a:ln/>
-        </p:spPr>
-        <p:txBody>
-          <a:bodyPr wrap="square" lIns="0" tIns="0" rIns="0" bIns="0" rtlCol="0" anchor="t"/>
-          <a:lstStyle/>
-          <a:p>
-            <a:pPr indent="0" marL="0">
-              <a:buNone/>
-            </a:pPr>
-            <a:r>
-              <a:rPr lang="en-US" sz="1500" dirty="0">
-                <a:solidFill>
-                  <a:srgbClr val="FFFFFF"/>
-                </a:solidFill>
-              </a:rPr>
-              <a:t>de benefício para cada dólar investido em serviços meteorológicos e alerta precoce em países em desenvolvimento.</a:t>
-            </a:r>
-            <a:endParaRPr lang="en-US" sz="1500" dirty="0"/>
-          </a:p>
-        </p:txBody>
-      </p:sp>
-      <p:sp>
-        <p:nvSpPr>
-          <p:cNvPr id="6" name="Text 4"/>
-          <p:cNvSpPr txBox="1"/>
-          <p:nvPr/>
-        </p:nvSpPr>
-        <p:spPr>
-          <a:xfrm>
-            <a:off x="822960" y="4343400"/>
-            <a:ext cx="4297680" cy="320040"/>
-          </a:xfrm>
-          <a:prstGeom prst="rect">
-            <a:avLst/>
-          </a:prstGeom>
-          <a:noFill/>
-          <a:ln/>
-        </p:spPr>
-        <p:txBody>
-          <a:bodyPr wrap="square" lIns="0" tIns="0" rIns="0" bIns="0" rtlCol="0" anchor="t"/>
-          <a:lstStyle/>
-          <a:p>
-            <a:pPr indent="0" marL="0">
-              <a:buNone/>
-            </a:pPr>
-            <a:r>
-              <a:rPr lang="en-US" sz="1100" i="1" dirty="0">
-                <a:solidFill>
-                  <a:srgbClr val="9FB3D1"/>
-                </a:solidFill>
-              </a:rPr>
-              <a:t>Hallegatte, Banco Mundial (2012)</a:t>
-            </a:r>
-            <a:endParaRPr lang="en-US" sz="1100" dirty="0"/>
-          </a:p>
-        </p:txBody>
-      </p:sp>
-      <p:sp>
-        <p:nvSpPr>
-          <p:cNvPr id="7" name="Text 5"/>
-          <p:cNvSpPr txBox="1"/>
-          <p:nvPr/>
-        </p:nvSpPr>
-        <p:spPr>
-          <a:xfrm>
-            <a:off x="822960" y="4754880"/>
-            <a:ext cx="4297680" cy="457200"/>
-          </a:xfrm>
-          <a:prstGeom prst="rect">
-            <a:avLst/>
-          </a:prstGeom>
-          <a:noFill/>
-          <a:ln/>
-        </p:spPr>
-        <p:txBody>
-          <a:bodyPr wrap="square" lIns="0" tIns="0" rIns="0" bIns="0" rtlCol="0" anchor="t"/>
-          <a:lstStyle/>
-          <a:p>
-            <a:pPr indent="0" marL="0">
-              <a:buNone/>
-            </a:pPr>
-            <a:r>
-              <a:rPr lang="en-US" sz="2200" b="1" dirty="0">
-                <a:solidFill>
-                  <a:srgbClr val="FFFFFF"/>
-                </a:solidFill>
-                <a:latin typeface="Montserrat" pitchFamily="34" charset="0"/>
-                <a:ea typeface="Montserrat" pitchFamily="34" charset="-122"/>
-                <a:cs typeface="Montserrat" pitchFamily="34" charset="-120"/>
-              </a:rPr>
-              <a:t>R$ 9,2 bilhões</a:t>
-            </a:r>
-            <a:endParaRPr lang="en-US" sz="2200" dirty="0"/>
-          </a:p>
-        </p:txBody>
-      </p:sp>
-      <p:sp>
-        <p:nvSpPr>
-          <p:cNvPr id="8" name="Text 6"/>
-          <p:cNvSpPr txBox="1"/>
-          <p:nvPr/>
-        </p:nvSpPr>
-        <p:spPr>
-          <a:xfrm>
-            <a:off x="822960" y="5193792"/>
-            <a:ext cx="4297680" cy="365760"/>
-          </a:xfrm>
-          <a:prstGeom prst="rect">
-            <a:avLst/>
-          </a:prstGeom>
-          <a:noFill/>
-          <a:ln/>
-        </p:spPr>
-        <p:txBody>
-          <a:bodyPr wrap="square" lIns="0" tIns="0" rIns="0" bIns="0" rtlCol="0" anchor="t"/>
-          <a:lstStyle/>
-          <a:p>
-            <a:pPr indent="0" marL="0">
-              <a:buNone/>
-            </a:pPr>
-            <a:r>
-              <a:rPr lang="en-US" sz="1300" dirty="0">
-                <a:solidFill>
-                  <a:srgbClr val="C9D7EE"/>
-                </a:solidFill>
-              </a:rPr>
-              <a:t>em prejuízos com chuvas no Brasil só em 2024</a:t>
-            </a:r>
-            <a:endParaRPr lang="en-US" sz="1300" dirty="0"/>
-          </a:p>
-        </p:txBody>
-      </p:sp>
-      <p:sp>
-        <p:nvSpPr>
-          <p:cNvPr id="9" name="Shape 7"/>
+          <p:cNvPr id="5" name="Shape 3"/>
           <p:cNvSpPr/>
           <p:nvPr/>
         </p:nvSpPr>
         <p:spPr>
           <a:xfrm>
-            <a:off x="5806440" y="1783080"/>
-            <a:ext cx="640080" cy="640080"/>
+            <a:off x="777240" y="2194560"/>
+            <a:ext cx="731520" cy="731520"/>
           </a:xfrm>
           <a:prstGeom prst="ellipse">
             <a:avLst/>
           </a:prstGeom>
           <a:solidFill>
-            <a:srgbClr val="DBE8FB"/>
+            <a:srgbClr val="1351B4"/>
           </a:solidFill>
           <a:ln w="12700">
             <a:solidFill>
-              <a:srgbClr val="DBE8FB"/>
+              <a:srgbClr val="1351B4"/>
             </a:solidFill>
             <a:prstDash val="solid"/>
           </a:ln>
@@ -5955,7 +4849,7 @@
       </p:sp>
       <p:pic>
         <p:nvPicPr>
-          <p:cNvPr id="10" name="Image 0" descr="preencoded.png">    </p:cNvPr>
+          <p:cNvPr id="6" name="Image 0" descr="preencoded.png">    </p:cNvPr>
           <p:cNvPicPr>
             <a:picLocks noChangeAspect="1"/>
           </p:cNvPicPr>
@@ -5969,8 +4863,8 @@
         </p:blipFill>
         <p:spPr>
           <a:xfrm>
-            <a:off x="5966460" y="1943100"/>
-            <a:ext cx="320040" cy="320040"/>
+            <a:off x="960120" y="2377440"/>
+            <a:ext cx="365760" cy="365760"/>
           </a:xfrm>
           <a:prstGeom prst="rect">
             <a:avLst/>
@@ -5979,38 +4873,160 @@
       </p:pic>
       <p:sp>
         <p:nvSpPr>
+          <p:cNvPr id="7" name="Text 4"/>
+          <p:cNvSpPr txBox="1"/>
+          <p:nvPr/>
+        </p:nvSpPr>
+        <p:spPr>
+          <a:xfrm>
+            <a:off x="1691640" y="2212848"/>
+            <a:ext cx="2286000" cy="411480"/>
+          </a:xfrm>
+          <a:prstGeom prst="rect">
+            <a:avLst/>
+          </a:prstGeom>
+          <a:noFill/>
+          <a:ln/>
+        </p:spPr>
+        <p:txBody>
+          <a:bodyPr wrap="square" lIns="0" tIns="0" rIns="0" bIns="0" rtlCol="0" anchor="t"/>
+          <a:lstStyle/>
+          <a:p>
+            <a:pPr indent="0" marL="0">
+              <a:buNone/>
+            </a:pPr>
+            <a:r>
+              <a:rPr lang="en-US" sz="2200" b="1" dirty="0">
+                <a:solidFill>
+                  <a:srgbClr val="071D41"/>
+                </a:solidFill>
+                <a:latin typeface="Montserrat" pitchFamily="34" charset="0"/>
+                <a:ea typeface="Montserrat" pitchFamily="34" charset="-122"/>
+                <a:cs typeface="Montserrat" pitchFamily="34" charset="-120"/>
+              </a:rPr>
+              <a:t>União</a:t>
+            </a:r>
+            <a:endParaRPr lang="en-US" sz="2200" dirty="0"/>
+          </a:p>
+        </p:txBody>
+      </p:sp>
+      <p:sp>
+        <p:nvSpPr>
+          <p:cNvPr id="8" name="Text 5"/>
+          <p:cNvSpPr txBox="1"/>
+          <p:nvPr/>
+        </p:nvSpPr>
+        <p:spPr>
+          <a:xfrm>
+            <a:off x="1691640" y="2633472"/>
+            <a:ext cx="2286000" cy="365760"/>
+          </a:xfrm>
+          <a:prstGeom prst="rect">
+            <a:avLst/>
+          </a:prstGeom>
+          <a:noFill/>
+          <a:ln/>
+        </p:spPr>
+        <p:txBody>
+          <a:bodyPr wrap="square" lIns="0" tIns="0" rIns="0" bIns="0" rtlCol="0" anchor="t"/>
+          <a:lstStyle/>
+          <a:p>
+            <a:pPr indent="0" marL="0">
+              <a:buNone/>
+            </a:pPr>
+            <a:r>
+              <a:rPr lang="en-US" sz="1100" dirty="0">
+                <a:solidFill>
+                  <a:srgbClr val="5D6673"/>
+                </a:solidFill>
+              </a:rPr>
+              <a:t>Defesa Civil Nacional, Cemaden, Inmet</a:t>
+            </a:r>
+            <a:endParaRPr lang="en-US" sz="1100" dirty="0"/>
+          </a:p>
+        </p:txBody>
+      </p:sp>
+      <p:sp>
+        <p:nvSpPr>
+          <p:cNvPr id="9" name="Shape 6"/>
+          <p:cNvSpPr/>
+          <p:nvPr/>
+        </p:nvSpPr>
+        <p:spPr>
+          <a:xfrm>
+            <a:off x="777240" y="3246120"/>
+            <a:ext cx="384048" cy="384048"/>
+          </a:xfrm>
+          <a:prstGeom prst="ellipse">
+            <a:avLst/>
+          </a:prstGeom>
+          <a:solidFill>
+            <a:srgbClr val="FFFFFF"/>
+          </a:solidFill>
+          <a:ln w="15875">
+            <a:solidFill>
+              <a:srgbClr val="1351B4"/>
+            </a:solidFill>
+            <a:prstDash val="solid"/>
+          </a:ln>
+        </p:spPr>
+      </p:sp>
+      <p:sp>
+        <p:nvSpPr>
+          <p:cNvPr id="10" name="Text 7"/>
+          <p:cNvSpPr txBox="1"/>
+          <p:nvPr/>
+        </p:nvSpPr>
+        <p:spPr>
+          <a:xfrm>
+            <a:off x="777240" y="3246120"/>
+            <a:ext cx="384048" cy="384048"/>
+          </a:xfrm>
+          <a:prstGeom prst="rect">
+            <a:avLst/>
+          </a:prstGeom>
+          <a:noFill/>
+          <a:ln/>
+        </p:spPr>
+        <p:txBody>
+          <a:bodyPr wrap="square" lIns="0" tIns="0" rIns="0" bIns="0" rtlCol="0" anchor="ctr"/>
+          <a:lstStyle/>
+          <a:p>
+            <a:pPr algn="ctr" indent="0" marL="0">
+              <a:buNone/>
+            </a:pPr>
+            <a:r>
+              <a:rPr lang="en-US" sz="1300" b="1" dirty="0">
+                <a:solidFill>
+                  <a:srgbClr val="1351B4"/>
+                </a:solidFill>
+              </a:rPr>
+              <a:t>1</a:t>
+            </a:r>
+            <a:endParaRPr lang="en-US" sz="1300" dirty="0"/>
+          </a:p>
+        </p:txBody>
+      </p:sp>
+      <p:sp>
+        <p:nvSpPr>
           <p:cNvPr id="11" name="Text 8"/>
           <p:cNvSpPr txBox="1"/>
           <p:nvPr/>
         </p:nvSpPr>
         <p:spPr>
           <a:xfrm>
-            <a:off x="6629400" y="1737360"/>
-            <a:ext cx="5029200" cy="914400"/>
-          </a:xfrm>
-          <a:prstGeom prst="rect">
-            <a:avLst/>
-          </a:prstGeom>
-          <a:noFill/>
-          <a:ln/>
-        </p:spPr>
-        <p:txBody>
-          <a:bodyPr wrap="square" lIns="0" tIns="0" rIns="0" bIns="0" rtlCol="0" anchor="t"/>
-          <a:lstStyle/>
-          <a:p>
-            <a:pPr indent="0" marL="0">
-              <a:buNone/>
-            </a:pPr>
-            <a:r>
-              <a:rPr lang="en-US" sz="1600" b="1" dirty="0">
-                <a:solidFill>
-                  <a:srgbClr val="071D41"/>
-                </a:solidFill>
-              </a:rPr>
-              <a:t>Reaproveita</a:t>
-            </a:r>
-            <a:endParaRPr lang="en-US" sz="1400" dirty="0"/>
-          </a:p>
+            <a:off x="1280160" y="3227832"/>
+            <a:ext cx="2651760" cy="640080"/>
+          </a:xfrm>
+          <a:prstGeom prst="rect">
+            <a:avLst/>
+          </a:prstGeom>
+          <a:noFill/>
+          <a:ln/>
+        </p:spPr>
+        <p:txBody>
+          <a:bodyPr wrap="square" lIns="0" tIns="0" rIns="0" bIns="0" rtlCol="0" anchor="t"/>
+          <a:lstStyle/>
           <a:p>
             <a:pPr indent="0" marL="0">
               <a:buNone/>
@@ -6021,9 +5037,9 @@
                   <a:srgbClr val="1B1B1B"/>
                 </a:solidFill>
               </a:rPr>
-              <a:t>IDAP, cell broadcast, SMS 40199 e dados do Cemaden e Inmet</a:t>
-            </a:r>
-            <a:endParaRPr lang="en-US" sz="1400" dirty="0"/>
+              <a:t>Mantém a plataforma na nuvem de governo</a:t>
+            </a:r>
+            <a:endParaRPr lang="en-US" sz="1350" dirty="0"/>
           </a:p>
         </p:txBody>
       </p:sp>
@@ -6035,26 +5051,247 @@
         </p:nvSpPr>
         <p:spPr>
           <a:xfrm>
-            <a:off x="5806440" y="2807208"/>
-            <a:ext cx="640080" cy="640080"/>
+            <a:off x="777240" y="3959352"/>
+            <a:ext cx="384048" cy="384048"/>
           </a:xfrm>
           <a:prstGeom prst="ellipse">
             <a:avLst/>
           </a:prstGeom>
           <a:solidFill>
-            <a:srgbClr val="DBE8FB"/>
+            <a:srgbClr val="FFFFFF"/>
+          </a:solidFill>
+          <a:ln w="15875">
+            <a:solidFill>
+              <a:srgbClr val="1351B4"/>
+            </a:solidFill>
+            <a:prstDash val="solid"/>
+          </a:ln>
+        </p:spPr>
+      </p:sp>
+      <p:sp>
+        <p:nvSpPr>
+          <p:cNvPr id="13" name="Text 10"/>
+          <p:cNvSpPr txBox="1"/>
+          <p:nvPr/>
+        </p:nvSpPr>
+        <p:spPr>
+          <a:xfrm>
+            <a:off x="777240" y="3959352"/>
+            <a:ext cx="384048" cy="384048"/>
+          </a:xfrm>
+          <a:prstGeom prst="rect">
+            <a:avLst/>
+          </a:prstGeom>
+          <a:noFill/>
+          <a:ln/>
+        </p:spPr>
+        <p:txBody>
+          <a:bodyPr wrap="square" lIns="0" tIns="0" rIns="0" bIns="0" rtlCol="0" anchor="ctr"/>
+          <a:lstStyle/>
+          <a:p>
+            <a:pPr algn="ctr" indent="0" marL="0">
+              <a:buNone/>
+            </a:pPr>
+            <a:r>
+              <a:rPr lang="en-US" sz="1300" b="1" dirty="0">
+                <a:solidFill>
+                  <a:srgbClr val="1351B4"/>
+                </a:solidFill>
+              </a:rPr>
+              <a:t>2</a:t>
+            </a:r>
+            <a:endParaRPr lang="en-US" sz="1300" dirty="0"/>
+          </a:p>
+        </p:txBody>
+      </p:sp>
+      <p:sp>
+        <p:nvSpPr>
+          <p:cNvPr id="14" name="Text 11"/>
+          <p:cNvSpPr txBox="1"/>
+          <p:nvPr/>
+        </p:nvSpPr>
+        <p:spPr>
+          <a:xfrm>
+            <a:off x="1280160" y="3941064"/>
+            <a:ext cx="2651760" cy="640080"/>
+          </a:xfrm>
+          <a:prstGeom prst="rect">
+            <a:avLst/>
+          </a:prstGeom>
+          <a:noFill/>
+          <a:ln/>
+        </p:spPr>
+        <p:txBody>
+          <a:bodyPr wrap="square" lIns="0" tIns="0" rIns="0" bIns="0" rtlCol="0" anchor="t"/>
+          <a:lstStyle/>
+          <a:p>
+            <a:pPr indent="0" marL="0">
+              <a:buNone/>
+            </a:pPr>
+            <a:r>
+              <a:rPr lang="en-US" sz="1350" dirty="0">
+                <a:solidFill>
+                  <a:srgbClr val="1B1B1B"/>
+                </a:solidFill>
+              </a:rPr>
+              <a:t>Envia o alerta oficial assinado (IDAP)</a:t>
+            </a:r>
+            <a:endParaRPr lang="en-US" sz="1350" dirty="0"/>
+          </a:p>
+        </p:txBody>
+      </p:sp>
+      <p:sp>
+        <p:nvSpPr>
+          <p:cNvPr id="15" name="Shape 12"/>
+          <p:cNvSpPr/>
+          <p:nvPr/>
+        </p:nvSpPr>
+        <p:spPr>
+          <a:xfrm>
+            <a:off x="777240" y="4672584"/>
+            <a:ext cx="384048" cy="384048"/>
+          </a:xfrm>
+          <a:prstGeom prst="ellipse">
+            <a:avLst/>
+          </a:prstGeom>
+          <a:solidFill>
+            <a:srgbClr val="FFFFFF"/>
+          </a:solidFill>
+          <a:ln w="15875">
+            <a:solidFill>
+              <a:srgbClr val="1351B4"/>
+            </a:solidFill>
+            <a:prstDash val="solid"/>
+          </a:ln>
+        </p:spPr>
+      </p:sp>
+      <p:sp>
+        <p:nvSpPr>
+          <p:cNvPr id="16" name="Text 13"/>
+          <p:cNvSpPr txBox="1"/>
+          <p:nvPr/>
+        </p:nvSpPr>
+        <p:spPr>
+          <a:xfrm>
+            <a:off x="777240" y="4672584"/>
+            <a:ext cx="384048" cy="384048"/>
+          </a:xfrm>
+          <a:prstGeom prst="rect">
+            <a:avLst/>
+          </a:prstGeom>
+          <a:noFill/>
+          <a:ln/>
+        </p:spPr>
+        <p:txBody>
+          <a:bodyPr wrap="square" lIns="0" tIns="0" rIns="0" bIns="0" rtlCol="0" anchor="ctr"/>
+          <a:lstStyle/>
+          <a:p>
+            <a:pPr algn="ctr" indent="0" marL="0">
+              <a:buNone/>
+            </a:pPr>
+            <a:r>
+              <a:rPr lang="en-US" sz="1300" b="1" dirty="0">
+                <a:solidFill>
+                  <a:srgbClr val="1351B4"/>
+                </a:solidFill>
+              </a:rPr>
+              <a:t>3</a:t>
+            </a:r>
+            <a:endParaRPr lang="en-US" sz="1300" dirty="0"/>
+          </a:p>
+        </p:txBody>
+      </p:sp>
+      <p:sp>
+        <p:nvSpPr>
+          <p:cNvPr id="17" name="Text 14"/>
+          <p:cNvSpPr txBox="1"/>
+          <p:nvPr/>
+        </p:nvSpPr>
+        <p:spPr>
+          <a:xfrm>
+            <a:off x="1280160" y="4654296"/>
+            <a:ext cx="2651760" cy="640080"/>
+          </a:xfrm>
+          <a:prstGeom prst="rect">
+            <a:avLst/>
+          </a:prstGeom>
+          <a:noFill/>
+          <a:ln/>
+        </p:spPr>
+        <p:txBody>
+          <a:bodyPr wrap="square" lIns="0" tIns="0" rIns="0" bIns="0" rtlCol="0" anchor="t"/>
+          <a:lstStyle/>
+          <a:p>
+            <a:pPr indent="0" marL="0">
+              <a:buNone/>
+            </a:pPr>
+            <a:r>
+              <a:rPr lang="en-US" sz="1350" dirty="0">
+                <a:solidFill>
+                  <a:srgbClr val="1B1B1B"/>
+                </a:solidFill>
+              </a:rPr>
+              <a:t>Publica modelos prontos de guias</a:t>
+            </a:r>
+            <a:endParaRPr lang="en-US" sz="1350" dirty="0"/>
+          </a:p>
+        </p:txBody>
+      </p:sp>
+      <p:sp>
+        <p:nvSpPr>
+          <p:cNvPr id="18" name="Shape 15"/>
+          <p:cNvSpPr/>
+          <p:nvPr/>
+        </p:nvSpPr>
+        <p:spPr>
+          <a:xfrm>
+            <a:off x="4297680" y="1965960"/>
+            <a:ext cx="3611880" cy="3520440"/>
+          </a:xfrm>
+          <a:prstGeom prst="roundRect">
+            <a:avLst>
+              <a:gd name="adj" fmla="val 3117"/>
+            </a:avLst>
+          </a:prstGeom>
+          <a:solidFill>
+            <a:srgbClr val="F2F5FA"/>
           </a:solidFill>
           <a:ln w="12700">
             <a:solidFill>
-              <a:srgbClr val="DBE8FB"/>
+              <a:srgbClr val="F2F5FA"/>
             </a:solidFill>
             <a:prstDash val="solid"/>
           </a:ln>
         </p:spPr>
       </p:sp>
+      <p:sp>
+        <p:nvSpPr>
+          <p:cNvPr id="19" name="Shape 16"/>
+          <p:cNvSpPr/>
+          <p:nvPr/>
+        </p:nvSpPr>
+        <p:spPr>
+          <a:xfrm>
+            <a:off x="4572000" y="2194560"/>
+            <a:ext cx="731520" cy="731520"/>
+          </a:xfrm>
+          <a:prstGeom prst="ellipse">
+            <a:avLst/>
+          </a:prstGeom>
+          <a:solidFill>
+            <a:srgbClr val="1351B4"/>
+          </a:solidFill>
+          <a:ln w="12700">
+            <a:solidFill>
+              <a:srgbClr val="1351B4"/>
+            </a:solidFill>
+            <a:prstDash val="solid"/>
+          </a:ln>
+        </p:spPr>
+      </p:sp>
       <p:pic>
         <p:nvPicPr>
-          <p:cNvPr id="13" name="Image 1" descr="preencoded.png">    </p:cNvPr>
+          <p:cNvPr id="20" name="Image 1" descr="preencoded.png">    </p:cNvPr>
           <p:cNvPicPr>
             <a:picLocks noChangeAspect="1"/>
           </p:cNvPicPr>
@@ -6068,8 +5305,8 @@
         </p:blipFill>
         <p:spPr>
           <a:xfrm>
-            <a:off x="5966460" y="2967228"/>
-            <a:ext cx="320040" cy="320040"/>
+            <a:off x="4754880" y="2377440"/>
+            <a:ext cx="365760" cy="365760"/>
           </a:xfrm>
           <a:prstGeom prst="rect">
             <a:avLst/>
@@ -6078,38 +5315,160 @@
       </p:pic>
       <p:sp>
         <p:nvSpPr>
-          <p:cNvPr id="14" name="Text 10"/>
-          <p:cNvSpPr txBox="1"/>
-          <p:nvPr/>
-        </p:nvSpPr>
-        <p:spPr>
-          <a:xfrm>
-            <a:off x="6629400" y="2761488"/>
-            <a:ext cx="5029200" cy="914400"/>
-          </a:xfrm>
-          <a:prstGeom prst="rect">
-            <a:avLst/>
-          </a:prstGeom>
-          <a:noFill/>
-          <a:ln/>
-        </p:spPr>
-        <p:txBody>
-          <a:bodyPr wrap="square" lIns="0" tIns="0" rIns="0" bIns="0" rtlCol="0" anchor="t"/>
-          <a:lstStyle/>
-          <a:p>
-            <a:pPr indent="0" marL="0">
-              <a:buNone/>
-            </a:pPr>
-            <a:r>
-              <a:rPr lang="en-US" sz="1600" b="1" dirty="0">
+          <p:cNvPr id="21" name="Text 17"/>
+          <p:cNvSpPr txBox="1"/>
+          <p:nvPr/>
+        </p:nvSpPr>
+        <p:spPr>
+          <a:xfrm>
+            <a:off x="5486400" y="2212848"/>
+            <a:ext cx="2286000" cy="411480"/>
+          </a:xfrm>
+          <a:prstGeom prst="rect">
+            <a:avLst/>
+          </a:prstGeom>
+          <a:noFill/>
+          <a:ln/>
+        </p:spPr>
+        <p:txBody>
+          <a:bodyPr wrap="square" lIns="0" tIns="0" rIns="0" bIns="0" rtlCol="0" anchor="t"/>
+          <a:lstStyle/>
+          <a:p>
+            <a:pPr indent="0" marL="0">
+              <a:buNone/>
+            </a:pPr>
+            <a:r>
+              <a:rPr lang="en-US" sz="2200" b="1" dirty="0">
                 <a:solidFill>
                   <a:srgbClr val="071D41"/>
                 </a:solidFill>
-              </a:rPr>
-              <a:t>Infraestrutura leve</a:t>
-            </a:r>
-            <a:endParaRPr lang="en-US" sz="1400" dirty="0"/>
-          </a:p>
+                <a:latin typeface="Montserrat" pitchFamily="34" charset="0"/>
+                <a:ea typeface="Montserrat" pitchFamily="34" charset="-122"/>
+                <a:cs typeface="Montserrat" pitchFamily="34" charset="-120"/>
+              </a:rPr>
+              <a:t>Estado</a:t>
+            </a:r>
+            <a:endParaRPr lang="en-US" sz="2200" dirty="0"/>
+          </a:p>
+        </p:txBody>
+      </p:sp>
+      <p:sp>
+        <p:nvSpPr>
+          <p:cNvPr id="22" name="Text 18"/>
+          <p:cNvSpPr txBox="1"/>
+          <p:nvPr/>
+        </p:nvSpPr>
+        <p:spPr>
+          <a:xfrm>
+            <a:off x="5486400" y="2633472"/>
+            <a:ext cx="2286000" cy="365760"/>
+          </a:xfrm>
+          <a:prstGeom prst="rect">
+            <a:avLst/>
+          </a:prstGeom>
+          <a:noFill/>
+          <a:ln/>
+        </p:spPr>
+        <p:txBody>
+          <a:bodyPr wrap="square" lIns="0" tIns="0" rIns="0" bIns="0" rtlCol="0" anchor="t"/>
+          <a:lstStyle/>
+          <a:p>
+            <a:pPr indent="0" marL="0">
+              <a:buNone/>
+            </a:pPr>
+            <a:r>
+              <a:rPr lang="en-US" sz="1100" dirty="0">
+                <a:solidFill>
+                  <a:srgbClr val="5D6673"/>
+                </a:solidFill>
+              </a:rPr>
+              <a:t>Defesa Civil estadual</a:t>
+            </a:r>
+            <a:endParaRPr lang="en-US" sz="1100" dirty="0"/>
+          </a:p>
+        </p:txBody>
+      </p:sp>
+      <p:sp>
+        <p:nvSpPr>
+          <p:cNvPr id="23" name="Shape 19"/>
+          <p:cNvSpPr/>
+          <p:nvPr/>
+        </p:nvSpPr>
+        <p:spPr>
+          <a:xfrm>
+            <a:off x="4572000" y="3246120"/>
+            <a:ext cx="384048" cy="384048"/>
+          </a:xfrm>
+          <a:prstGeom prst="ellipse">
+            <a:avLst/>
+          </a:prstGeom>
+          <a:solidFill>
+            <a:srgbClr val="FFFFFF"/>
+          </a:solidFill>
+          <a:ln w="15875">
+            <a:solidFill>
+              <a:srgbClr val="1351B4"/>
+            </a:solidFill>
+            <a:prstDash val="solid"/>
+          </a:ln>
+        </p:spPr>
+      </p:sp>
+      <p:sp>
+        <p:nvSpPr>
+          <p:cNvPr id="24" name="Text 20"/>
+          <p:cNvSpPr txBox="1"/>
+          <p:nvPr/>
+        </p:nvSpPr>
+        <p:spPr>
+          <a:xfrm>
+            <a:off x="4572000" y="3246120"/>
+            <a:ext cx="384048" cy="384048"/>
+          </a:xfrm>
+          <a:prstGeom prst="rect">
+            <a:avLst/>
+          </a:prstGeom>
+          <a:noFill/>
+          <a:ln/>
+        </p:spPr>
+        <p:txBody>
+          <a:bodyPr wrap="square" lIns="0" tIns="0" rIns="0" bIns="0" rtlCol="0" anchor="ctr"/>
+          <a:lstStyle/>
+          <a:p>
+            <a:pPr algn="ctr" indent="0" marL="0">
+              <a:buNone/>
+            </a:pPr>
+            <a:r>
+              <a:rPr lang="en-US" sz="1300" b="1" dirty="0">
+                <a:solidFill>
+                  <a:srgbClr val="1351B4"/>
+                </a:solidFill>
+              </a:rPr>
+              <a:t>1</a:t>
+            </a:r>
+            <a:endParaRPr lang="en-US" sz="1300" dirty="0"/>
+          </a:p>
+        </p:txBody>
+      </p:sp>
+      <p:sp>
+        <p:nvSpPr>
+          <p:cNvPr id="25" name="Text 21"/>
+          <p:cNvSpPr txBox="1"/>
+          <p:nvPr/>
+        </p:nvSpPr>
+        <p:spPr>
+          <a:xfrm>
+            <a:off x="5074920" y="3227832"/>
+            <a:ext cx="2651760" cy="640080"/>
+          </a:xfrm>
+          <a:prstGeom prst="rect">
+            <a:avLst/>
+          </a:prstGeom>
+          <a:noFill/>
+          <a:ln/>
+        </p:spPr>
+        <p:txBody>
+          <a:bodyPr wrap="square" lIns="0" tIns="0" rIns="0" bIns="0" rtlCol="0" anchor="t"/>
+          <a:lstStyle/>
           <a:p>
             <a:pPr indent="0" marL="0">
               <a:buNone/>
@@ -6120,40 +5479,261 @@
                   <a:srgbClr val="1B1B1B"/>
                 </a:solidFill>
               </a:rPr>
-              <a:t>Nuvem de governo e site instalável: sem app store obrigatória</a:t>
-            </a:r>
-            <a:endParaRPr lang="en-US" sz="1400" dirty="0"/>
-          </a:p>
-        </p:txBody>
-      </p:sp>
-      <p:sp>
-        <p:nvSpPr>
-          <p:cNvPr id="15" name="Shape 11"/>
+              <a:t>Aprova cada disparo (segunda assinatura)</a:t>
+            </a:r>
+            <a:endParaRPr lang="en-US" sz="1350" dirty="0"/>
+          </a:p>
+        </p:txBody>
+      </p:sp>
+      <p:sp>
+        <p:nvSpPr>
+          <p:cNvPr id="26" name="Shape 22"/>
           <p:cNvSpPr/>
           <p:nvPr/>
         </p:nvSpPr>
         <p:spPr>
           <a:xfrm>
-            <a:off x="5806440" y="3831336"/>
-            <a:ext cx="640080" cy="640080"/>
+            <a:off x="4572000" y="3959352"/>
+            <a:ext cx="384048" cy="384048"/>
           </a:xfrm>
           <a:prstGeom prst="ellipse">
             <a:avLst/>
           </a:prstGeom>
           <a:solidFill>
-            <a:srgbClr val="DBE8FB"/>
+            <a:srgbClr val="FFFFFF"/>
+          </a:solidFill>
+          <a:ln w="15875">
+            <a:solidFill>
+              <a:srgbClr val="1351B4"/>
+            </a:solidFill>
+            <a:prstDash val="solid"/>
+          </a:ln>
+        </p:spPr>
+      </p:sp>
+      <p:sp>
+        <p:nvSpPr>
+          <p:cNvPr id="27" name="Text 23"/>
+          <p:cNvSpPr txBox="1"/>
+          <p:nvPr/>
+        </p:nvSpPr>
+        <p:spPr>
+          <a:xfrm>
+            <a:off x="4572000" y="3959352"/>
+            <a:ext cx="384048" cy="384048"/>
+          </a:xfrm>
+          <a:prstGeom prst="rect">
+            <a:avLst/>
+          </a:prstGeom>
+          <a:noFill/>
+          <a:ln/>
+        </p:spPr>
+        <p:txBody>
+          <a:bodyPr wrap="square" lIns="0" tIns="0" rIns="0" bIns="0" rtlCol="0" anchor="ctr"/>
+          <a:lstStyle/>
+          <a:p>
+            <a:pPr algn="ctr" indent="0" marL="0">
+              <a:buNone/>
+            </a:pPr>
+            <a:r>
+              <a:rPr lang="en-US" sz="1300" b="1" dirty="0">
+                <a:solidFill>
+                  <a:srgbClr val="1351B4"/>
+                </a:solidFill>
+              </a:rPr>
+              <a:t>2</a:t>
+            </a:r>
+            <a:endParaRPr lang="en-US" sz="1300" dirty="0"/>
+          </a:p>
+        </p:txBody>
+      </p:sp>
+      <p:sp>
+        <p:nvSpPr>
+          <p:cNvPr id="28" name="Text 24"/>
+          <p:cNvSpPr txBox="1"/>
+          <p:nvPr/>
+        </p:nvSpPr>
+        <p:spPr>
+          <a:xfrm>
+            <a:off x="5074920" y="3941064"/>
+            <a:ext cx="2651760" cy="640080"/>
+          </a:xfrm>
+          <a:prstGeom prst="rect">
+            <a:avLst/>
+          </a:prstGeom>
+          <a:noFill/>
+          <a:ln/>
+        </p:spPr>
+        <p:txBody>
+          <a:bodyPr wrap="square" lIns="0" tIns="0" rIns="0" bIns="0" rtlCol="0" anchor="t"/>
+          <a:lstStyle/>
+          <a:p>
+            <a:pPr indent="0" marL="0">
+              <a:buNone/>
+            </a:pPr>
+            <a:r>
+              <a:rPr lang="en-US" sz="1350" dirty="0">
+                <a:solidFill>
+                  <a:srgbClr val="1B1B1B"/>
+                </a:solidFill>
+              </a:rPr>
+              <a:t>Acompanha o painel do estado</a:t>
+            </a:r>
+            <a:endParaRPr lang="en-US" sz="1350" dirty="0"/>
+          </a:p>
+        </p:txBody>
+      </p:sp>
+      <p:sp>
+        <p:nvSpPr>
+          <p:cNvPr id="29" name="Shape 25"/>
+          <p:cNvSpPr/>
+          <p:nvPr/>
+        </p:nvSpPr>
+        <p:spPr>
+          <a:xfrm>
+            <a:off x="4572000" y="4672584"/>
+            <a:ext cx="384048" cy="384048"/>
+          </a:xfrm>
+          <a:prstGeom prst="ellipse">
+            <a:avLst/>
+          </a:prstGeom>
+          <a:solidFill>
+            <a:srgbClr val="FFFFFF"/>
+          </a:solidFill>
+          <a:ln w="15875">
+            <a:solidFill>
+              <a:srgbClr val="1351B4"/>
+            </a:solidFill>
+            <a:prstDash val="solid"/>
+          </a:ln>
+        </p:spPr>
+      </p:sp>
+      <p:sp>
+        <p:nvSpPr>
+          <p:cNvPr id="30" name="Text 26"/>
+          <p:cNvSpPr txBox="1"/>
+          <p:nvPr/>
+        </p:nvSpPr>
+        <p:spPr>
+          <a:xfrm>
+            <a:off x="4572000" y="4672584"/>
+            <a:ext cx="384048" cy="384048"/>
+          </a:xfrm>
+          <a:prstGeom prst="rect">
+            <a:avLst/>
+          </a:prstGeom>
+          <a:noFill/>
+          <a:ln/>
+        </p:spPr>
+        <p:txBody>
+          <a:bodyPr wrap="square" lIns="0" tIns="0" rIns="0" bIns="0" rtlCol="0" anchor="ctr"/>
+          <a:lstStyle/>
+          <a:p>
+            <a:pPr algn="ctr" indent="0" marL="0">
+              <a:buNone/>
+            </a:pPr>
+            <a:r>
+              <a:rPr lang="en-US" sz="1300" b="1" dirty="0">
+                <a:solidFill>
+                  <a:srgbClr val="1351B4"/>
+                </a:solidFill>
+              </a:rPr>
+              <a:t>3</a:t>
+            </a:r>
+            <a:endParaRPr lang="en-US" sz="1300" dirty="0"/>
+          </a:p>
+        </p:txBody>
+      </p:sp>
+      <p:sp>
+        <p:nvSpPr>
+          <p:cNvPr id="31" name="Text 27"/>
+          <p:cNvSpPr txBox="1"/>
+          <p:nvPr/>
+        </p:nvSpPr>
+        <p:spPr>
+          <a:xfrm>
+            <a:off x="5074920" y="4654296"/>
+            <a:ext cx="2651760" cy="640080"/>
+          </a:xfrm>
+          <a:prstGeom prst="rect">
+            <a:avLst/>
+          </a:prstGeom>
+          <a:noFill/>
+          <a:ln/>
+        </p:spPr>
+        <p:txBody>
+          <a:bodyPr wrap="square" lIns="0" tIns="0" rIns="0" bIns="0" rtlCol="0" anchor="t"/>
+          <a:lstStyle/>
+          <a:p>
+            <a:pPr indent="0" marL="0">
+              <a:buNone/>
+            </a:pPr>
+            <a:r>
+              <a:rPr lang="en-US" sz="1350" dirty="0">
+                <a:solidFill>
+                  <a:srgbClr val="1B1B1B"/>
+                </a:solidFill>
+              </a:rPr>
+              <a:t>Opera pelos municípios sem equipe</a:t>
+            </a:r>
+            <a:endParaRPr lang="en-US" sz="1350" dirty="0"/>
+          </a:p>
+        </p:txBody>
+      </p:sp>
+      <p:sp>
+        <p:nvSpPr>
+          <p:cNvPr id="32" name="Shape 28"/>
+          <p:cNvSpPr/>
+          <p:nvPr/>
+        </p:nvSpPr>
+        <p:spPr>
+          <a:xfrm>
+            <a:off x="8092440" y="1965960"/>
+            <a:ext cx="3611880" cy="3520440"/>
+          </a:xfrm>
+          <a:prstGeom prst="roundRect">
+            <a:avLst>
+              <a:gd name="adj" fmla="val 3117"/>
+            </a:avLst>
+          </a:prstGeom>
+          <a:solidFill>
+            <a:srgbClr val="F2F5FA"/>
           </a:solidFill>
           <a:ln w="12700">
             <a:solidFill>
-              <a:srgbClr val="DBE8FB"/>
+              <a:srgbClr val="F2F5FA"/>
             </a:solidFill>
             <a:prstDash val="solid"/>
           </a:ln>
         </p:spPr>
       </p:sp>
+      <p:sp>
+        <p:nvSpPr>
+          <p:cNvPr id="33" name="Shape 29"/>
+          <p:cNvSpPr/>
+          <p:nvPr/>
+        </p:nvSpPr>
+        <p:spPr>
+          <a:xfrm>
+            <a:off x="8366760" y="2194560"/>
+            <a:ext cx="731520" cy="731520"/>
+          </a:xfrm>
+          <a:prstGeom prst="ellipse">
+            <a:avLst/>
+          </a:prstGeom>
+          <a:solidFill>
+            <a:srgbClr val="1351B4"/>
+          </a:solidFill>
+          <a:ln w="12700">
+            <a:solidFill>
+              <a:srgbClr val="1351B4"/>
+            </a:solidFill>
+            <a:prstDash val="solid"/>
+          </a:ln>
+        </p:spPr>
+      </p:sp>
       <p:pic>
         <p:nvPicPr>
-          <p:cNvPr id="16" name="Image 2" descr="preencoded.png">    </p:cNvPr>
+          <p:cNvPr id="34" name="Image 2" descr="preencoded.png">    </p:cNvPr>
           <p:cNvPicPr>
             <a:picLocks noChangeAspect="1"/>
           </p:cNvPicPr>
@@ -6167,8 +5747,8 @@
         </p:blipFill>
         <p:spPr>
           <a:xfrm>
-            <a:off x="5966460" y="3991356"/>
-            <a:ext cx="320040" cy="320040"/>
+            <a:off x="8549640" y="2377440"/>
+            <a:ext cx="365760" cy="365760"/>
           </a:xfrm>
           <a:prstGeom prst="rect">
             <a:avLst/>
@@ -6177,38 +5757,160 @@
       </p:pic>
       <p:sp>
         <p:nvSpPr>
-          <p:cNvPr id="17" name="Text 12"/>
-          <p:cNvSpPr txBox="1"/>
-          <p:nvPr/>
-        </p:nvSpPr>
-        <p:spPr>
-          <a:xfrm>
-            <a:off x="6629400" y="3785616"/>
-            <a:ext cx="5029200" cy="914400"/>
-          </a:xfrm>
-          <a:prstGeom prst="rect">
-            <a:avLst/>
-          </a:prstGeom>
-          <a:noFill/>
-          <a:ln/>
-        </p:spPr>
-        <p:txBody>
-          <a:bodyPr wrap="square" lIns="0" tIns="0" rIns="0" bIns="0" rtlCol="0" anchor="t"/>
-          <a:lstStyle/>
-          <a:p>
-            <a:pPr indent="0" marL="0">
-              <a:buNone/>
-            </a:pPr>
-            <a:r>
-              <a:rPr lang="en-US" sz="1600" b="1" dirty="0">
+          <p:cNvPr id="35" name="Text 30"/>
+          <p:cNvSpPr txBox="1"/>
+          <p:nvPr/>
+        </p:nvSpPr>
+        <p:spPr>
+          <a:xfrm>
+            <a:off x="9281160" y="2212848"/>
+            <a:ext cx="2286000" cy="411480"/>
+          </a:xfrm>
+          <a:prstGeom prst="rect">
+            <a:avLst/>
+          </a:prstGeom>
+          <a:noFill/>
+          <a:ln/>
+        </p:spPr>
+        <p:txBody>
+          <a:bodyPr wrap="square" lIns="0" tIns="0" rIns="0" bIns="0" rtlCol="0" anchor="t"/>
+          <a:lstStyle/>
+          <a:p>
+            <a:pPr indent="0" marL="0">
+              <a:buNone/>
+            </a:pPr>
+            <a:r>
+              <a:rPr lang="en-US" sz="2200" b="1" dirty="0">
                 <a:solidFill>
                   <a:srgbClr val="071D41"/>
                 </a:solidFill>
-              </a:rPr>
-              <a:t>Base legal pronta</a:t>
-            </a:r>
-            <a:endParaRPr lang="en-US" sz="1400" dirty="0"/>
-          </a:p>
+                <a:latin typeface="Montserrat" pitchFamily="34" charset="0"/>
+                <a:ea typeface="Montserrat" pitchFamily="34" charset="-122"/>
+                <a:cs typeface="Montserrat" pitchFamily="34" charset="-120"/>
+              </a:rPr>
+              <a:t>Município</a:t>
+            </a:r>
+            <a:endParaRPr lang="en-US" sz="2200" dirty="0"/>
+          </a:p>
+        </p:txBody>
+      </p:sp>
+      <p:sp>
+        <p:nvSpPr>
+          <p:cNvPr id="36" name="Text 31"/>
+          <p:cNvSpPr txBox="1"/>
+          <p:nvPr/>
+        </p:nvSpPr>
+        <p:spPr>
+          <a:xfrm>
+            <a:off x="9281160" y="2633472"/>
+            <a:ext cx="2286000" cy="365760"/>
+          </a:xfrm>
+          <a:prstGeom prst="rect">
+            <a:avLst/>
+          </a:prstGeom>
+          <a:noFill/>
+          <a:ln/>
+        </p:spPr>
+        <p:txBody>
+          <a:bodyPr wrap="square" lIns="0" tIns="0" rIns="0" bIns="0" rtlCol="0" anchor="t"/>
+          <a:lstStyle/>
+          <a:p>
+            <a:pPr indent="0" marL="0">
+              <a:buNone/>
+            </a:pPr>
+            <a:r>
+              <a:rPr lang="en-US" sz="1100" dirty="0">
+                <a:solidFill>
+                  <a:srgbClr val="5D6673"/>
+                </a:solidFill>
+              </a:rPr>
+              <a:t>Defesa Civil municipal</a:t>
+            </a:r>
+            <a:endParaRPr lang="en-US" sz="1100" dirty="0"/>
+          </a:p>
+        </p:txBody>
+      </p:sp>
+      <p:sp>
+        <p:nvSpPr>
+          <p:cNvPr id="37" name="Shape 32"/>
+          <p:cNvSpPr/>
+          <p:nvPr/>
+        </p:nvSpPr>
+        <p:spPr>
+          <a:xfrm>
+            <a:off x="8366760" y="3246120"/>
+            <a:ext cx="384048" cy="384048"/>
+          </a:xfrm>
+          <a:prstGeom prst="ellipse">
+            <a:avLst/>
+          </a:prstGeom>
+          <a:solidFill>
+            <a:srgbClr val="FFFFFF"/>
+          </a:solidFill>
+          <a:ln w="15875">
+            <a:solidFill>
+              <a:srgbClr val="1351B4"/>
+            </a:solidFill>
+            <a:prstDash val="solid"/>
+          </a:ln>
+        </p:spPr>
+      </p:sp>
+      <p:sp>
+        <p:nvSpPr>
+          <p:cNvPr id="38" name="Text 33"/>
+          <p:cNvSpPr txBox="1"/>
+          <p:nvPr/>
+        </p:nvSpPr>
+        <p:spPr>
+          <a:xfrm>
+            <a:off x="8366760" y="3246120"/>
+            <a:ext cx="384048" cy="384048"/>
+          </a:xfrm>
+          <a:prstGeom prst="rect">
+            <a:avLst/>
+          </a:prstGeom>
+          <a:noFill/>
+          <a:ln/>
+        </p:spPr>
+        <p:txBody>
+          <a:bodyPr wrap="square" lIns="0" tIns="0" rIns="0" bIns="0" rtlCol="0" anchor="ctr"/>
+          <a:lstStyle/>
+          <a:p>
+            <a:pPr algn="ctr" indent="0" marL="0">
+              <a:buNone/>
+            </a:pPr>
+            <a:r>
+              <a:rPr lang="en-US" sz="1300" b="1" dirty="0">
+                <a:solidFill>
+                  <a:srgbClr val="1351B4"/>
+                </a:solidFill>
+              </a:rPr>
+              <a:t>1</a:t>
+            </a:r>
+            <a:endParaRPr lang="en-US" sz="1300" dirty="0"/>
+          </a:p>
+        </p:txBody>
+      </p:sp>
+      <p:sp>
+        <p:nvSpPr>
+          <p:cNvPr id="39" name="Text 34"/>
+          <p:cNvSpPr txBox="1"/>
+          <p:nvPr/>
+        </p:nvSpPr>
+        <p:spPr>
+          <a:xfrm>
+            <a:off x="8869680" y="3227832"/>
+            <a:ext cx="2651760" cy="640080"/>
+          </a:xfrm>
+          <a:prstGeom prst="rect">
+            <a:avLst/>
+          </a:prstGeom>
+          <a:noFill/>
+          <a:ln/>
+        </p:spPr>
+        <p:txBody>
+          <a:bodyPr wrap="square" lIns="0" tIns="0" rIns="0" bIns="0" rtlCol="0" anchor="t"/>
+          <a:lstStyle/>
           <a:p>
             <a:pPr indent="0" marL="0">
               <a:buNone/>
@@ -6219,121 +5921,243 @@
                   <a:srgbClr val="1B1B1B"/>
                 </a:solidFill>
               </a:rPr>
-              <a:t>Lei 12.608/2012: Sistema Nacional de Proteção e Defesa Civil</a:t>
-            </a:r>
-            <a:endParaRPr lang="en-US" sz="1400" dirty="0"/>
-          </a:p>
-        </p:txBody>
-      </p:sp>
-      <p:sp>
-        <p:nvSpPr>
-          <p:cNvPr id="18" name="Shape 13"/>
+              <a:t>Cadastra abrigos e pontos de apoio (ex.: pontos de resfriamento) num formulário</a:t>
+            </a:r>
+            <a:endParaRPr lang="en-US" sz="1350" dirty="0"/>
+          </a:p>
+        </p:txBody>
+      </p:sp>
+      <p:sp>
+        <p:nvSpPr>
+          <p:cNvPr id="40" name="Shape 35"/>
           <p:cNvSpPr/>
           <p:nvPr/>
         </p:nvSpPr>
         <p:spPr>
           <a:xfrm>
-            <a:off x="5806440" y="4855464"/>
-            <a:ext cx="640080" cy="640080"/>
+            <a:off x="8366760" y="3959352"/>
+            <a:ext cx="384048" cy="384048"/>
           </a:xfrm>
           <a:prstGeom prst="ellipse">
             <a:avLst/>
           </a:prstGeom>
           <a:solidFill>
-            <a:srgbClr val="DBE8FB"/>
+            <a:srgbClr val="FFFFFF"/>
+          </a:solidFill>
+          <a:ln w="15875">
+            <a:solidFill>
+              <a:srgbClr val="1351B4"/>
+            </a:solidFill>
+            <a:prstDash val="solid"/>
+          </a:ln>
+        </p:spPr>
+      </p:sp>
+      <p:sp>
+        <p:nvSpPr>
+          <p:cNvPr id="41" name="Text 36"/>
+          <p:cNvSpPr txBox="1"/>
+          <p:nvPr/>
+        </p:nvSpPr>
+        <p:spPr>
+          <a:xfrm>
+            <a:off x="8366760" y="3959352"/>
+            <a:ext cx="384048" cy="384048"/>
+          </a:xfrm>
+          <a:prstGeom prst="rect">
+            <a:avLst/>
+          </a:prstGeom>
+          <a:noFill/>
+          <a:ln/>
+        </p:spPr>
+        <p:txBody>
+          <a:bodyPr wrap="square" lIns="0" tIns="0" rIns="0" bIns="0" rtlCol="0" anchor="ctr"/>
+          <a:lstStyle/>
+          <a:p>
+            <a:pPr algn="ctr" indent="0" marL="0">
+              <a:buNone/>
+            </a:pPr>
+            <a:r>
+              <a:rPr lang="en-US" sz="1300" b="1" dirty="0">
+                <a:solidFill>
+                  <a:srgbClr val="1351B4"/>
+                </a:solidFill>
+              </a:rPr>
+              <a:t>2</a:t>
+            </a:r>
+            <a:endParaRPr lang="en-US" sz="1300" dirty="0"/>
+          </a:p>
+        </p:txBody>
+      </p:sp>
+      <p:sp>
+        <p:nvSpPr>
+          <p:cNvPr id="42" name="Text 37"/>
+          <p:cNvSpPr txBox="1"/>
+          <p:nvPr/>
+        </p:nvSpPr>
+        <p:spPr>
+          <a:xfrm>
+            <a:off x="8869680" y="3941064"/>
+            <a:ext cx="2651760" cy="640080"/>
+          </a:xfrm>
+          <a:prstGeom prst="rect">
+            <a:avLst/>
+          </a:prstGeom>
+          <a:noFill/>
+          <a:ln/>
+        </p:spPr>
+        <p:txBody>
+          <a:bodyPr wrap="square" lIns="0" tIns="0" rIns="0" bIns="0" rtlCol="0" anchor="t"/>
+          <a:lstStyle/>
+          <a:p>
+            <a:pPr indent="0" marL="0">
+              <a:buNone/>
+            </a:pPr>
+            <a:r>
+              <a:rPr lang="en-US" sz="1350" dirty="0">
+                <a:solidFill>
+                  <a:srgbClr val="1B1B1B"/>
+                </a:solidFill>
+              </a:rPr>
+              <a:t>Escolhe a orientação local a partir de modelos</a:t>
+            </a:r>
+            <a:endParaRPr lang="en-US" sz="1350" dirty="0"/>
+          </a:p>
+        </p:txBody>
+      </p:sp>
+      <p:sp>
+        <p:nvSpPr>
+          <p:cNvPr id="43" name="Shape 38"/>
+          <p:cNvSpPr/>
+          <p:nvPr/>
+        </p:nvSpPr>
+        <p:spPr>
+          <a:xfrm>
+            <a:off x="8366760" y="4672584"/>
+            <a:ext cx="384048" cy="384048"/>
+          </a:xfrm>
+          <a:prstGeom prst="ellipse">
+            <a:avLst/>
+          </a:prstGeom>
+          <a:solidFill>
+            <a:srgbClr val="FFFFFF"/>
+          </a:solidFill>
+          <a:ln w="15875">
+            <a:solidFill>
+              <a:srgbClr val="1351B4"/>
+            </a:solidFill>
+            <a:prstDash val="solid"/>
+          </a:ln>
+        </p:spPr>
+      </p:sp>
+      <p:sp>
+        <p:nvSpPr>
+          <p:cNvPr id="44" name="Text 39"/>
+          <p:cNvSpPr txBox="1"/>
+          <p:nvPr/>
+        </p:nvSpPr>
+        <p:spPr>
+          <a:xfrm>
+            <a:off x="8366760" y="4672584"/>
+            <a:ext cx="384048" cy="384048"/>
+          </a:xfrm>
+          <a:prstGeom prst="rect">
+            <a:avLst/>
+          </a:prstGeom>
+          <a:noFill/>
+          <a:ln/>
+        </p:spPr>
+        <p:txBody>
+          <a:bodyPr wrap="square" lIns="0" tIns="0" rIns="0" bIns="0" rtlCol="0" anchor="ctr"/>
+          <a:lstStyle/>
+          <a:p>
+            <a:pPr algn="ctr" indent="0" marL="0">
+              <a:buNone/>
+            </a:pPr>
+            <a:r>
+              <a:rPr lang="en-US" sz="1300" b="1" dirty="0">
+                <a:solidFill>
+                  <a:srgbClr val="1351B4"/>
+                </a:solidFill>
+              </a:rPr>
+              <a:t>3</a:t>
+            </a:r>
+            <a:endParaRPr lang="en-US" sz="1300" dirty="0"/>
+          </a:p>
+        </p:txBody>
+      </p:sp>
+      <p:sp>
+        <p:nvSpPr>
+          <p:cNvPr id="45" name="Text 40"/>
+          <p:cNvSpPr txBox="1"/>
+          <p:nvPr/>
+        </p:nvSpPr>
+        <p:spPr>
+          <a:xfrm>
+            <a:off x="8869680" y="4654296"/>
+            <a:ext cx="2651760" cy="640080"/>
+          </a:xfrm>
+          <a:prstGeom prst="rect">
+            <a:avLst/>
+          </a:prstGeom>
+          <a:noFill/>
+          <a:ln/>
+        </p:spPr>
+        <p:txBody>
+          <a:bodyPr wrap="square" lIns="0" tIns="0" rIns="0" bIns="0" rtlCol="0" anchor="t"/>
+          <a:lstStyle/>
+          <a:p>
+            <a:pPr indent="0" marL="0">
+              <a:buNone/>
+            </a:pPr>
+            <a:r>
+              <a:rPr lang="en-US" sz="1350" dirty="0">
+                <a:solidFill>
+                  <a:srgbClr val="1B1B1B"/>
+                </a:solidFill>
+              </a:rPr>
+              <a:t>Responde aos pedidos de ajuda do bairro</a:t>
+            </a:r>
+            <a:endParaRPr lang="en-US" sz="1350" dirty="0"/>
+          </a:p>
+        </p:txBody>
+      </p:sp>
+      <p:sp>
+        <p:nvSpPr>
+          <p:cNvPr id="46" name="Shape 41"/>
+          <p:cNvSpPr/>
+          <p:nvPr/>
+        </p:nvSpPr>
+        <p:spPr>
+          <a:xfrm>
+            <a:off x="502920" y="5623560"/>
+            <a:ext cx="11155680" cy="502920"/>
+          </a:xfrm>
+          <a:prstGeom prst="roundRect">
+            <a:avLst>
+              <a:gd name="adj" fmla="val 21818"/>
+            </a:avLst>
+          </a:prstGeom>
+          <a:solidFill>
+            <a:srgbClr val="E3F5E1"/>
           </a:solidFill>
           <a:ln w="12700">
             <a:solidFill>
-              <a:srgbClr val="DBE8FB"/>
+              <a:srgbClr val="E3F5E1"/>
             </a:solidFill>
             <a:prstDash val="solid"/>
           </a:ln>
         </p:spPr>
       </p:sp>
-      <p:pic>
-        <p:nvPicPr>
-          <p:cNvPr id="19" name="Image 3" descr="preencoded.png">    </p:cNvPr>
-          <p:cNvPicPr>
-            <a:picLocks noChangeAspect="1"/>
-          </p:cNvPicPr>
-          <p:nvPr/>
-        </p:nvPicPr>
-        <p:blipFill>
-          <a:blip r:embed="rId4"/>
-          <a:stretch>
-            <a:fillRect/>
-          </a:stretch>
-        </p:blipFill>
-        <p:spPr>
-          <a:xfrm>
-            <a:off x="5966460" y="5015484"/>
-            <a:ext cx="320040" cy="320040"/>
-          </a:xfrm>
-          <a:prstGeom prst="rect">
-            <a:avLst/>
-          </a:prstGeom>
-        </p:spPr>
-      </p:pic>
-      <p:sp>
-        <p:nvSpPr>
-          <p:cNvPr id="20" name="Text 14"/>
-          <p:cNvSpPr txBox="1"/>
-          <p:nvPr/>
-        </p:nvSpPr>
-        <p:spPr>
-          <a:xfrm>
-            <a:off x="6629400" y="4809744"/>
-            <a:ext cx="5029200" cy="914400"/>
-          </a:xfrm>
-          <a:prstGeom prst="rect">
-            <a:avLst/>
-          </a:prstGeom>
-          <a:noFill/>
-          <a:ln/>
-        </p:spPr>
-        <p:txBody>
-          <a:bodyPr wrap="square" lIns="0" tIns="0" rIns="0" bIns="0" rtlCol="0" anchor="t"/>
-          <a:lstStyle/>
-          <a:p>
-            <a:pPr indent="0" marL="0">
-              <a:buNone/>
-            </a:pPr>
-            <a:r>
-              <a:rPr lang="en-US" sz="1600" b="1" dirty="0">
-                <a:solidFill>
-                  <a:srgbClr val="071D41"/>
-                </a:solidFill>
-              </a:rPr>
-              <a:t>Grátis para o cidadão</a:t>
-            </a:r>
-            <a:endParaRPr lang="en-US" sz="1400" dirty="0"/>
-          </a:p>
-          <a:p>
-            <a:pPr indent="0" marL="0">
-              <a:buNone/>
-            </a:pPr>
-            <a:r>
-              <a:rPr lang="en-US" sz="1350" dirty="0">
-                <a:solidFill>
-                  <a:srgbClr val="1B1B1B"/>
-                </a:solidFill>
-              </a:rPr>
-              <a:t>Custo central da União; estados e municípios só operam</a:t>
-            </a:r>
-            <a:endParaRPr lang="en-US" sz="1400" dirty="0"/>
-          </a:p>
-        </p:txBody>
-      </p:sp>
-      <p:sp>
-        <p:nvSpPr>
-          <p:cNvPr id="21" name="Text 15"/>
-          <p:cNvSpPr txBox="1"/>
-          <p:nvPr/>
-        </p:nvSpPr>
-        <p:spPr>
-          <a:xfrm>
-            <a:off x="502920" y="5943600"/>
-            <a:ext cx="11155680" cy="320040"/>
+      <p:sp>
+        <p:nvSpPr>
+          <p:cNvPr id="47" name="Text 42"/>
+          <p:cNvSpPr txBox="1"/>
+          <p:nvPr/>
+        </p:nvSpPr>
+        <p:spPr>
+          <a:xfrm>
+            <a:off x="731520" y="5623560"/>
+            <a:ext cx="10789920" cy="502920"/>
           </a:xfrm>
           <a:prstGeom prst="rect">
             <a:avLst/>
@@ -6349,14 +6173,14 @@
               <a:buNone/>
             </a:pPr>
             <a:r>
-              <a:rPr lang="en-US" sz="1000" i="1" dirty="0">
-                <a:solidFill>
-                  <a:srgbClr val="5D6673"/>
-                </a:solidFill>
-              </a:rPr>
-              <a:t>Fontes: Hallegatte, World Bank Policy Research Working Paper 6058 (2012); levantamento de prejuízos por chuvas em 2024 (Revista Oeste, 2025); Lei nº 12.608/2012.</a:t>
-            </a:r>
-            <a:endParaRPr lang="en-US" sz="1000" dirty="0"/>
+              <a:rPr lang="en-US" sz="1350" b="1" dirty="0">
+                <a:solidFill>
+                  <a:srgbClr val="168821"/>
+                </a:solidFill>
+              </a:rPr>
+              <a:t>Treinamento de 1 hora · um celular basta para operar · comunidade e voluntários confirmam no local pelo próprio app</a:t>
+            </a:r>
+            <a:endParaRPr lang="en-US" sz="1350" dirty="0"/>
           </a:p>
         </p:txBody>
       </p:sp>
@@ -6453,7 +6277,7 @@
           <a:bodyPr wrap="square" lIns="0" tIns="0" rIns="0" bIns="0" rtlCol="0" anchor="t"/>
           <a:lstStyle/>
           <a:p>
-            <a:pPr indent="0" marL="0">
+            <a:pPr algn="l" indent="0" marL="0">
               <a:buNone/>
             </a:pPr>
             <a:r>
@@ -6465,7 +6289,7 @@
                 <a:ea typeface="Montserrat" pitchFamily="34" charset="-122"/>
                 <a:cs typeface="Montserrat" pitchFamily="34" charset="-120"/>
               </a:rPr>
-              <a:t>Onde queremos chegar.</a:t>
+              <a:t>Barato porque reaproveita o que o Brasil já tem.</a:t>
             </a:r>
             <a:endParaRPr lang="en-US" sz="3000" dirty="0"/>
           </a:p>
@@ -6479,16 +6303,20 @@
         </p:nvSpPr>
         <p:spPr>
           <a:xfrm>
-            <a:off x="914400" y="2331720"/>
-            <a:ext cx="10332720" cy="0"/>
-          </a:xfrm>
-          <a:prstGeom prst="line">
-            <a:avLst/>
-          </a:prstGeom>
-          <a:noFill/>
-          <a:ln w="38100">
+            <a:off x="502920" y="1737360"/>
+            <a:ext cx="4937760" cy="4023360"/>
+          </a:xfrm>
+          <a:prstGeom prst="roundRect">
+            <a:avLst>
+              <a:gd name="adj" fmla="val 2727"/>
+            </a:avLst>
+          </a:prstGeom>
+          <a:solidFill>
+            <a:srgbClr val="071D41"/>
+          </a:solidFill>
+          <a:ln w="12700">
             <a:solidFill>
-              <a:srgbClr val="1351B4"/>
+              <a:srgbClr val="071D41"/>
             </a:solidFill>
             <a:prstDash val="solid"/>
           </a:ln>
@@ -6496,101 +6324,112 @@
       </p:sp>
       <p:sp>
         <p:nvSpPr>
-          <p:cNvPr id="4" name="Shape 2"/>
-          <p:cNvSpPr/>
-          <p:nvPr/>
-        </p:nvSpPr>
-        <p:spPr>
-          <a:xfrm>
-            <a:off x="777240" y="2148840"/>
-            <a:ext cx="365760" cy="365760"/>
-          </a:xfrm>
-          <a:prstGeom prst="ellipse">
-            <a:avLst/>
-          </a:prstGeom>
-          <a:solidFill>
-            <a:srgbClr val="E86F25"/>
-          </a:solidFill>
-          <a:ln w="38100">
-            <a:solidFill>
-              <a:srgbClr val="FFFFFF"/>
-            </a:solidFill>
-            <a:prstDash val="solid"/>
-          </a:ln>
-        </p:spPr>
-      </p:sp>
-      <p:sp>
-        <p:nvSpPr>
-          <p:cNvPr id="5" name="Text 3"/>
-          <p:cNvSpPr txBox="1"/>
-          <p:nvPr/>
-        </p:nvSpPr>
-        <p:spPr>
-          <a:xfrm>
-            <a:off x="685800" y="2697480"/>
-            <a:ext cx="3474720" cy="365760"/>
-          </a:xfrm>
-          <a:prstGeom prst="rect">
-            <a:avLst/>
-          </a:prstGeom>
-          <a:noFill/>
-          <a:ln/>
-        </p:spPr>
-        <p:txBody>
-          <a:bodyPr wrap="square" lIns="0" tIns="0" rIns="0" bIns="0" rtlCol="0" anchor="t"/>
-          <a:lstStyle/>
-          <a:p>
-            <a:pPr indent="0" marL="0">
-              <a:buNone/>
-            </a:pPr>
-            <a:r>
-              <a:rPr lang="en-US" sz="1400" b="1" dirty="0">
+          <p:cNvPr id="4" name="Text 2"/>
+          <p:cNvSpPr txBox="1"/>
+          <p:nvPr/>
+        </p:nvSpPr>
+        <p:spPr>
+          <a:xfrm>
+            <a:off x="822960" y="2057400"/>
+            <a:ext cx="4480560" cy="914400"/>
+          </a:xfrm>
+          <a:prstGeom prst="rect">
+            <a:avLst/>
+          </a:prstGeom>
+          <a:noFill/>
+          <a:ln/>
+        </p:spPr>
+        <p:txBody>
+          <a:bodyPr wrap="square" lIns="0" tIns="0" rIns="0" bIns="0" rtlCol="0" anchor="t"/>
+          <a:lstStyle/>
+          <a:p>
+            <a:pPr indent="0" marL="0">
+              <a:buNone/>
+            </a:pPr>
+            <a:r>
+              <a:rPr lang="en-US" sz="3400" b="1" dirty="0">
                 <a:solidFill>
                   <a:srgbClr val="E86F25"/>
-                </a:solidFill>
-              </a:rPr>
-              <a:t>Verão 2026/27</a:t>
-            </a:r>
-            <a:endParaRPr lang="en-US" sz="1400" dirty="0"/>
-          </a:p>
-        </p:txBody>
-      </p:sp>
-      <p:sp>
-        <p:nvSpPr>
-          <p:cNvPr id="6" name="Text 4"/>
-          <p:cNvSpPr txBox="1"/>
-          <p:nvPr/>
-        </p:nvSpPr>
-        <p:spPr>
-          <a:xfrm>
-            <a:off x="685800" y="3063240"/>
-            <a:ext cx="3474720" cy="457200"/>
-          </a:xfrm>
-          <a:prstGeom prst="rect">
-            <a:avLst/>
-          </a:prstGeom>
-          <a:noFill/>
-          <a:ln/>
-        </p:spPr>
-        <p:txBody>
-          <a:bodyPr wrap="square" lIns="0" tIns="0" rIns="0" bIns="0" rtlCol="0" anchor="t"/>
-          <a:lstStyle/>
-          <a:p>
-            <a:pPr indent="0" marL="0">
-              <a:buNone/>
-            </a:pPr>
-            <a:r>
-              <a:rPr lang="en-US" sz="2000" b="1" dirty="0">
-                <a:solidFill>
-                  <a:srgbClr val="071D41"/>
                 </a:solidFill>
                 <a:latin typeface="Montserrat" pitchFamily="34" charset="0"/>
                 <a:ea typeface="Montserrat" pitchFamily="34" charset="-122"/>
                 <a:cs typeface="Montserrat" pitchFamily="34" charset="-120"/>
               </a:rPr>
-              <a:t>Piloto no Rio de Janeiro</a:t>
-            </a:r>
-            <a:endParaRPr lang="en-US" sz="2000" dirty="0"/>
+              <a:t>US$ 1 → US$ 4 a 36</a:t>
+            </a:r>
+            <a:endParaRPr lang="en-US" sz="3400" dirty="0"/>
+          </a:p>
+        </p:txBody>
+      </p:sp>
+      <p:sp>
+        <p:nvSpPr>
+          <p:cNvPr id="5" name="Text 3"/>
+          <p:cNvSpPr txBox="1"/>
+          <p:nvPr/>
+        </p:nvSpPr>
+        <p:spPr>
+          <a:xfrm>
+            <a:off x="822960" y="3063240"/>
+            <a:ext cx="4297680" cy="1188720"/>
+          </a:xfrm>
+          <a:prstGeom prst="rect">
+            <a:avLst/>
+          </a:prstGeom>
+          <a:noFill/>
+          <a:ln/>
+        </p:spPr>
+        <p:txBody>
+          <a:bodyPr wrap="square" lIns="0" tIns="0" rIns="0" bIns="0" rtlCol="0" anchor="t"/>
+          <a:lstStyle/>
+          <a:p>
+            <a:pPr indent="0" marL="0">
+              <a:buNone/>
+            </a:pPr>
+            <a:r>
+              <a:rPr lang="en-US" sz="1500" dirty="0">
+                <a:solidFill>
+                  <a:srgbClr val="FFFFFF"/>
+                </a:solidFill>
+              </a:rPr>
+              <a:t>de benefício para cada dólar investido em serviços meteorológicos e alerta precoce em países em desenvolvimento.</a:t>
+            </a:r>
+            <a:endParaRPr lang="en-US" sz="1500" dirty="0"/>
+          </a:p>
+        </p:txBody>
+      </p:sp>
+      <p:sp>
+        <p:nvSpPr>
+          <p:cNvPr id="6" name="Text 4"/>
+          <p:cNvSpPr txBox="1"/>
+          <p:nvPr/>
+        </p:nvSpPr>
+        <p:spPr>
+          <a:xfrm>
+            <a:off x="822960" y="4343400"/>
+            <a:ext cx="4297680" cy="320040"/>
+          </a:xfrm>
+          <a:prstGeom prst="rect">
+            <a:avLst/>
+          </a:prstGeom>
+          <a:noFill/>
+          <a:ln/>
+        </p:spPr>
+        <p:txBody>
+          <a:bodyPr wrap="square" lIns="0" tIns="0" rIns="0" bIns="0" rtlCol="0" anchor="t"/>
+          <a:lstStyle/>
+          <a:p>
+            <a:pPr indent="0" marL="0">
+              <a:buNone/>
+            </a:pPr>
+            <a:r>
+              <a:rPr lang="en-US" sz="1100" i="1" dirty="0">
+                <a:solidFill>
+                  <a:srgbClr val="9FB3D1"/>
+                </a:solidFill>
+              </a:rPr>
+              <a:t>Hallegatte, Banco Mundial (2012)</a:t>
+            </a:r>
+            <a:endParaRPr lang="en-US" sz="1100" dirty="0"/>
           </a:p>
         </p:txBody>
       </p:sp>
@@ -6602,429 +6441,86 @@
         </p:nvSpPr>
         <p:spPr>
           <a:xfrm>
-            <a:off x="685800" y="3520440"/>
-            <a:ext cx="3474720" cy="548640"/>
-          </a:xfrm>
-          <a:prstGeom prst="rect">
-            <a:avLst/>
-          </a:prstGeom>
-          <a:noFill/>
-          <a:ln/>
-        </p:spPr>
-        <p:txBody>
-          <a:bodyPr wrap="square" lIns="0" tIns="0" rIns="0" bIns="0" rtlCol="0" anchor="t"/>
-          <a:lstStyle/>
-          <a:p>
-            <a:pPr indent="0" marL="0">
-              <a:buNone/>
-            </a:pPr>
-            <a:r>
-              <a:rPr lang="en-US" sz="1350" dirty="0">
-                <a:solidFill>
-                  <a:srgbClr val="5D6673"/>
-                </a:solidFill>
-              </a:rPr>
-              <a:t>Bairros de calor, deslizamento e alagamento</a:t>
-            </a:r>
-            <a:endParaRPr lang="en-US" sz="1350" dirty="0"/>
-          </a:p>
-        </p:txBody>
-      </p:sp>
-      <p:sp>
-        <p:nvSpPr>
-          <p:cNvPr id="8" name="Shape 6"/>
-          <p:cNvSpPr/>
-          <p:nvPr/>
-        </p:nvSpPr>
-        <p:spPr>
-          <a:xfrm>
-            <a:off x="4526280" y="2148840"/>
-            <a:ext cx="365760" cy="365760"/>
-          </a:xfrm>
-          <a:prstGeom prst="ellipse">
-            <a:avLst/>
-          </a:prstGeom>
-          <a:solidFill>
-            <a:srgbClr val="1351B4"/>
-          </a:solidFill>
-          <a:ln w="38100">
-            <a:solidFill>
-              <a:srgbClr val="FFFFFF"/>
-            </a:solidFill>
-            <a:prstDash val="solid"/>
-          </a:ln>
-        </p:spPr>
-      </p:sp>
-      <p:sp>
-        <p:nvSpPr>
-          <p:cNvPr id="9" name="Text 7"/>
-          <p:cNvSpPr txBox="1"/>
-          <p:nvPr/>
-        </p:nvSpPr>
-        <p:spPr>
-          <a:xfrm>
-            <a:off x="4434840" y="2697480"/>
-            <a:ext cx="3474720" cy="365760"/>
-          </a:xfrm>
-          <a:prstGeom prst="rect">
-            <a:avLst/>
-          </a:prstGeom>
-          <a:noFill/>
-          <a:ln/>
-        </p:spPr>
-        <p:txBody>
-          <a:bodyPr wrap="square" lIns="0" tIns="0" rIns="0" bIns="0" rtlCol="0" anchor="t"/>
-          <a:lstStyle/>
-          <a:p>
-            <a:pPr indent="0" marL="0">
-              <a:buNone/>
-            </a:pPr>
-            <a:r>
-              <a:rPr lang="en-US" sz="1400" b="1" dirty="0">
-                <a:solidFill>
-                  <a:srgbClr val="1351B4"/>
-                </a:solidFill>
-              </a:rPr>
-              <a:t>2027</a:t>
-            </a:r>
-            <a:endParaRPr lang="en-US" sz="1400" dirty="0"/>
-          </a:p>
-        </p:txBody>
-      </p:sp>
-      <p:sp>
-        <p:nvSpPr>
-          <p:cNvPr id="10" name="Text 8"/>
-          <p:cNvSpPr txBox="1"/>
-          <p:nvPr/>
-        </p:nvSpPr>
-        <p:spPr>
-          <a:xfrm>
-            <a:off x="4434840" y="3063240"/>
-            <a:ext cx="3474720" cy="457200"/>
-          </a:xfrm>
-          <a:prstGeom prst="rect">
-            <a:avLst/>
-          </a:prstGeom>
-          <a:noFill/>
-          <a:ln/>
-        </p:spPr>
-        <p:txBody>
-          <a:bodyPr wrap="square" lIns="0" tIns="0" rIns="0" bIns="0" rtlCol="0" anchor="t"/>
-          <a:lstStyle/>
-          <a:p>
-            <a:pPr indent="0" marL="0">
-              <a:buNone/>
-            </a:pPr>
-            <a:r>
-              <a:rPr lang="en-US" sz="2000" b="1" dirty="0">
-                <a:solidFill>
-                  <a:srgbClr val="071D41"/>
+            <a:off x="822960" y="4754880"/>
+            <a:ext cx="4297680" cy="457200"/>
+          </a:xfrm>
+          <a:prstGeom prst="rect">
+            <a:avLst/>
+          </a:prstGeom>
+          <a:noFill/>
+          <a:ln/>
+        </p:spPr>
+        <p:txBody>
+          <a:bodyPr wrap="square" lIns="0" tIns="0" rIns="0" bIns="0" rtlCol="0" anchor="t"/>
+          <a:lstStyle/>
+          <a:p>
+            <a:pPr indent="0" marL="0">
+              <a:buNone/>
+            </a:pPr>
+            <a:r>
+              <a:rPr lang="en-US" sz="2200" b="1" dirty="0">
+                <a:solidFill>
+                  <a:srgbClr val="FFFFFF"/>
                 </a:solidFill>
                 <a:latin typeface="Montserrat" pitchFamily="34" charset="0"/>
                 <a:ea typeface="Montserrat" pitchFamily="34" charset="-122"/>
                 <a:cs typeface="Montserrat" pitchFamily="34" charset="-120"/>
               </a:rPr>
-              <a:t>Estados mais atingidos</a:t>
-            </a:r>
-            <a:endParaRPr lang="en-US" sz="2000" dirty="0"/>
-          </a:p>
-        </p:txBody>
-      </p:sp>
-      <p:sp>
-        <p:nvSpPr>
-          <p:cNvPr id="11" name="Text 9"/>
-          <p:cNvSpPr txBox="1"/>
-          <p:nvPr/>
-        </p:nvSpPr>
-        <p:spPr>
-          <a:xfrm>
-            <a:off x="4434840" y="3520440"/>
-            <a:ext cx="3474720" cy="548640"/>
-          </a:xfrm>
-          <a:prstGeom prst="rect">
-            <a:avLst/>
-          </a:prstGeom>
-          <a:noFill/>
-          <a:ln/>
-        </p:spPr>
-        <p:txBody>
-          <a:bodyPr wrap="square" lIns="0" tIns="0" rIns="0" bIns="0" rtlCol="0" anchor="t"/>
-          <a:lstStyle/>
-          <a:p>
-            <a:pPr indent="0" marL="0">
-              <a:buNone/>
-            </a:pPr>
-            <a:r>
-              <a:rPr lang="en-US" sz="1350" dirty="0">
-                <a:solidFill>
-                  <a:srgbClr val="5D6673"/>
-                </a:solidFill>
-              </a:rPr>
-              <a:t>RS (enchente), PB (seca), AM (rios)</a:t>
-            </a:r>
-            <a:endParaRPr lang="en-US" sz="1350" dirty="0"/>
-          </a:p>
-        </p:txBody>
-      </p:sp>
-      <p:sp>
-        <p:nvSpPr>
-          <p:cNvPr id="12" name="Shape 10"/>
+              <a:t>R$ 9,2 bilhões</a:t>
+            </a:r>
+            <a:endParaRPr lang="en-US" sz="2200" dirty="0"/>
+          </a:p>
+        </p:txBody>
+      </p:sp>
+      <p:sp>
+        <p:nvSpPr>
+          <p:cNvPr id="8" name="Text 6"/>
+          <p:cNvSpPr txBox="1"/>
+          <p:nvPr/>
+        </p:nvSpPr>
+        <p:spPr>
+          <a:xfrm>
+            <a:off x="822960" y="5193792"/>
+            <a:ext cx="4297680" cy="365760"/>
+          </a:xfrm>
+          <a:prstGeom prst="rect">
+            <a:avLst/>
+          </a:prstGeom>
+          <a:noFill/>
+          <a:ln/>
+        </p:spPr>
+        <p:txBody>
+          <a:bodyPr wrap="square" lIns="0" tIns="0" rIns="0" bIns="0" rtlCol="0" anchor="t"/>
+          <a:lstStyle/>
+          <a:p>
+            <a:pPr indent="0" marL="0">
+              <a:buNone/>
+            </a:pPr>
+            <a:r>
+              <a:rPr lang="en-US" sz="1300" dirty="0">
+                <a:solidFill>
+                  <a:srgbClr val="C9D7EE"/>
+                </a:solidFill>
+              </a:rPr>
+              <a:t>em prejuízos com chuvas no Brasil só em 2024</a:t>
+            </a:r>
+            <a:endParaRPr lang="en-US" sz="1300" dirty="0"/>
+          </a:p>
+        </p:txBody>
+      </p:sp>
+      <p:sp>
+        <p:nvSpPr>
+          <p:cNvPr id="9" name="Shape 7"/>
           <p:cNvSpPr/>
           <p:nvPr/>
         </p:nvSpPr>
         <p:spPr>
           <a:xfrm>
-            <a:off x="8275320" y="2148840"/>
-            <a:ext cx="365760" cy="365760"/>
+            <a:off x="5806440" y="1783080"/>
+            <a:ext cx="640080" cy="640080"/>
           </a:xfrm>
           <a:prstGeom prst="ellipse">
             <a:avLst/>
-          </a:prstGeom>
-          <a:solidFill>
-            <a:srgbClr val="1351B4"/>
-          </a:solidFill>
-          <a:ln w="38100">
-            <a:solidFill>
-              <a:srgbClr val="FFFFFF"/>
-            </a:solidFill>
-            <a:prstDash val="solid"/>
-          </a:ln>
-        </p:spPr>
-      </p:sp>
-      <p:sp>
-        <p:nvSpPr>
-          <p:cNvPr id="13" name="Text 11"/>
-          <p:cNvSpPr txBox="1"/>
-          <p:nvPr/>
-        </p:nvSpPr>
-        <p:spPr>
-          <a:xfrm>
-            <a:off x="8183880" y="2697480"/>
-            <a:ext cx="3474720" cy="365760"/>
-          </a:xfrm>
-          <a:prstGeom prst="rect">
-            <a:avLst/>
-          </a:prstGeom>
-          <a:noFill/>
-          <a:ln/>
-        </p:spPr>
-        <p:txBody>
-          <a:bodyPr wrap="square" lIns="0" tIns="0" rIns="0" bIns="0" rtlCol="0" anchor="t"/>
-          <a:lstStyle/>
-          <a:p>
-            <a:pPr indent="0" marL="0">
-              <a:buNone/>
-            </a:pPr>
-            <a:r>
-              <a:rPr lang="en-US" sz="1400" b="1" dirty="0">
-                <a:solidFill>
-                  <a:srgbClr val="1351B4"/>
-                </a:solidFill>
-              </a:rPr>
-              <a:t>2028</a:t>
-            </a:r>
-            <a:endParaRPr lang="en-US" sz="1400" dirty="0"/>
-          </a:p>
-        </p:txBody>
-      </p:sp>
-      <p:sp>
-        <p:nvSpPr>
-          <p:cNvPr id="14" name="Text 12"/>
-          <p:cNvSpPr txBox="1"/>
-          <p:nvPr/>
-        </p:nvSpPr>
-        <p:spPr>
-          <a:xfrm>
-            <a:off x="8183880" y="3063240"/>
-            <a:ext cx="3474720" cy="457200"/>
-          </a:xfrm>
-          <a:prstGeom prst="rect">
-            <a:avLst/>
-          </a:prstGeom>
-          <a:noFill/>
-          <a:ln/>
-        </p:spPr>
-        <p:txBody>
-          <a:bodyPr wrap="square" lIns="0" tIns="0" rIns="0" bIns="0" rtlCol="0" anchor="t"/>
-          <a:lstStyle/>
-          <a:p>
-            <a:pPr indent="0" marL="0">
-              <a:buNone/>
-            </a:pPr>
-            <a:r>
-              <a:rPr lang="en-US" sz="2000" b="1" dirty="0">
-                <a:solidFill>
-                  <a:srgbClr val="071D41"/>
-                </a:solidFill>
-                <a:latin typeface="Montserrat" pitchFamily="34" charset="0"/>
-                <a:ea typeface="Montserrat" pitchFamily="34" charset="-122"/>
-                <a:cs typeface="Montserrat" pitchFamily="34" charset="-120"/>
-              </a:rPr>
-              <a:t>Cobertura nacional</a:t>
-            </a:r>
-            <a:endParaRPr lang="en-US" sz="2000" dirty="0"/>
-          </a:p>
-        </p:txBody>
-      </p:sp>
-      <p:sp>
-        <p:nvSpPr>
-          <p:cNvPr id="15" name="Text 13"/>
-          <p:cNvSpPr txBox="1"/>
-          <p:nvPr/>
-        </p:nvSpPr>
-        <p:spPr>
-          <a:xfrm>
-            <a:off x="8183880" y="3520440"/>
-            <a:ext cx="3474720" cy="548640"/>
-          </a:xfrm>
-          <a:prstGeom prst="rect">
-            <a:avLst/>
-          </a:prstGeom>
-          <a:noFill/>
-          <a:ln/>
-        </p:spPr>
-        <p:txBody>
-          <a:bodyPr wrap="square" lIns="0" tIns="0" rIns="0" bIns="0" rtlCol="0" anchor="t"/>
-          <a:lstStyle/>
-          <a:p>
-            <a:pPr indent="0" marL="0">
-              <a:buNone/>
-            </a:pPr>
-            <a:r>
-              <a:rPr lang="en-US" sz="1350" dirty="0">
-                <a:solidFill>
-                  <a:srgbClr val="5D6673"/>
-                </a:solidFill>
-              </a:rPr>
-              <a:t>Integrado à Defesa Civil em todo o país</a:t>
-            </a:r>
-            <a:endParaRPr lang="en-US" sz="1350" dirty="0"/>
-          </a:p>
-        </p:txBody>
-      </p:sp>
-      <p:sp>
-        <p:nvSpPr>
-          <p:cNvPr id="16" name="Shape 14"/>
-          <p:cNvSpPr/>
-          <p:nvPr/>
-        </p:nvSpPr>
-        <p:spPr>
-          <a:xfrm>
-            <a:off x="502920" y="4343400"/>
-            <a:ext cx="5486400" cy="1463040"/>
-          </a:xfrm>
-          <a:prstGeom prst="roundRect">
-            <a:avLst>
-              <a:gd name="adj" fmla="val 7500"/>
-            </a:avLst>
-          </a:prstGeom>
-          <a:solidFill>
-            <a:srgbClr val="F2F5FA"/>
-          </a:solidFill>
-          <a:ln w="12700">
-            <a:solidFill>
-              <a:srgbClr val="F2F5FA"/>
-            </a:solidFill>
-            <a:prstDash val="solid"/>
-          </a:ln>
-        </p:spPr>
-      </p:sp>
-      <p:sp>
-        <p:nvSpPr>
-          <p:cNvPr id="17" name="Text 15"/>
-          <p:cNvSpPr txBox="1"/>
-          <p:nvPr/>
-        </p:nvSpPr>
-        <p:spPr>
-          <a:xfrm>
-            <a:off x="777240" y="4480560"/>
-            <a:ext cx="5029200" cy="1280160"/>
-          </a:xfrm>
-          <a:prstGeom prst="rect">
-            <a:avLst/>
-          </a:prstGeom>
-          <a:noFill/>
-          <a:ln/>
-        </p:spPr>
-        <p:txBody>
-          <a:bodyPr wrap="square" lIns="0" tIns="0" rIns="0" bIns="0" rtlCol="0" anchor="t"/>
-          <a:lstStyle/>
-          <a:p>
-            <a:pPr indent="0" marL="0">
-              <a:buNone/>
-            </a:pPr>
-            <a:r>
-              <a:rPr lang="en-US" sz="1600" b="1" dirty="0">
-                <a:solidFill>
-                  <a:srgbClr val="071D41"/>
-                </a:solidFill>
-              </a:rPr>
-              <a:t>Metas</a:t>
-            </a:r>
-            <a:endParaRPr lang="en-US" sz="1350" dirty="0"/>
-          </a:p>
-          <a:p>
-            <a:pPr marL="342900" indent="-342900">
-              <a:buSzPct val="100000"/>
-              <a:buChar char="•"/>
-            </a:pPr>
-            <a:r>
-              <a:rPr lang="en-US" sz="1350" dirty="0">
-                <a:solidFill>
-                  <a:srgbClr val="1B1B1B"/>
-                </a:solidFill>
-              </a:rPr>
-              <a:t>Menos mortes em eventos extremos</a:t>
-            </a:r>
-            <a:endParaRPr lang="en-US" sz="1350" dirty="0"/>
-          </a:p>
-          <a:p>
-            <a:pPr marL="342900" indent="-342900">
-              <a:buSzPct val="100000"/>
-              <a:buChar char="•"/>
-            </a:pPr>
-            <a:r>
-              <a:rPr lang="en-US" sz="1350" dirty="0">
-                <a:solidFill>
-                  <a:srgbClr val="1B1B1B"/>
-                </a:solidFill>
-              </a:rPr>
-              <a:t>Menos tempo entre o alerta e a ação</a:t>
-            </a:r>
-            <a:endParaRPr lang="en-US" sz="1350" dirty="0"/>
-          </a:p>
-          <a:p>
-            <a:pPr marL="342900" indent="-342900">
-              <a:buSzPct val="100000"/>
-              <a:buChar char="•"/>
-            </a:pPr>
-            <a:r>
-              <a:rPr lang="en-US" sz="1350" dirty="0">
-                <a:solidFill>
-                  <a:srgbClr val="1B1B1B"/>
-                </a:solidFill>
-              </a:rPr>
-              <a:t>Todos os abrigos cadastrados e atualizados</a:t>
-            </a:r>
-            <a:endParaRPr lang="en-US" sz="1350" dirty="0"/>
-          </a:p>
-        </p:txBody>
-      </p:sp>
-      <p:sp>
-        <p:nvSpPr>
-          <p:cNvPr id="18" name="Shape 16"/>
-          <p:cNvSpPr/>
-          <p:nvPr/>
-        </p:nvSpPr>
-        <p:spPr>
-          <a:xfrm>
-            <a:off x="6172200" y="4343400"/>
-            <a:ext cx="5486400" cy="1463040"/>
-          </a:xfrm>
-          <a:prstGeom prst="roundRect">
-            <a:avLst>
-              <a:gd name="adj" fmla="val 7500"/>
-            </a:avLst>
           </a:prstGeom>
           <a:solidFill>
             <a:srgbClr val="DBE8FB"/>
@@ -7037,16 +6533,40 @@
           </a:ln>
         </p:spPr>
       </p:sp>
-      <p:sp>
-        <p:nvSpPr>
-          <p:cNvPr id="19" name="Text 17"/>
-          <p:cNvSpPr txBox="1"/>
-          <p:nvPr/>
-        </p:nvSpPr>
-        <p:spPr>
-          <a:xfrm>
-            <a:off x="6446520" y="4480560"/>
-            <a:ext cx="5029200" cy="1280160"/>
+      <p:pic>
+        <p:nvPicPr>
+          <p:cNvPr id="10" name="Image 0" descr="preencoded.png">    </p:cNvPr>
+          <p:cNvPicPr>
+            <a:picLocks noChangeAspect="1"/>
+          </p:cNvPicPr>
+          <p:nvPr/>
+        </p:nvPicPr>
+        <p:blipFill>
+          <a:blip r:embed="rId1"/>
+          <a:stretch>
+            <a:fillRect/>
+          </a:stretch>
+        </p:blipFill>
+        <p:spPr>
+          <a:xfrm>
+            <a:off x="5966460" y="1943100"/>
+            <a:ext cx="320040" cy="320040"/>
+          </a:xfrm>
+          <a:prstGeom prst="rect">
+            <a:avLst/>
+          </a:prstGeom>
+        </p:spPr>
+      </p:pic>
+      <p:sp>
+        <p:nvSpPr>
+          <p:cNvPr id="11" name="Text 8"/>
+          <p:cNvSpPr txBox="1"/>
+          <p:nvPr/>
+        </p:nvSpPr>
+        <p:spPr>
+          <a:xfrm>
+            <a:off x="6629400" y="1737360"/>
+            <a:ext cx="5029200" cy="914400"/>
           </a:xfrm>
           <a:prstGeom prst="rect">
             <a:avLst/>
@@ -7067,14 +6587,13 @@
                   <a:srgbClr val="071D41"/>
                 </a:solidFill>
               </a:rPr>
-              <a:t>Alinhamento internacional</a:t>
-            </a:r>
-            <a:endParaRPr lang="en-US" sz="1350" dirty="0"/>
-          </a:p>
-          <a:p>
-            <a:pPr marL="342900" indent="-342900">
-              <a:buSzPct val="100000"/>
-              <a:buChar char="•"/>
+              <a:t>Reaproveita</a:t>
+            </a:r>
+            <a:endParaRPr lang="en-US" sz="1400" dirty="0"/>
+          </a:p>
+          <a:p>
+            <a:pPr indent="0" marL="0">
+              <a:buNone/>
             </a:pPr>
             <a:r>
               <a:rPr lang="en-US" sz="1350" dirty="0">
@@ -7082,14 +6601,98 @@
                   <a:srgbClr val="1B1B1B"/>
                 </a:solidFill>
               </a:rPr>
-              <a:t>ODS 3 (saúde), 11 (cidades) e 13 (clima) da Agenda 2030</a:t>
-            </a:r>
-            <a:endParaRPr lang="en-US" sz="1350" dirty="0"/>
-          </a:p>
-          <a:p>
-            <a:pPr marL="342900" indent="-342900">
-              <a:buSzPct val="100000"/>
-              <a:buChar char="•"/>
+              <a:t>IDAP, cell broadcast, SMS 40199 e dados do Cemaden e Inmet</a:t>
+            </a:r>
+            <a:endParaRPr lang="en-US" sz="1400" dirty="0"/>
+          </a:p>
+        </p:txBody>
+      </p:sp>
+      <p:sp>
+        <p:nvSpPr>
+          <p:cNvPr id="12" name="Shape 9"/>
+          <p:cNvSpPr/>
+          <p:nvPr/>
+        </p:nvSpPr>
+        <p:spPr>
+          <a:xfrm>
+            <a:off x="5806440" y="2807208"/>
+            <a:ext cx="640080" cy="640080"/>
+          </a:xfrm>
+          <a:prstGeom prst="ellipse">
+            <a:avLst/>
+          </a:prstGeom>
+          <a:solidFill>
+            <a:srgbClr val="DBE8FB"/>
+          </a:solidFill>
+          <a:ln w="12700">
+            <a:solidFill>
+              <a:srgbClr val="DBE8FB"/>
+            </a:solidFill>
+            <a:prstDash val="solid"/>
+          </a:ln>
+        </p:spPr>
+      </p:sp>
+      <p:pic>
+        <p:nvPicPr>
+          <p:cNvPr id="13" name="Image 1" descr="preencoded.png">    </p:cNvPr>
+          <p:cNvPicPr>
+            <a:picLocks noChangeAspect="1"/>
+          </p:cNvPicPr>
+          <p:nvPr/>
+        </p:nvPicPr>
+        <p:blipFill>
+          <a:blip r:embed="rId2"/>
+          <a:stretch>
+            <a:fillRect/>
+          </a:stretch>
+        </p:blipFill>
+        <p:spPr>
+          <a:xfrm>
+            <a:off x="5966460" y="2967228"/>
+            <a:ext cx="320040" cy="320040"/>
+          </a:xfrm>
+          <a:prstGeom prst="rect">
+            <a:avLst/>
+          </a:prstGeom>
+        </p:spPr>
+      </p:pic>
+      <p:sp>
+        <p:nvSpPr>
+          <p:cNvPr id="14" name="Text 10"/>
+          <p:cNvSpPr txBox="1"/>
+          <p:nvPr/>
+        </p:nvSpPr>
+        <p:spPr>
+          <a:xfrm>
+            <a:off x="6629400" y="2761488"/>
+            <a:ext cx="5029200" cy="914400"/>
+          </a:xfrm>
+          <a:prstGeom prst="rect">
+            <a:avLst/>
+          </a:prstGeom>
+          <a:noFill/>
+          <a:ln/>
+        </p:spPr>
+        <p:txBody>
+          <a:bodyPr wrap="square" lIns="0" tIns="0" rIns="0" bIns="0" rtlCol="0" anchor="t"/>
+          <a:lstStyle/>
+          <a:p>
+            <a:pPr indent="0" marL="0">
+              <a:buNone/>
+            </a:pPr>
+            <a:r>
+              <a:rPr lang="en-US" sz="1600" b="1" dirty="0">
+                <a:solidFill>
+                  <a:srgbClr val="071D41"/>
+                </a:solidFill>
+              </a:rPr>
+              <a:t>Infraestrutura leve</a:t>
+            </a:r>
+            <a:endParaRPr lang="en-US" sz="1400" dirty="0"/>
+          </a:p>
+          <a:p>
+            <a:pPr indent="0" marL="0">
+              <a:buNone/>
             </a:pPr>
             <a:r>
               <a:rPr lang="en-US" sz="1350" dirty="0">
@@ -7097,9 +6700,243 @@
                   <a:srgbClr val="1B1B1B"/>
                 </a:solidFill>
               </a:rPr>
-              <a:t>Meta G do Marco de Sendai: alerta precoce acessível a todos até 2030</a:t>
-            </a:r>
-            <a:endParaRPr lang="en-US" sz="1350" dirty="0"/>
+              <a:t>Nuvem de governo e site instalável: sem app store obrigatória</a:t>
+            </a:r>
+            <a:endParaRPr lang="en-US" sz="1400" dirty="0"/>
+          </a:p>
+        </p:txBody>
+      </p:sp>
+      <p:sp>
+        <p:nvSpPr>
+          <p:cNvPr id="15" name="Shape 11"/>
+          <p:cNvSpPr/>
+          <p:nvPr/>
+        </p:nvSpPr>
+        <p:spPr>
+          <a:xfrm>
+            <a:off x="5806440" y="3831336"/>
+            <a:ext cx="640080" cy="640080"/>
+          </a:xfrm>
+          <a:prstGeom prst="ellipse">
+            <a:avLst/>
+          </a:prstGeom>
+          <a:solidFill>
+            <a:srgbClr val="DBE8FB"/>
+          </a:solidFill>
+          <a:ln w="12700">
+            <a:solidFill>
+              <a:srgbClr val="DBE8FB"/>
+            </a:solidFill>
+            <a:prstDash val="solid"/>
+          </a:ln>
+        </p:spPr>
+      </p:sp>
+      <p:pic>
+        <p:nvPicPr>
+          <p:cNvPr id="16" name="Image 2" descr="preencoded.png">    </p:cNvPr>
+          <p:cNvPicPr>
+            <a:picLocks noChangeAspect="1"/>
+          </p:cNvPicPr>
+          <p:nvPr/>
+        </p:nvPicPr>
+        <p:blipFill>
+          <a:blip r:embed="rId3"/>
+          <a:stretch>
+            <a:fillRect/>
+          </a:stretch>
+        </p:blipFill>
+        <p:spPr>
+          <a:xfrm>
+            <a:off x="5966460" y="3991356"/>
+            <a:ext cx="320040" cy="320040"/>
+          </a:xfrm>
+          <a:prstGeom prst="rect">
+            <a:avLst/>
+          </a:prstGeom>
+        </p:spPr>
+      </p:pic>
+      <p:sp>
+        <p:nvSpPr>
+          <p:cNvPr id="17" name="Text 12"/>
+          <p:cNvSpPr txBox="1"/>
+          <p:nvPr/>
+        </p:nvSpPr>
+        <p:spPr>
+          <a:xfrm>
+            <a:off x="6629400" y="3785616"/>
+            <a:ext cx="5029200" cy="914400"/>
+          </a:xfrm>
+          <a:prstGeom prst="rect">
+            <a:avLst/>
+          </a:prstGeom>
+          <a:noFill/>
+          <a:ln/>
+        </p:spPr>
+        <p:txBody>
+          <a:bodyPr wrap="square" lIns="0" tIns="0" rIns="0" bIns="0" rtlCol="0" anchor="t"/>
+          <a:lstStyle/>
+          <a:p>
+            <a:pPr indent="0" marL="0">
+              <a:buNone/>
+            </a:pPr>
+            <a:r>
+              <a:rPr lang="en-US" sz="1600" b="1" dirty="0">
+                <a:solidFill>
+                  <a:srgbClr val="071D41"/>
+                </a:solidFill>
+              </a:rPr>
+              <a:t>Base legal pronta</a:t>
+            </a:r>
+            <a:endParaRPr lang="en-US" sz="1400" dirty="0"/>
+          </a:p>
+          <a:p>
+            <a:pPr indent="0" marL="0">
+              <a:buNone/>
+            </a:pPr>
+            <a:r>
+              <a:rPr lang="en-US" sz="1350" dirty="0">
+                <a:solidFill>
+                  <a:srgbClr val="1B1B1B"/>
+                </a:solidFill>
+              </a:rPr>
+              <a:t>Lei 12.608/2012: Sistema Nacional de Proteção e Defesa Civil</a:t>
+            </a:r>
+            <a:endParaRPr lang="en-US" sz="1400" dirty="0"/>
+          </a:p>
+        </p:txBody>
+      </p:sp>
+      <p:sp>
+        <p:nvSpPr>
+          <p:cNvPr id="18" name="Shape 13"/>
+          <p:cNvSpPr/>
+          <p:nvPr/>
+        </p:nvSpPr>
+        <p:spPr>
+          <a:xfrm>
+            <a:off x="5806440" y="4855464"/>
+            <a:ext cx="640080" cy="640080"/>
+          </a:xfrm>
+          <a:prstGeom prst="ellipse">
+            <a:avLst/>
+          </a:prstGeom>
+          <a:solidFill>
+            <a:srgbClr val="DBE8FB"/>
+          </a:solidFill>
+          <a:ln w="12700">
+            <a:solidFill>
+              <a:srgbClr val="DBE8FB"/>
+            </a:solidFill>
+            <a:prstDash val="solid"/>
+          </a:ln>
+        </p:spPr>
+      </p:sp>
+      <p:pic>
+        <p:nvPicPr>
+          <p:cNvPr id="19" name="Image 3" descr="preencoded.png">    </p:cNvPr>
+          <p:cNvPicPr>
+            <a:picLocks noChangeAspect="1"/>
+          </p:cNvPicPr>
+          <p:nvPr/>
+        </p:nvPicPr>
+        <p:blipFill>
+          <a:blip r:embed="rId4"/>
+          <a:stretch>
+            <a:fillRect/>
+          </a:stretch>
+        </p:blipFill>
+        <p:spPr>
+          <a:xfrm>
+            <a:off x="5966460" y="5015484"/>
+            <a:ext cx="320040" cy="320040"/>
+          </a:xfrm>
+          <a:prstGeom prst="rect">
+            <a:avLst/>
+          </a:prstGeom>
+        </p:spPr>
+      </p:pic>
+      <p:sp>
+        <p:nvSpPr>
+          <p:cNvPr id="20" name="Text 14"/>
+          <p:cNvSpPr txBox="1"/>
+          <p:nvPr/>
+        </p:nvSpPr>
+        <p:spPr>
+          <a:xfrm>
+            <a:off x="6629400" y="4809744"/>
+            <a:ext cx="5029200" cy="914400"/>
+          </a:xfrm>
+          <a:prstGeom prst="rect">
+            <a:avLst/>
+          </a:prstGeom>
+          <a:noFill/>
+          <a:ln/>
+        </p:spPr>
+        <p:txBody>
+          <a:bodyPr wrap="square" lIns="0" tIns="0" rIns="0" bIns="0" rtlCol="0" anchor="t"/>
+          <a:lstStyle/>
+          <a:p>
+            <a:pPr indent="0" marL="0">
+              <a:buNone/>
+            </a:pPr>
+            <a:r>
+              <a:rPr lang="en-US" sz="1600" b="1" dirty="0">
+                <a:solidFill>
+                  <a:srgbClr val="071D41"/>
+                </a:solidFill>
+              </a:rPr>
+              <a:t>Grátis para o cidadão</a:t>
+            </a:r>
+            <a:endParaRPr lang="en-US" sz="1400" dirty="0"/>
+          </a:p>
+          <a:p>
+            <a:pPr indent="0" marL="0">
+              <a:buNone/>
+            </a:pPr>
+            <a:r>
+              <a:rPr lang="en-US" sz="1350" dirty="0">
+                <a:solidFill>
+                  <a:srgbClr val="1B1B1B"/>
+                </a:solidFill>
+              </a:rPr>
+              <a:t>Custo central da União; estados e municípios só operam</a:t>
+            </a:r>
+            <a:endParaRPr lang="en-US" sz="1400" dirty="0"/>
+          </a:p>
+        </p:txBody>
+      </p:sp>
+      <p:sp>
+        <p:nvSpPr>
+          <p:cNvPr id="21" name="Text 15"/>
+          <p:cNvSpPr txBox="1"/>
+          <p:nvPr/>
+        </p:nvSpPr>
+        <p:spPr>
+          <a:xfrm>
+            <a:off x="502920" y="5943600"/>
+            <a:ext cx="11155680" cy="320040"/>
+          </a:xfrm>
+          <a:prstGeom prst="rect">
+            <a:avLst/>
+          </a:prstGeom>
+          <a:noFill/>
+          <a:ln/>
+        </p:spPr>
+        <p:txBody>
+          <a:bodyPr wrap="square" lIns="0" tIns="0" rIns="0" bIns="0" rtlCol="0" anchor="ctr"/>
+          <a:lstStyle/>
+          <a:p>
+            <a:pPr indent="0" marL="0">
+              <a:buNone/>
+            </a:pPr>
+            <a:r>
+              <a:rPr lang="en-US" sz="1000" i="1" dirty="0">
+                <a:solidFill>
+                  <a:srgbClr val="5D6673"/>
+                </a:solidFill>
+              </a:rPr>
+              <a:t>Fontes: Hallegatte, World Bank Policy Research Working Paper 6058 (2012); levantamento de prejuízos por chuvas em 2024 (Revista Oeste, 2025); Lei nº 12.608/2012.</a:t>
+            </a:r>
+            <a:endParaRPr lang="en-US" sz="1000" dirty="0"/>
           </a:p>
         </p:txBody>
       </p:sp>
@@ -7196,7 +7033,7 @@
           <a:bodyPr wrap="square" lIns="0" tIns="0" rIns="0" bIns="0" rtlCol="0" anchor="t"/>
           <a:lstStyle/>
           <a:p>
-            <a:pPr indent="0" marL="0">
+            <a:pPr algn="l" indent="0" marL="0">
               <a:buNone/>
             </a:pPr>
             <a:r>
@@ -7208,7 +7045,7 @@
                 <a:ea typeface="Montserrat" pitchFamily="34" charset="-122"/>
                 <a:cs typeface="Montserrat" pitchFamily="34" charset="-120"/>
               </a:rPr>
-              <a:t>Referências</a:t>
+              <a:t>Onde queremos chegar.</a:t>
             </a:r>
             <a:endParaRPr lang="en-US" sz="3000" dirty="0"/>
           </a:p>
@@ -7216,193 +7053,633 @@
       </p:sp>
       <p:sp>
         <p:nvSpPr>
-          <p:cNvPr id="3" name="Text 1"/>
-          <p:cNvSpPr txBox="1"/>
-          <p:nvPr/>
-        </p:nvSpPr>
-        <p:spPr>
-          <a:xfrm>
-            <a:off x="502920" y="1508760"/>
-            <a:ext cx="11155680" cy="4572000"/>
-          </a:xfrm>
-          <a:prstGeom prst="rect">
-            <a:avLst/>
-          </a:prstGeom>
-          <a:noFill/>
-          <a:ln/>
-        </p:spPr>
-        <p:txBody>
-          <a:bodyPr wrap="square" lIns="0" tIns="0" rIns="0" bIns="0" rtlCol="0" anchor="t"/>
-          <a:lstStyle/>
-          <a:p>
-            <a:pPr indent="0" marL="0">
-              <a:spcAft>
-                <a:spcPts val="700"/>
-              </a:spcAft>
-              <a:buNone/>
-            </a:pPr>
-            <a:r>
-              <a:rPr lang="en-US" sz="1200" dirty="0">
+          <p:cNvPr id="3" name="Shape 1"/>
+          <p:cNvSpPr/>
+          <p:nvPr/>
+        </p:nvSpPr>
+        <p:spPr>
+          <a:xfrm>
+            <a:off x="914400" y="2331720"/>
+            <a:ext cx="10332720" cy="0"/>
+          </a:xfrm>
+          <a:prstGeom prst="line">
+            <a:avLst/>
+          </a:prstGeom>
+          <a:noFill/>
+          <a:ln w="38100">
+            <a:solidFill>
+              <a:srgbClr val="1351B4"/>
+            </a:solidFill>
+            <a:prstDash val="solid"/>
+          </a:ln>
+        </p:spPr>
+      </p:sp>
+      <p:sp>
+        <p:nvSpPr>
+          <p:cNvPr id="4" name="Shape 2"/>
+          <p:cNvSpPr/>
+          <p:nvPr/>
+        </p:nvSpPr>
+        <p:spPr>
+          <a:xfrm>
+            <a:off x="777240" y="2148840"/>
+            <a:ext cx="365760" cy="365760"/>
+          </a:xfrm>
+          <a:prstGeom prst="ellipse">
+            <a:avLst/>
+          </a:prstGeom>
+          <a:solidFill>
+            <a:srgbClr val="E86F25"/>
+          </a:solidFill>
+          <a:ln w="38100">
+            <a:solidFill>
+              <a:srgbClr val="FFFFFF"/>
+            </a:solidFill>
+            <a:prstDash val="solid"/>
+          </a:ln>
+        </p:spPr>
+      </p:sp>
+      <p:sp>
+        <p:nvSpPr>
+          <p:cNvPr id="5" name="Text 3"/>
+          <p:cNvSpPr txBox="1"/>
+          <p:nvPr/>
+        </p:nvSpPr>
+        <p:spPr>
+          <a:xfrm>
+            <a:off x="685800" y="2697480"/>
+            <a:ext cx="3474720" cy="365760"/>
+          </a:xfrm>
+          <a:prstGeom prst="rect">
+            <a:avLst/>
+          </a:prstGeom>
+          <a:noFill/>
+          <a:ln/>
+        </p:spPr>
+        <p:txBody>
+          <a:bodyPr wrap="square" lIns="0" tIns="0" rIns="0" bIns="0" rtlCol="0" anchor="t"/>
+          <a:lstStyle/>
+          <a:p>
+            <a:pPr indent="0" marL="0">
+              <a:buNone/>
+            </a:pPr>
+            <a:r>
+              <a:rPr lang="en-US" sz="1400" b="1" dirty="0">
+                <a:solidFill>
+                  <a:srgbClr val="E86F25"/>
+                </a:solidFill>
+              </a:rPr>
+              <a:t>Verão 2026/27</a:t>
+            </a:r>
+            <a:endParaRPr lang="en-US" sz="1400" dirty="0"/>
+          </a:p>
+        </p:txBody>
+      </p:sp>
+      <p:sp>
+        <p:nvSpPr>
+          <p:cNvPr id="6" name="Text 4"/>
+          <p:cNvSpPr txBox="1"/>
+          <p:nvPr/>
+        </p:nvSpPr>
+        <p:spPr>
+          <a:xfrm>
+            <a:off x="685800" y="3063240"/>
+            <a:ext cx="3474720" cy="457200"/>
+          </a:xfrm>
+          <a:prstGeom prst="rect">
+            <a:avLst/>
+          </a:prstGeom>
+          <a:noFill/>
+          <a:ln/>
+        </p:spPr>
+        <p:txBody>
+          <a:bodyPr wrap="square" lIns="0" tIns="0" rIns="0" bIns="0" rtlCol="0" anchor="t"/>
+          <a:lstStyle/>
+          <a:p>
+            <a:pPr indent="0" marL="0">
+              <a:buNone/>
+            </a:pPr>
+            <a:r>
+              <a:rPr lang="en-US" sz="2000" b="1" dirty="0">
+                <a:solidFill>
+                  <a:srgbClr val="071D41"/>
+                </a:solidFill>
+                <a:latin typeface="Montserrat" pitchFamily="34" charset="0"/>
+                <a:ea typeface="Montserrat" pitchFamily="34" charset="-122"/>
+                <a:cs typeface="Montserrat" pitchFamily="34" charset="-120"/>
+              </a:rPr>
+              <a:t>Piloto no Rio de Janeiro</a:t>
+            </a:r>
+            <a:endParaRPr lang="en-US" sz="2000" dirty="0"/>
+          </a:p>
+        </p:txBody>
+      </p:sp>
+      <p:sp>
+        <p:nvSpPr>
+          <p:cNvPr id="7" name="Text 5"/>
+          <p:cNvSpPr txBox="1"/>
+          <p:nvPr/>
+        </p:nvSpPr>
+        <p:spPr>
+          <a:xfrm>
+            <a:off x="685800" y="3520440"/>
+            <a:ext cx="3474720" cy="548640"/>
+          </a:xfrm>
+          <a:prstGeom prst="rect">
+            <a:avLst/>
+          </a:prstGeom>
+          <a:noFill/>
+          <a:ln/>
+        </p:spPr>
+        <p:txBody>
+          <a:bodyPr wrap="square" lIns="0" tIns="0" rIns="0" bIns="0" rtlCol="0" anchor="t"/>
+          <a:lstStyle/>
+          <a:p>
+            <a:pPr indent="0" marL="0">
+              <a:buNone/>
+            </a:pPr>
+            <a:r>
+              <a:rPr lang="en-US" sz="1350" dirty="0">
+                <a:solidFill>
+                  <a:srgbClr val="5D6673"/>
+                </a:solidFill>
+              </a:rPr>
+              <a:t>Bairros de calor, deslizamento e alagamento</a:t>
+            </a:r>
+            <a:endParaRPr lang="en-US" sz="1350" dirty="0"/>
+          </a:p>
+        </p:txBody>
+      </p:sp>
+      <p:sp>
+        <p:nvSpPr>
+          <p:cNvPr id="8" name="Shape 6"/>
+          <p:cNvSpPr/>
+          <p:nvPr/>
+        </p:nvSpPr>
+        <p:spPr>
+          <a:xfrm>
+            <a:off x="4526280" y="2148840"/>
+            <a:ext cx="365760" cy="365760"/>
+          </a:xfrm>
+          <a:prstGeom prst="ellipse">
+            <a:avLst/>
+          </a:prstGeom>
+          <a:solidFill>
+            <a:srgbClr val="1351B4"/>
+          </a:solidFill>
+          <a:ln w="38100">
+            <a:solidFill>
+              <a:srgbClr val="FFFFFF"/>
+            </a:solidFill>
+            <a:prstDash val="solid"/>
+          </a:ln>
+        </p:spPr>
+      </p:sp>
+      <p:sp>
+        <p:nvSpPr>
+          <p:cNvPr id="9" name="Text 7"/>
+          <p:cNvSpPr txBox="1"/>
+          <p:nvPr/>
+        </p:nvSpPr>
+        <p:spPr>
+          <a:xfrm>
+            <a:off x="4434840" y="2697480"/>
+            <a:ext cx="3474720" cy="365760"/>
+          </a:xfrm>
+          <a:prstGeom prst="rect">
+            <a:avLst/>
+          </a:prstGeom>
+          <a:noFill/>
+          <a:ln/>
+        </p:spPr>
+        <p:txBody>
+          <a:bodyPr wrap="square" lIns="0" tIns="0" rIns="0" bIns="0" rtlCol="0" anchor="t"/>
+          <a:lstStyle/>
+          <a:p>
+            <a:pPr indent="0" marL="0">
+              <a:buNone/>
+            </a:pPr>
+            <a:r>
+              <a:rPr lang="en-US" sz="1400" b="1" dirty="0">
+                <a:solidFill>
+                  <a:srgbClr val="1351B4"/>
+                </a:solidFill>
+              </a:rPr>
+              <a:t>2027</a:t>
+            </a:r>
+            <a:endParaRPr lang="en-US" sz="1400" dirty="0"/>
+          </a:p>
+        </p:txBody>
+      </p:sp>
+      <p:sp>
+        <p:nvSpPr>
+          <p:cNvPr id="10" name="Text 8"/>
+          <p:cNvSpPr txBox="1"/>
+          <p:nvPr/>
+        </p:nvSpPr>
+        <p:spPr>
+          <a:xfrm>
+            <a:off x="4434840" y="3063240"/>
+            <a:ext cx="3474720" cy="457200"/>
+          </a:xfrm>
+          <a:prstGeom prst="rect">
+            <a:avLst/>
+          </a:prstGeom>
+          <a:noFill/>
+          <a:ln/>
+        </p:spPr>
+        <p:txBody>
+          <a:bodyPr wrap="square" lIns="0" tIns="0" rIns="0" bIns="0" rtlCol="0" anchor="t"/>
+          <a:lstStyle/>
+          <a:p>
+            <a:pPr indent="0" marL="0">
+              <a:buNone/>
+            </a:pPr>
+            <a:r>
+              <a:rPr lang="en-US" sz="2000" b="1" dirty="0">
+                <a:solidFill>
+                  <a:srgbClr val="071D41"/>
+                </a:solidFill>
+                <a:latin typeface="Montserrat" pitchFamily="34" charset="0"/>
+                <a:ea typeface="Montserrat" pitchFamily="34" charset="-122"/>
+                <a:cs typeface="Montserrat" pitchFamily="34" charset="-120"/>
+              </a:rPr>
+              <a:t>Estados mais atingidos</a:t>
+            </a:r>
+            <a:endParaRPr lang="en-US" sz="2000" dirty="0"/>
+          </a:p>
+        </p:txBody>
+      </p:sp>
+      <p:sp>
+        <p:nvSpPr>
+          <p:cNvPr id="11" name="Text 9"/>
+          <p:cNvSpPr txBox="1"/>
+          <p:nvPr/>
+        </p:nvSpPr>
+        <p:spPr>
+          <a:xfrm>
+            <a:off x="4434840" y="3520440"/>
+            <a:ext cx="3474720" cy="548640"/>
+          </a:xfrm>
+          <a:prstGeom prst="rect">
+            <a:avLst/>
+          </a:prstGeom>
+          <a:noFill/>
+          <a:ln/>
+        </p:spPr>
+        <p:txBody>
+          <a:bodyPr wrap="square" lIns="0" tIns="0" rIns="0" bIns="0" rtlCol="0" anchor="t"/>
+          <a:lstStyle/>
+          <a:p>
+            <a:pPr indent="0" marL="0">
+              <a:buNone/>
+            </a:pPr>
+            <a:r>
+              <a:rPr lang="en-US" sz="1350" dirty="0">
+                <a:solidFill>
+                  <a:srgbClr val="5D6673"/>
+                </a:solidFill>
+              </a:rPr>
+              <a:t>RS (enchente), PB (seca), AM (rios)</a:t>
+            </a:r>
+            <a:endParaRPr lang="en-US" sz="1350" dirty="0"/>
+          </a:p>
+        </p:txBody>
+      </p:sp>
+      <p:sp>
+        <p:nvSpPr>
+          <p:cNvPr id="12" name="Shape 10"/>
+          <p:cNvSpPr/>
+          <p:nvPr/>
+        </p:nvSpPr>
+        <p:spPr>
+          <a:xfrm>
+            <a:off x="8275320" y="2148840"/>
+            <a:ext cx="365760" cy="365760"/>
+          </a:xfrm>
+          <a:prstGeom prst="ellipse">
+            <a:avLst/>
+          </a:prstGeom>
+          <a:solidFill>
+            <a:srgbClr val="1351B4"/>
+          </a:solidFill>
+          <a:ln w="38100">
+            <a:solidFill>
+              <a:srgbClr val="FFFFFF"/>
+            </a:solidFill>
+            <a:prstDash val="solid"/>
+          </a:ln>
+        </p:spPr>
+      </p:sp>
+      <p:sp>
+        <p:nvSpPr>
+          <p:cNvPr id="13" name="Text 11"/>
+          <p:cNvSpPr txBox="1"/>
+          <p:nvPr/>
+        </p:nvSpPr>
+        <p:spPr>
+          <a:xfrm>
+            <a:off x="8183880" y="2697480"/>
+            <a:ext cx="3474720" cy="365760"/>
+          </a:xfrm>
+          <a:prstGeom prst="rect">
+            <a:avLst/>
+          </a:prstGeom>
+          <a:noFill/>
+          <a:ln/>
+        </p:spPr>
+        <p:txBody>
+          <a:bodyPr wrap="square" lIns="0" tIns="0" rIns="0" bIns="0" rtlCol="0" anchor="t"/>
+          <a:lstStyle/>
+          <a:p>
+            <a:pPr indent="0" marL="0">
+              <a:buNone/>
+            </a:pPr>
+            <a:r>
+              <a:rPr lang="en-US" sz="1400" b="1" dirty="0">
+                <a:solidFill>
+                  <a:srgbClr val="1351B4"/>
+                </a:solidFill>
+              </a:rPr>
+              <a:t>2028</a:t>
+            </a:r>
+            <a:endParaRPr lang="en-US" sz="1400" dirty="0"/>
+          </a:p>
+        </p:txBody>
+      </p:sp>
+      <p:sp>
+        <p:nvSpPr>
+          <p:cNvPr id="14" name="Text 12"/>
+          <p:cNvSpPr txBox="1"/>
+          <p:nvPr/>
+        </p:nvSpPr>
+        <p:spPr>
+          <a:xfrm>
+            <a:off x="8183880" y="3063240"/>
+            <a:ext cx="3474720" cy="457200"/>
+          </a:xfrm>
+          <a:prstGeom prst="rect">
+            <a:avLst/>
+          </a:prstGeom>
+          <a:noFill/>
+          <a:ln/>
+        </p:spPr>
+        <p:txBody>
+          <a:bodyPr wrap="square" lIns="0" tIns="0" rIns="0" bIns="0" rtlCol="0" anchor="t"/>
+          <a:lstStyle/>
+          <a:p>
+            <a:pPr indent="0" marL="0">
+              <a:buNone/>
+            </a:pPr>
+            <a:r>
+              <a:rPr lang="en-US" sz="2000" b="1" dirty="0">
+                <a:solidFill>
+                  <a:srgbClr val="071D41"/>
+                </a:solidFill>
+                <a:latin typeface="Montserrat" pitchFamily="34" charset="0"/>
+                <a:ea typeface="Montserrat" pitchFamily="34" charset="-122"/>
+                <a:cs typeface="Montserrat" pitchFamily="34" charset="-120"/>
+              </a:rPr>
+              <a:t>Cobertura nacional</a:t>
+            </a:r>
+            <a:endParaRPr lang="en-US" sz="2000" dirty="0"/>
+          </a:p>
+        </p:txBody>
+      </p:sp>
+      <p:sp>
+        <p:nvSpPr>
+          <p:cNvPr id="15" name="Text 13"/>
+          <p:cNvSpPr txBox="1"/>
+          <p:nvPr/>
+        </p:nvSpPr>
+        <p:spPr>
+          <a:xfrm>
+            <a:off x="8183880" y="3520440"/>
+            <a:ext cx="3474720" cy="548640"/>
+          </a:xfrm>
+          <a:prstGeom prst="rect">
+            <a:avLst/>
+          </a:prstGeom>
+          <a:noFill/>
+          <a:ln/>
+        </p:spPr>
+        <p:txBody>
+          <a:bodyPr wrap="square" lIns="0" tIns="0" rIns="0" bIns="0" rtlCol="0" anchor="t"/>
+          <a:lstStyle/>
+          <a:p>
+            <a:pPr indent="0" marL="0">
+              <a:buNone/>
+            </a:pPr>
+            <a:r>
+              <a:rPr lang="en-US" sz="1350" dirty="0">
+                <a:solidFill>
+                  <a:srgbClr val="5D6673"/>
+                </a:solidFill>
+              </a:rPr>
+              <a:t>Integrado à Defesa Civil em todo o país</a:t>
+            </a:r>
+            <a:endParaRPr lang="en-US" sz="1350" dirty="0"/>
+          </a:p>
+        </p:txBody>
+      </p:sp>
+      <p:sp>
+        <p:nvSpPr>
+          <p:cNvPr id="16" name="Shape 14"/>
+          <p:cNvSpPr/>
+          <p:nvPr/>
+        </p:nvSpPr>
+        <p:spPr>
+          <a:xfrm>
+            <a:off x="502920" y="4343400"/>
+            <a:ext cx="5486400" cy="1463040"/>
+          </a:xfrm>
+          <a:prstGeom prst="roundRect">
+            <a:avLst>
+              <a:gd name="adj" fmla="val 7500"/>
+            </a:avLst>
+          </a:prstGeom>
+          <a:solidFill>
+            <a:srgbClr val="F2F5FA"/>
+          </a:solidFill>
+          <a:ln w="12700">
+            <a:solidFill>
+              <a:srgbClr val="F2F5FA"/>
+            </a:solidFill>
+            <a:prstDash val="solid"/>
+          </a:ln>
+        </p:spPr>
+      </p:sp>
+      <p:sp>
+        <p:nvSpPr>
+          <p:cNvPr id="17" name="Text 15"/>
+          <p:cNvSpPr txBox="1"/>
+          <p:nvPr/>
+        </p:nvSpPr>
+        <p:spPr>
+          <a:xfrm>
+            <a:off x="777240" y="4480560"/>
+            <a:ext cx="5029200" cy="1280160"/>
+          </a:xfrm>
+          <a:prstGeom prst="rect">
+            <a:avLst/>
+          </a:prstGeom>
+          <a:noFill/>
+          <a:ln/>
+        </p:spPr>
+        <p:txBody>
+          <a:bodyPr wrap="square" lIns="0" tIns="0" rIns="0" bIns="0" rtlCol="0" anchor="t"/>
+          <a:lstStyle/>
+          <a:p>
+            <a:pPr indent="0" marL="0">
+              <a:buNone/>
+            </a:pPr>
+            <a:r>
+              <a:rPr lang="en-US" sz="1600" b="1" dirty="0">
+                <a:solidFill>
+                  <a:srgbClr val="071D41"/>
+                </a:solidFill>
+              </a:rPr>
+              <a:t>Metas</a:t>
+            </a:r>
+            <a:endParaRPr lang="en-US" sz="1350" dirty="0"/>
+          </a:p>
+          <a:p>
+            <a:pPr marL="342900" indent="-342900">
+              <a:buSzPct val="100000"/>
+              <a:buChar char="•"/>
+            </a:pPr>
+            <a:r>
+              <a:rPr lang="en-US" sz="1350" dirty="0">
                 <a:solidFill>
                   <a:srgbClr val="1B1B1B"/>
                 </a:solidFill>
               </a:rPr>
-              <a:t>AGÊNCIA BRASIL. Sistema da Defesa Civil é suspenso após invasão e disparo falso. Brasília, 20 jun. 2026.</a:t>
-            </a:r>
-            <a:endParaRPr lang="en-US" sz="1200" dirty="0"/>
-          </a:p>
-          <a:p>
-            <a:pPr indent="0" marL="0">
-              <a:spcAft>
-                <a:spcPts val="700"/>
-              </a:spcAft>
-              <a:buNone/>
-            </a:pPr>
-            <a:r>
-              <a:rPr lang="en-US" sz="1200" dirty="0">
+              <a:t>Menos mortes em eventos extremos</a:t>
+            </a:r>
+            <a:endParaRPr lang="en-US" sz="1350" dirty="0"/>
+          </a:p>
+          <a:p>
+            <a:pPr marL="342900" indent="-342900">
+              <a:buSzPct val="100000"/>
+              <a:buChar char="•"/>
+            </a:pPr>
+            <a:r>
+              <a:rPr lang="en-US" sz="1350" dirty="0">
                 <a:solidFill>
                   <a:srgbClr val="1B1B1B"/>
                 </a:solidFill>
               </a:rPr>
-              <a:t>BRASIL. Lei nº 12.608, de 10 de abril de 2012. Institui a Política Nacional de Proteção e Defesa Civil.</a:t>
-            </a:r>
-            <a:endParaRPr lang="en-US" sz="1200" dirty="0"/>
-          </a:p>
-          <a:p>
-            <a:pPr indent="0" marL="0">
-              <a:spcAft>
-                <a:spcPts val="700"/>
-              </a:spcAft>
-              <a:buNone/>
-            </a:pPr>
-            <a:r>
-              <a:rPr lang="en-US" sz="1200" dirty="0">
+              <a:t>Menos tempo entre o alerta e a ação</a:t>
+            </a:r>
+            <a:endParaRPr lang="en-US" sz="1350" dirty="0"/>
+          </a:p>
+          <a:p>
+            <a:pPr marL="342900" indent="-342900">
+              <a:buSzPct val="100000"/>
+              <a:buChar char="•"/>
+            </a:pPr>
+            <a:r>
+              <a:rPr lang="en-US" sz="1350" dirty="0">
                 <a:solidFill>
                   <a:srgbClr val="1B1B1B"/>
                 </a:solidFill>
               </a:rPr>
-              <a:t>HALLEGATTE, S. A cost effective solution to reduce disaster losses in developing countries. Washington: World Bank, 2012. (Policy Research Working Paper, 6058).</a:t>
-            </a:r>
-            <a:endParaRPr lang="en-US" sz="1200" dirty="0"/>
-          </a:p>
-          <a:p>
-            <a:pPr indent="0" marL="0">
-              <a:spcAft>
-                <a:spcPts val="700"/>
-              </a:spcAft>
-              <a:buNone/>
-            </a:pPr>
-            <a:r>
-              <a:rPr lang="en-US" sz="1200" dirty="0">
+              <a:t>Todos os abrigos cadastrados e atualizados</a:t>
+            </a:r>
+            <a:endParaRPr lang="en-US" sz="1350" dirty="0"/>
+          </a:p>
+        </p:txBody>
+      </p:sp>
+      <p:sp>
+        <p:nvSpPr>
+          <p:cNvPr id="18" name="Shape 16"/>
+          <p:cNvSpPr/>
+          <p:nvPr/>
+        </p:nvSpPr>
+        <p:spPr>
+          <a:xfrm>
+            <a:off x="6172200" y="4343400"/>
+            <a:ext cx="5486400" cy="1463040"/>
+          </a:xfrm>
+          <a:prstGeom prst="roundRect">
+            <a:avLst>
+              <a:gd name="adj" fmla="val 7500"/>
+            </a:avLst>
+          </a:prstGeom>
+          <a:solidFill>
+            <a:srgbClr val="DBE8FB"/>
+          </a:solidFill>
+          <a:ln w="12700">
+            <a:solidFill>
+              <a:srgbClr val="DBE8FB"/>
+            </a:solidFill>
+            <a:prstDash val="solid"/>
+          </a:ln>
+        </p:spPr>
+      </p:sp>
+      <p:sp>
+        <p:nvSpPr>
+          <p:cNvPr id="19" name="Text 17"/>
+          <p:cNvSpPr txBox="1"/>
+          <p:nvPr/>
+        </p:nvSpPr>
+        <p:spPr>
+          <a:xfrm>
+            <a:off x="6446520" y="4480560"/>
+            <a:ext cx="5029200" cy="1280160"/>
+          </a:xfrm>
+          <a:prstGeom prst="rect">
+            <a:avLst/>
+          </a:prstGeom>
+          <a:noFill/>
+          <a:ln/>
+        </p:spPr>
+        <p:txBody>
+          <a:bodyPr wrap="square" lIns="0" tIns="0" rIns="0" bIns="0" rtlCol="0" anchor="t"/>
+          <a:lstStyle/>
+          <a:p>
+            <a:pPr indent="0" marL="0">
+              <a:buNone/>
+            </a:pPr>
+            <a:r>
+              <a:rPr lang="en-US" sz="1600" b="1" dirty="0">
+                <a:solidFill>
+                  <a:srgbClr val="071D41"/>
+                </a:solidFill>
+              </a:rPr>
+              <a:t>Alinhamento internacional</a:t>
+            </a:r>
+            <a:endParaRPr lang="en-US" sz="1350" dirty="0"/>
+          </a:p>
+          <a:p>
+            <a:pPr marL="342900" indent="-342900">
+              <a:buSzPct val="100000"/>
+              <a:buChar char="•"/>
+            </a:pPr>
+            <a:r>
+              <a:rPr lang="en-US" sz="1350" dirty="0">
                 <a:solidFill>
                   <a:srgbClr val="1B1B1B"/>
                 </a:solidFill>
               </a:rPr>
-              <a:t>HESS, J. J. et al. Building resilience to climate change: pilot evaluation of the impact of India's first heat action plan on all-cause mortality. Journal of Environmental and Public Health, 2018.</a:t>
-            </a:r>
-            <a:endParaRPr lang="en-US" sz="1200" dirty="0"/>
-          </a:p>
-          <a:p>
-            <a:pPr indent="0" marL="0">
-              <a:spcAft>
-                <a:spcPts val="700"/>
-              </a:spcAft>
-              <a:buNone/>
-            </a:pPr>
-            <a:r>
-              <a:rPr lang="en-US" sz="1200" dirty="0">
+              <a:t>ODS 3 (saúde), 11 (cidades) e 13 (clima) da Agenda 2030</a:t>
+            </a:r>
+            <a:endParaRPr lang="en-US" sz="1350" dirty="0"/>
+          </a:p>
+          <a:p>
+            <a:pPr marL="342900" indent="-342900">
+              <a:buSzPct val="100000"/>
+              <a:buChar char="•"/>
+            </a:pPr>
+            <a:r>
+              <a:rPr lang="en-US" sz="1350" dirty="0">
                 <a:solidFill>
                   <a:srgbClr val="1B1B1B"/>
                 </a:solidFill>
               </a:rPr>
-              <a:t>INMET; INPE; ANA; CEMADEN; SGB; SEDEC. Painel El Niño 2026-2027: boletins 1 a 3. Brasília, 2026.</a:t>
-            </a:r>
-            <a:endParaRPr lang="en-US" sz="1200" dirty="0"/>
-          </a:p>
-          <a:p>
-            <a:pPr indent="0" marL="0">
-              <a:spcAft>
-                <a:spcPts val="700"/>
-              </a:spcAft>
-              <a:buNone/>
-            </a:pPr>
-            <a:r>
-              <a:rPr lang="en-US" sz="1200" dirty="0">
-                <a:solidFill>
-                  <a:srgbClr val="1B1B1B"/>
-                </a:solidFill>
-              </a:rPr>
-              <a:t>IPCC. Climate Change 2021: The Physical Science Basis. Summary for Policymakers. Cambridge University Press, 2021.</a:t>
-            </a:r>
-            <a:endParaRPr lang="en-US" sz="1200" dirty="0"/>
-          </a:p>
-          <a:p>
-            <a:pPr indent="0" marL="0">
-              <a:spcAft>
-                <a:spcPts val="700"/>
-              </a:spcAft>
-              <a:buNone/>
-            </a:pPr>
-            <a:r>
-              <a:rPr lang="en-US" sz="1200" dirty="0">
-                <a:solidFill>
-                  <a:srgbClr val="1B1B1B"/>
-                </a:solidFill>
-              </a:rPr>
-              <a:t>LANCET COUNTDOWN. The 2025 report of the Lancet Countdown on health and climate change. The Lancet, 2025.</a:t>
-            </a:r>
-            <a:endParaRPr lang="en-US" sz="1200" dirty="0"/>
-          </a:p>
-          <a:p>
-            <a:pPr indent="0" marL="0">
-              <a:spcAft>
-                <a:spcPts val="700"/>
-              </a:spcAft>
-              <a:buNone/>
-            </a:pPr>
-            <a:r>
-              <a:rPr lang="en-US" sz="1200" dirty="0">
-                <a:solidFill>
-                  <a:srgbClr val="1B1B1B"/>
-                </a:solidFill>
-              </a:rPr>
-              <a:t>NHESS. Heat-related mortality in Rio de Janeiro during the November 2023 heatwave. Natural Hazards and Earth System Sciences, v. 25, 2025.</a:t>
-            </a:r>
-            <a:endParaRPr lang="en-US" sz="1200" dirty="0"/>
-          </a:p>
-          <a:p>
-            <a:pPr indent="0" marL="0">
-              <a:spcAft>
-                <a:spcPts val="700"/>
-              </a:spcAft>
-              <a:buNone/>
-            </a:pPr>
-            <a:r>
-              <a:rPr lang="en-US" sz="1200" dirty="0">
-                <a:solidFill>
-                  <a:srgbClr val="1B1B1B"/>
-                </a:solidFill>
-              </a:rPr>
-              <a:t>UNDRR. Sendai Framework for Disaster Risk Reduction 2015-2030. Genebra, 2015.</a:t>
-            </a:r>
-            <a:endParaRPr lang="en-US" sz="1200" dirty="0"/>
-          </a:p>
-          <a:p>
-            <a:pPr indent="0" marL="0">
-              <a:spcAft>
-                <a:spcPts val="700"/>
-              </a:spcAft>
-              <a:buNone/>
-            </a:pPr>
-            <a:r>
-              <a:rPr lang="en-US" sz="1200" dirty="0">
-                <a:solidFill>
-                  <a:srgbClr val="1B1B1B"/>
-                </a:solidFill>
-              </a:rPr>
-              <a:t>UNITED NATIONS. Early Warnings for All Initiative. Nova York, 2025.</a:t>
-            </a:r>
-            <a:endParaRPr lang="en-US" sz="1200" dirty="0"/>
+              <a:t>Meta G do Marco de Sendai: alerta precoce acessível a todos até 2030</a:t>
+            </a:r>
+            <a:endParaRPr lang="en-US" sz="1350" dirty="0"/>
           </a:p>
         </p:txBody>
       </p:sp>
@@ -7478,6 +7755,326 @@
       </p:grpSpPr>
       <p:sp>
         <p:nvSpPr>
+          <p:cNvPr id="2" name="Text 4"/>
+          <p:cNvSpPr/>
+          <p:nvPr>
+            <p:ph idx="105" type="title" hasCustomPrompt="1"/>
+          </p:nvPr>
+        </p:nvSpPr>
+        <p:spPr>
+          <a:xfrm>
+            <a:off x="502920" y="777240"/>
+            <a:ext cx="11155680" cy="914400"/>
+          </a:xfrm>
+          <a:prstGeom prst="rect">
+            <a:avLst/>
+          </a:prstGeom>
+          <a:noFill/>
+          <a:ln/>
+        </p:spPr>
+        <p:txBody>
+          <a:bodyPr wrap="square" lIns="0" tIns="0" rIns="0" bIns="0" rtlCol="0" anchor="t"/>
+          <a:lstStyle/>
+          <a:p>
+            <a:pPr algn="l" indent="0" marL="0">
+              <a:buNone/>
+            </a:pPr>
+            <a:r>
+              <a:rPr lang="en-US" sz="3000" b="1" dirty="0">
+                <a:solidFill>
+                  <a:srgbClr val="071D41"/>
+                </a:solidFill>
+                <a:latin typeface="Montserrat" pitchFamily="34" charset="0"/>
+                <a:ea typeface="Montserrat" pitchFamily="34" charset="-122"/>
+                <a:cs typeface="Montserrat" pitchFamily="34" charset="-120"/>
+              </a:rPr>
+              <a:t>Referências</a:t>
+            </a:r>
+            <a:endParaRPr lang="en-US" sz="3000" dirty="0"/>
+          </a:p>
+        </p:txBody>
+      </p:sp>
+      <p:sp>
+        <p:nvSpPr>
+          <p:cNvPr id="3" name="Text 1"/>
+          <p:cNvSpPr txBox="1"/>
+          <p:nvPr/>
+        </p:nvSpPr>
+        <p:spPr>
+          <a:xfrm>
+            <a:off x="502920" y="1508760"/>
+            <a:ext cx="11155680" cy="4572000"/>
+          </a:xfrm>
+          <a:prstGeom prst="rect">
+            <a:avLst/>
+          </a:prstGeom>
+          <a:noFill/>
+          <a:ln/>
+        </p:spPr>
+        <p:txBody>
+          <a:bodyPr wrap="square" lIns="0" tIns="0" rIns="0" bIns="0" rtlCol="0" anchor="t"/>
+          <a:lstStyle/>
+          <a:p>
+            <a:pPr indent="0" marL="0">
+              <a:spcAft>
+                <a:spcPts val="700"/>
+              </a:spcAft>
+              <a:buNone/>
+            </a:pPr>
+            <a:r>
+              <a:rPr lang="en-US" sz="1200" dirty="0">
+                <a:solidFill>
+                  <a:srgbClr val="1B1B1B"/>
+                </a:solidFill>
+              </a:rPr>
+              <a:t>AGÊNCIA BRASIL. Sistema da Defesa Civil é suspenso após invasão e disparo falso. Brasília, 20 jun. 2026.</a:t>
+            </a:r>
+            <a:endParaRPr lang="en-US" sz="1200" dirty="0"/>
+          </a:p>
+          <a:p>
+            <a:pPr indent="0" marL="0">
+              <a:spcAft>
+                <a:spcPts val="700"/>
+              </a:spcAft>
+              <a:buNone/>
+            </a:pPr>
+            <a:r>
+              <a:rPr lang="en-US" sz="1200" dirty="0">
+                <a:solidFill>
+                  <a:srgbClr val="1B1B1B"/>
+                </a:solidFill>
+              </a:rPr>
+              <a:t>BRASIL. Lei nº 12.608, de 10 de abril de 2012. Institui a Política Nacional de Proteção e Defesa Civil.</a:t>
+            </a:r>
+            <a:endParaRPr lang="en-US" sz="1200" dirty="0"/>
+          </a:p>
+          <a:p>
+            <a:pPr indent="0" marL="0">
+              <a:spcAft>
+                <a:spcPts val="700"/>
+              </a:spcAft>
+              <a:buNone/>
+            </a:pPr>
+            <a:r>
+              <a:rPr lang="en-US" sz="1200" dirty="0">
+                <a:solidFill>
+                  <a:srgbClr val="1B1B1B"/>
+                </a:solidFill>
+              </a:rPr>
+              <a:t>HALLEGATTE, S. A cost effective solution to reduce disaster losses in developing countries. Washington: World Bank, 2012. (Policy Research Working Paper, 6058).</a:t>
+            </a:r>
+            <a:endParaRPr lang="en-US" sz="1200" dirty="0"/>
+          </a:p>
+          <a:p>
+            <a:pPr indent="0" marL="0">
+              <a:spcAft>
+                <a:spcPts val="700"/>
+              </a:spcAft>
+              <a:buNone/>
+            </a:pPr>
+            <a:r>
+              <a:rPr lang="en-US" sz="1200" dirty="0">
+                <a:solidFill>
+                  <a:srgbClr val="1B1B1B"/>
+                </a:solidFill>
+              </a:rPr>
+              <a:t>HESS, J. J. et al. Building resilience to climate change: pilot evaluation of the impact of India's first heat action plan on all-cause mortality. Journal of Environmental and Public Health, 2018.</a:t>
+            </a:r>
+            <a:endParaRPr lang="en-US" sz="1200" dirty="0"/>
+          </a:p>
+          <a:p>
+            <a:pPr indent="0" marL="0">
+              <a:spcAft>
+                <a:spcPts val="700"/>
+              </a:spcAft>
+              <a:buNone/>
+            </a:pPr>
+            <a:r>
+              <a:rPr lang="en-US" sz="1200" dirty="0">
+                <a:solidFill>
+                  <a:srgbClr val="1B1B1B"/>
+                </a:solidFill>
+              </a:rPr>
+              <a:t>INMET; INPE; ANA; CEMADEN; SGB; SEDEC. Painel El Niño 2026-2027: boletins 1 a 3. Brasília, 2026.</a:t>
+            </a:r>
+            <a:endParaRPr lang="en-US" sz="1200" dirty="0"/>
+          </a:p>
+          <a:p>
+            <a:pPr indent="0" marL="0">
+              <a:spcAft>
+                <a:spcPts val="700"/>
+              </a:spcAft>
+              <a:buNone/>
+            </a:pPr>
+            <a:r>
+              <a:rPr lang="en-US" sz="1200" dirty="0">
+                <a:solidFill>
+                  <a:srgbClr val="1B1B1B"/>
+                </a:solidFill>
+              </a:rPr>
+              <a:t>IPCC. Climate Change 2021: The Physical Science Basis. Summary for Policymakers. Cambridge University Press, 2021.</a:t>
+            </a:r>
+            <a:endParaRPr lang="en-US" sz="1200" dirty="0"/>
+          </a:p>
+          <a:p>
+            <a:pPr indent="0" marL="0">
+              <a:spcAft>
+                <a:spcPts val="700"/>
+              </a:spcAft>
+              <a:buNone/>
+            </a:pPr>
+            <a:r>
+              <a:rPr lang="en-US" sz="1200" dirty="0">
+                <a:solidFill>
+                  <a:srgbClr val="1B1B1B"/>
+                </a:solidFill>
+              </a:rPr>
+              <a:t>LANCET COUNTDOWN. The 2025 report of the Lancet Countdown on health and climate change. The Lancet, 2025.</a:t>
+            </a:r>
+            <a:endParaRPr lang="en-US" sz="1200" dirty="0"/>
+          </a:p>
+          <a:p>
+            <a:pPr indent="0" marL="0">
+              <a:spcAft>
+                <a:spcPts val="700"/>
+              </a:spcAft>
+              <a:buNone/>
+            </a:pPr>
+            <a:r>
+              <a:rPr lang="en-US" sz="1200" dirty="0">
+                <a:solidFill>
+                  <a:srgbClr val="1B1B1B"/>
+                </a:solidFill>
+              </a:rPr>
+              <a:t>RIO DE JANEIRO (Município). Decreto nº 54.740, de 28 de junho de 2024. Protocolo de enfrentamento ao calor extremo.</a:t>
+            </a:r>
+            <a:endParaRPr lang="en-US" sz="1200" dirty="0"/>
+          </a:p>
+          <a:p>
+            <a:pPr indent="0" marL="0">
+              <a:spcAft>
+                <a:spcPts val="700"/>
+              </a:spcAft>
+              <a:buNone/>
+            </a:pPr>
+            <a:r>
+              <a:rPr lang="en-US" sz="1200" dirty="0">
+                <a:solidFill>
+                  <a:srgbClr val="1B1B1B"/>
+                </a:solidFill>
+              </a:rPr>
+              <a:t>NHESS. Heat-related mortality in Rio de Janeiro during the November 2023 heatwave. Natural Hazards and Earth System Sciences, v. 25, 2025.</a:t>
+            </a:r>
+            <a:endParaRPr lang="en-US" sz="1200" dirty="0"/>
+          </a:p>
+          <a:p>
+            <a:pPr indent="0" marL="0">
+              <a:spcAft>
+                <a:spcPts val="700"/>
+              </a:spcAft>
+              <a:buNone/>
+            </a:pPr>
+            <a:r>
+              <a:rPr lang="en-US" sz="1200" dirty="0">
+                <a:solidFill>
+                  <a:srgbClr val="1B1B1B"/>
+                </a:solidFill>
+              </a:rPr>
+              <a:t>UNDRR. Sendai Framework for Disaster Risk Reduction 2015-2030. Genebra, 2015.</a:t>
+            </a:r>
+            <a:endParaRPr lang="en-US" sz="1200" dirty="0"/>
+          </a:p>
+          <a:p>
+            <a:pPr indent="0" marL="0">
+              <a:spcAft>
+                <a:spcPts val="700"/>
+              </a:spcAft>
+              <a:buNone/>
+            </a:pPr>
+            <a:r>
+              <a:rPr lang="en-US" sz="1200" dirty="0">
+                <a:solidFill>
+                  <a:srgbClr val="1B1B1B"/>
+                </a:solidFill>
+              </a:rPr>
+              <a:t>UNITED NATIONS. Early Warnings for All Initiative. Nova York, 2025.</a:t>
+            </a:r>
+            <a:endParaRPr lang="en-US" sz="1200" dirty="0"/>
+          </a:p>
+        </p:txBody>
+      </p:sp>
+      <p:sp>
+        <p:nvSpPr>
+          <p:cNvPr id="25" name="Slide Number Placeholder 0"/>
+          <p:cNvSpPr>
+            <a:spLocks noGrp="1"/>
+          </p:cNvSpPr>
+          <p:nvPr>
+            <p:ph type="sldNum" sz="quarter" idx="4294967295"/>
+          </p:nvPr>
+        </p:nvSpPr>
+        <p:spPr>
+          <a:xfrm>
+            <a:off x="11109960" y="6355080"/>
+            <a:ext cx="594360" cy="320040"/>
+          </a:xfrm>
+          <a:prstGeom prst="rect">
+            <a:avLst/>
+          </a:prstGeom>
+          <a:extLst>
+            <a:ext uri="{C572A759-6A51-4108-AA02-DFA0A04FC94B}">
+              <ma14:wrappingTextBoxFlag xmlns:ma14="http://schemas.microsoft.com/office/mac/drawingml/2011/main" val="0"/>
+            </a:ext>
+          </a:extLst>
+        </p:spPr>
+        <p:txBody>
+          <a:bodyPr/>
+          <a:lstStyle>
+            <a:lvl1pPr>
+              <a:defRPr sz="1050">
+                <a:solidFill>
+                  <a:srgbClr val="5D6673"/>
+                </a:solidFill>
+              </a:defRPr>
+            </a:lvl1pPr>
+          </a:lstStyle>
+          <a:p>
+            <a:pPr algn="r"/>
+            <a:fld id="{F7021451-1387-4CA6-816F-3879F97B5CBC}" type="slidenum">
+              <a:rPr b="0" lang="en-US"/>
+              <a:t>16</a:t>
+            </a:fld>
+            <a:endParaRPr lang="en-US"/>
+          </a:p>
+        </p:txBody>
+      </p:sp>
+    </p:spTree>
+  </p:cSld>
+  <p:clrMapOvr>
+    <a:masterClrMapping/>
+  </p:clrMapOvr>
+</p:sld>
+</file>
+
+<file path=ppt/slides/slide17.xml><?xml version="1.0" encoding="utf-8"?>
+<p:sld xmlns:a="http://schemas.openxmlformats.org/drawingml/2006/main" xmlns:r="http://schemas.openxmlformats.org/officeDocument/2006/relationships" xmlns:p="http://schemas.openxmlformats.org/presentationml/2006/main">
+  <p:cSld name="Slide 17">
+    <p:spTree>
+      <p:nvGrpSpPr>
+        <p:cNvPr id="1" name=""/>
+        <p:cNvGrpSpPr/>
+        <p:nvPr/>
+      </p:nvGrpSpPr>
+      <p:grpSpPr>
+        <a:xfrm>
+          <a:off x="0" y="0"/>
+          <a:ext cx="0" cy="0"/>
+          <a:chOff x="0" y="0"/>
+          <a:chExt cx="0" cy="0"/>
+        </a:xfrm>
+      </p:grpSpPr>
+      <p:sp>
+        <p:nvSpPr>
           <p:cNvPr id="2" name="Text 0"/>
           <p:cNvSpPr txBox="1"/>
           <p:nvPr/>
@@ -7833,7 +8430,7 @@
             <a:pPr algn="r"/>
             <a:fld id="{F7021451-1387-4CA6-816F-3879F97B5CBC}" type="slidenum">
               <a:rPr b="0" lang="en-US"/>
-              <a:t>16</a:t>
+              <a:t>17</a:t>
             </a:fld>
             <a:endParaRPr lang="en-US"/>
           </a:p>
@@ -7887,7 +8484,7 @@
           <a:bodyPr wrap="square" lIns="0" tIns="0" rIns="0" bIns="0" rtlCol="0" anchor="t"/>
           <a:lstStyle/>
           <a:p>
-            <a:pPr indent="0" marL="0">
+            <a:pPr algn="l" indent="0" marL="0">
               <a:buNone/>
             </a:pPr>
             <a:r>
@@ -8092,30 +8689,30 @@
         <p:spPr>
           <a:xfrm>
             <a:off x="4297680" y="2788920"/>
-            <a:ext cx="2011680" cy="320040"/>
-          </a:xfrm>
-          <a:prstGeom prst="rect">
-            <a:avLst/>
-          </a:prstGeom>
-          <a:noFill/>
-          <a:ln/>
-        </p:spPr>
-        <p:txBody>
-          <a:bodyPr wrap="square" lIns="0" tIns="0" rIns="0" bIns="0" rtlCol="0" anchor="t"/>
-          <a:lstStyle/>
-          <a:p>
-            <a:pPr indent="0" marL="0">
-              <a:buNone/>
-            </a:pPr>
-            <a:r>
-              <a:rPr lang="en-US" sz="1500" b="1" dirty="0">
+            <a:ext cx="2103120" cy="320040"/>
+          </a:xfrm>
+          <a:prstGeom prst="rect">
+            <a:avLst/>
+          </a:prstGeom>
+          <a:noFill/>
+          <a:ln/>
+        </p:spPr>
+        <p:txBody>
+          <a:bodyPr wrap="square" lIns="0" tIns="0" rIns="0" bIns="0" rtlCol="0" anchor="t"/>
+          <a:lstStyle/>
+          <a:p>
+            <a:pPr indent="0" marL="0">
+              <a:buNone/>
+            </a:pPr>
+            <a:r>
+              <a:rPr lang="en-US" sz="1350" b="1" dirty="0">
                 <a:solidFill>
                   <a:srgbClr val="071D41"/>
                 </a:solidFill>
               </a:rPr>
               <a:t>Sul</a:t>
             </a:r>
-            <a:endParaRPr lang="en-US" sz="1500" dirty="0"/>
+            <a:endParaRPr lang="en-US" sz="1350" dirty="0"/>
           </a:p>
         </p:txBody>
       </p:sp>
@@ -8315,30 +8912,30 @@
         <p:spPr>
           <a:xfrm>
             <a:off x="6858000" y="2788920"/>
-            <a:ext cx="2011680" cy="320040"/>
-          </a:xfrm>
-          <a:prstGeom prst="rect">
-            <a:avLst/>
-          </a:prstGeom>
-          <a:noFill/>
-          <a:ln/>
-        </p:spPr>
-        <p:txBody>
-          <a:bodyPr wrap="square" lIns="0" tIns="0" rIns="0" bIns="0" rtlCol="0" anchor="t"/>
-          <a:lstStyle/>
-          <a:p>
-            <a:pPr indent="0" marL="0">
-              <a:buNone/>
-            </a:pPr>
-            <a:r>
-              <a:rPr lang="en-US" sz="1500" b="1" dirty="0">
+            <a:ext cx="2103120" cy="320040"/>
+          </a:xfrm>
+          <a:prstGeom prst="rect">
+            <a:avLst/>
+          </a:prstGeom>
+          <a:noFill/>
+          <a:ln/>
+        </p:spPr>
+        <p:txBody>
+          <a:bodyPr wrap="square" lIns="0" tIns="0" rIns="0" bIns="0" rtlCol="0" anchor="t"/>
+          <a:lstStyle/>
+          <a:p>
+            <a:pPr indent="0" marL="0">
+              <a:buNone/>
+            </a:pPr>
+            <a:r>
+              <a:rPr lang="en-US" sz="1350" b="1" dirty="0">
                 <a:solidFill>
                   <a:srgbClr val="071D41"/>
                 </a:solidFill>
               </a:rPr>
               <a:t>Norte e Nordeste</a:t>
             </a:r>
-            <a:endParaRPr lang="en-US" sz="1500" dirty="0"/>
+            <a:endParaRPr lang="en-US" sz="1350" dirty="0"/>
           </a:p>
         </p:txBody>
       </p:sp>
@@ -8538,30 +9135,30 @@
         <p:spPr>
           <a:xfrm>
             <a:off x="9418320" y="2788920"/>
-            <a:ext cx="2011680" cy="320040"/>
-          </a:xfrm>
-          <a:prstGeom prst="rect">
-            <a:avLst/>
-          </a:prstGeom>
-          <a:noFill/>
-          <a:ln/>
-        </p:spPr>
-        <p:txBody>
-          <a:bodyPr wrap="square" lIns="0" tIns="0" rIns="0" bIns="0" rtlCol="0" anchor="t"/>
-          <a:lstStyle/>
-          <a:p>
-            <a:pPr indent="0" marL="0">
-              <a:buNone/>
-            </a:pPr>
-            <a:r>
-              <a:rPr lang="en-US" sz="1500" b="1" dirty="0">
+            <a:ext cx="2103120" cy="320040"/>
+          </a:xfrm>
+          <a:prstGeom prst="rect">
+            <a:avLst/>
+          </a:prstGeom>
+          <a:noFill/>
+          <a:ln/>
+        </p:spPr>
+        <p:txBody>
+          <a:bodyPr wrap="square" lIns="0" tIns="0" rIns="0" bIns="0" rtlCol="0" anchor="t"/>
+          <a:lstStyle/>
+          <a:p>
+            <a:pPr indent="0" marL="0">
+              <a:buNone/>
+            </a:pPr>
+            <a:r>
+              <a:rPr lang="en-US" sz="1350" b="1" dirty="0">
                 <a:solidFill>
                   <a:srgbClr val="071D41"/>
                 </a:solidFill>
               </a:rPr>
               <a:t>Sudeste e Centro-Oeste</a:t>
             </a:r>
-            <a:endParaRPr lang="en-US" sz="1500" dirty="0"/>
+            <a:endParaRPr lang="en-US" sz="1350" dirty="0"/>
           </a:p>
         </p:txBody>
       </p:sp>
@@ -8805,7 +9402,7 @@
           <a:bodyPr wrap="square" lIns="0" tIns="0" rIns="0" bIns="0" rtlCol="0" anchor="t"/>
           <a:lstStyle/>
           <a:p>
-            <a:pPr indent="0" marL="0">
+            <a:pPr algn="l" indent="0" marL="0">
               <a:buNone/>
             </a:pPr>
             <a:r>
@@ -9504,7 +10101,7 @@
           <a:bodyPr wrap="square" lIns="0" tIns="0" rIns="0" bIns="0" rtlCol="0" anchor="t"/>
           <a:lstStyle/>
           <a:p>
-            <a:pPr indent="0" marL="0">
+            <a:pPr algn="l" indent="0" marL="0">
               <a:buNone/>
             </a:pPr>
             <a:r>
@@ -10547,7 +11144,7 @@
           <a:bodyPr wrap="square" lIns="0" tIns="0" rIns="0" bIns="0" rtlCol="0" anchor="t"/>
           <a:lstStyle/>
           <a:p>
-            <a:pPr indent="0" marL="0">
+            <a:pPr algn="l" indent="0" marL="0">
               <a:buNone/>
             </a:pPr>
             <a:r>
@@ -11590,7 +12187,7 @@
           <a:bodyPr wrap="square" lIns="0" tIns="0" rIns="0" bIns="0" rtlCol="0" anchor="t"/>
           <a:lstStyle/>
           <a:p>
-            <a:pPr indent="0" marL="0">
+            <a:pPr algn="l" indent="0" marL="0">
               <a:buNone/>
             </a:pPr>
             <a:r>
@@ -11602,7 +12199,7 @@
                 <a:ea typeface="Montserrat" pitchFamily="34" charset="-122"/>
                 <a:cs typeface="Montserrat" pitchFamily="34" charset="-120"/>
               </a:rPr>
-              <a:t>Em junho, 30 milhões de pessoas acordaram com um alerta falso.</a:t>
+              <a:t>Em junho, 30 milhões acordaram com um alerta falso.</a:t>
             </a:r>
             <a:endParaRPr lang="en-US" sz="3000" dirty="0"/>
           </a:p>
@@ -12091,7 +12688,7 @@
           <a:bodyPr wrap="square" lIns="0" tIns="0" rIns="0" bIns="0" rtlCol="0" anchor="t"/>
           <a:lstStyle/>
           <a:p>
-            <a:pPr indent="0" marL="0">
+            <a:pPr algn="l" indent="0" marL="0">
               <a:buNone/>
             </a:pPr>
             <a:r>
@@ -12741,7 +13338,7 @@
                   <a:srgbClr val="5D6673"/>
                 </a:solidFill>
               </a:rPr>
-              <a:t>Só com sinal e internet</a:t>
+              <a:t>Só funciona com sinal e internet</a:t>
             </a:r>
             <a:endParaRPr lang="en-US" sz="1500" dirty="0"/>
           </a:p>
@@ -12801,7 +13398,7 @@
                   <a:srgbClr val="071D41"/>
                 </a:solidFill>
               </a:rPr>
-              <a:t>SMS com código, conteúdo offline e celular a celular</a:t>
+              <a:t>Guias e mapa salvos no celular para usar offline</a:t>
             </a:r>
             <a:endParaRPr lang="en-US" sz="1500" dirty="0"/>
           </a:p>
@@ -13019,7 +13616,7 @@
           <a:bodyPr wrap="square" lIns="0" tIns="0" rIns="0" bIns="0" rtlCol="0" anchor="t"/>
           <a:lstStyle/>
           <a:p>
-            <a:pPr indent="0" marL="0">
+            <a:pPr algn="l" indent="0" marL="0">
               <a:buNone/>
             </a:pPr>
             <a:r>
@@ -13847,7 +14444,7 @@
           <a:bodyPr wrap="square" lIns="0" tIns="0" rIns="0" bIns="0" rtlCol="0" anchor="t"/>
           <a:lstStyle/>
           <a:p>
-            <a:pPr indent="0" marL="0">
+            <a:pPr algn="l" indent="0" marL="0">
               <a:buNone/>
             </a:pPr>
             <a:r>
@@ -14743,7 +15340,7 @@
                   <a:srgbClr val="071D41"/>
                 </a:solidFill>
               </a:rPr>
-              <a:t>SMS com código</a:t>
+              <a:t>SMS</a:t>
             </a:r>
             <a:endParaRPr lang="en-US" sz="1300" dirty="0"/>
           </a:p>
@@ -14757,7 +15354,7 @@
                   <a:srgbClr val="5D6673"/>
                 </a:solidFill>
               </a:rPr>
-              <a:t>abre o guia sem internet</a:t>
+              <a:t>aviso e resposta simples</a:t>
             </a:r>
             <a:endParaRPr lang="en-US" sz="1300" dirty="0"/>
           </a:p>

--- a/brasil-seguro.pptx
+++ b/brasil-seguro.pptx
@@ -2115,7 +2115,7 @@
                   <a:srgbClr val="5D6673"/>
                 </a:solidFill>
               </a:rPr>
-              <a:t>Proposta de serviço público · Governo Federal · simulação acadêmica</a:t>
+              <a:t>Proposta de serviço público</a:t>
             </a:r>
             <a:endParaRPr lang="en-US" sz="1050" dirty="0"/>
           </a:p>
@@ -2747,7 +2747,7 @@
                   <a:srgbClr val="9FB3D1"/>
                 </a:solidFill>
               </a:rPr>
-              <a:t>PROPOSTA DE SERVIÇO PÚBLICO DIGITAL · GOVERNO FEDERAL</a:t>
+              <a:t>PROPOSTA DE SERVIÇO PÚBLICO DIGITAL</a:t>
             </a:r>
             <a:endParaRPr lang="en-US" sz="1300" dirty="0"/>
           </a:p>
@@ -8262,7 +8262,7 @@
                   <a:srgbClr val="9FB3D1"/>
                 </a:solidFill>
               </a:rPr>
-              <a:t>UNIRIO · Proposta de serviço público para o Governo Federal (simulação acadêmica)</a:t>
+              <a:t>UNIRIO · Proposta de serviço público</a:t>
             </a:r>
             <a:endParaRPr lang="en-US" sz="1500" dirty="0"/>
           </a:p>

--- a/brasil-seguro.pptx
+++ b/brasil-seguro.pptx
@@ -3008,70 +3008,7 @@
       </p:sp>
       <p:sp>
         <p:nvSpPr>
-          <p:cNvPr id="6" name="Shape 3"/>
-          <p:cNvSpPr/>
-          <p:nvPr/>
-        </p:nvSpPr>
-        <p:spPr>
-          <a:xfrm>
-            <a:off x="731520" y="1417320"/>
-            <a:ext cx="2148840" cy="347472"/>
-          </a:xfrm>
-          <a:prstGeom prst="roundRect">
-            <a:avLst>
-              <a:gd name="adj" fmla="val 50000"/>
-            </a:avLst>
-          </a:prstGeom>
-          <a:solidFill>
-            <a:srgbClr val="168821"/>
-          </a:solidFill>
-          <a:ln w="12700">
-            <a:solidFill>
-              <a:srgbClr val="168821"/>
-            </a:solidFill>
-            <a:prstDash val="solid"/>
-          </a:ln>
-        </p:spPr>
-      </p:sp>
-      <p:sp>
-        <p:nvSpPr>
-          <p:cNvPr id="7" name="Text 4"/>
-          <p:cNvSpPr txBox="1"/>
-          <p:nvPr/>
-        </p:nvSpPr>
-        <p:spPr>
-          <a:xfrm>
-            <a:off x="731520" y="1417320"/>
-            <a:ext cx="2148840" cy="347472"/>
-          </a:xfrm>
-          <a:prstGeom prst="rect">
-            <a:avLst/>
-          </a:prstGeom>
-          <a:noFill/>
-          <a:ln/>
-        </p:spPr>
-        <p:txBody>
-          <a:bodyPr wrap="square" lIns="0" tIns="0" rIns="0" bIns="0" rtlCol="0" anchor="ctr"/>
-          <a:lstStyle/>
-          <a:p>
-            <a:pPr algn="ctr" indent="0" marL="0">
-              <a:buNone/>
-            </a:pPr>
-            <a:r>
-              <a:rPr lang="en-US" sz="1100" b="1" spc="200" kern="0" dirty="0">
-                <a:solidFill>
-                  <a:srgbClr val="FFFFFF"/>
-                </a:solidFill>
-              </a:rPr>
-              <a:t>INOVAÇÃO SOCIAL</a:t>
-            </a:r>
-            <a:endParaRPr lang="en-US" sz="1100" dirty="0"/>
-          </a:p>
-        </p:txBody>
-      </p:sp>
-      <p:sp>
-        <p:nvSpPr>
-          <p:cNvPr id="8" name="Text 5"/>
+          <p:cNvPr id="6" name="Text 3"/>
           <p:cNvSpPr txBox="1"/>
           <p:nvPr/>
         </p:nvSpPr>
@@ -3107,7 +3044,7 @@
       </p:sp>
       <p:sp>
         <p:nvSpPr>
-          <p:cNvPr id="9" name="Text 6"/>
+          <p:cNvPr id="7" name="Text 4"/>
           <p:cNvSpPr txBox="1"/>
           <p:nvPr/>
         </p:nvSpPr>
@@ -3157,7 +3094,7 @@
       </p:sp>
       <p:sp>
         <p:nvSpPr>
-          <p:cNvPr id="10" name="Shape 7"/>
+          <p:cNvPr id="8" name="Shape 5"/>
           <p:cNvSpPr/>
           <p:nvPr/>
         </p:nvSpPr>
@@ -3184,7 +3121,7 @@
       </p:sp>
       <p:pic>
         <p:nvPicPr>
-          <p:cNvPr id="11" name="Image 1" descr="qr-urca.png">    </p:cNvPr>
+          <p:cNvPr id="9" name="Image 1" descr="qr-urca.png">    </p:cNvPr>
           <p:cNvPicPr>
             <a:picLocks noChangeAspect="1"/>
           </p:cNvPicPr>
@@ -3208,7 +3145,7 @@
       </p:pic>
       <p:sp>
         <p:nvSpPr>
-          <p:cNvPr id="12" name="Text 8"/>
+          <p:cNvPr id="10" name="Text 6"/>
           <p:cNvSpPr txBox="1"/>
           <p:nvPr/>
         </p:nvSpPr>
@@ -3244,7 +3181,7 @@
       </p:sp>
       <p:sp>
         <p:nvSpPr>
-          <p:cNvPr id="13" name="Text 9"/>
+          <p:cNvPr id="11" name="Text 7"/>
           <p:cNvSpPr txBox="1"/>
           <p:nvPr/>
         </p:nvSpPr>

--- a/brasil-seguro.pptx
+++ b/brasil-seguro.pptx
@@ -608,7 +608,7 @@
           <a:p>
             <a:r>
               <a:rPr lang="en-US" dirty="0"/>
-              <a:t>Funcionamento (40 s). Reaproveita o alerta oficial que já existe. Funciona até sem internet: o SMS traz um código que abre o guia salvo no celular.</a:t>
+              <a:t>Funcionamento (40 s). Reaproveita o alerta oficial que já existe. É um app só, no celular e no computador. Com internet, tudo em tempo real; sem internet, o alerta chega como hoje e o app mostra o que está salvo; sem sinal, o pedido de ajuda espera o sinal voltar.</a:t>
             </a:r>
             <a:endParaRPr lang="en-US" dirty="0"/>
           </a:p>
@@ -3998,8 +3998,8 @@
         </p:nvSpPr>
         <p:spPr>
           <a:xfrm>
-            <a:off x="502920" y="4526280"/>
-            <a:ext cx="10972800" cy="274320"/>
+            <a:off x="502920" y="4480560"/>
+            <a:ext cx="11155680" cy="274320"/>
           </a:xfrm>
           <a:prstGeom prst="rect">
             <a:avLst/>
@@ -4020,7 +4020,7 @@
                   <a:srgbClr val="5D6673"/>
                 </a:solidFill>
               </a:rPr>
-              <a:t>CHEGA POR ONDE A PESSOA ESTIVER</a:t>
+              <a:t>UM APP SÓ (CELULAR E COMPUTADOR) · FUNCIONA EM 3 SITUAÇÕES</a:t>
             </a:r>
             <a:endParaRPr lang="en-US" sz="1100" dirty="0"/>
           </a:p>
@@ -4034,26 +4034,53 @@
         </p:nvSpPr>
         <p:spPr>
           <a:xfrm>
-            <a:off x="502920" y="4892040"/>
-            <a:ext cx="548640" cy="548640"/>
-          </a:xfrm>
-          <a:prstGeom prst="ellipse">
-            <a:avLst/>
+            <a:off x="502920" y="4846320"/>
+            <a:ext cx="3611880" cy="1005840"/>
+          </a:xfrm>
+          <a:prstGeom prst="roundRect">
+            <a:avLst>
+              <a:gd name="adj" fmla="val 10909"/>
+            </a:avLst>
           </a:prstGeom>
           <a:solidFill>
-            <a:srgbClr val="DBE8FB"/>
+            <a:srgbClr val="F2F5FA"/>
           </a:solidFill>
           <a:ln w="12700">
             <a:solidFill>
-              <a:srgbClr val="DBE8FB"/>
+              <a:srgbClr val="F2F5FA"/>
             </a:solidFill>
             <a:prstDash val="solid"/>
           </a:ln>
         </p:spPr>
       </p:sp>
+      <p:sp>
+        <p:nvSpPr>
+          <p:cNvPr id="28" name="Shape 19"/>
+          <p:cNvSpPr/>
+          <p:nvPr/>
+        </p:nvSpPr>
+        <p:spPr>
+          <a:xfrm>
+            <a:off x="685800" y="5010912"/>
+            <a:ext cx="640080" cy="640080"/>
+          </a:xfrm>
+          <a:prstGeom prst="ellipse">
+            <a:avLst/>
+          </a:prstGeom>
+          <a:solidFill>
+            <a:srgbClr val="FFFFFF"/>
+          </a:solidFill>
+          <a:ln w="12700">
+            <a:solidFill>
+              <a:srgbClr val="FFFFFF"/>
+            </a:solidFill>
+            <a:prstDash val="solid"/>
+          </a:ln>
+        </p:spPr>
+      </p:sp>
       <p:pic>
         <p:nvPicPr>
-          <p:cNvPr id="28" name="Image 7" descr="preencoded.png">    </p:cNvPr>
+          <p:cNvPr id="29" name="Image 7" descr="preencoded.png">    </p:cNvPr>
           <p:cNvPicPr>
             <a:picLocks noChangeAspect="1"/>
           </p:cNvPicPr>
@@ -4067,8 +4094,8 @@
         </p:blipFill>
         <p:spPr>
           <a:xfrm>
-            <a:off x="640080" y="5029200"/>
-            <a:ext cx="274320" cy="274320"/>
+            <a:off x="845820" y="5170932"/>
+            <a:ext cx="320040" cy="320040"/>
           </a:xfrm>
           <a:prstGeom prst="rect">
             <a:avLst/>
@@ -4077,14 +4104,14 @@
       </p:pic>
       <p:sp>
         <p:nvSpPr>
-          <p:cNvPr id="29" name="Text 19"/>
-          <p:cNvSpPr txBox="1"/>
-          <p:nvPr/>
-        </p:nvSpPr>
-        <p:spPr>
-          <a:xfrm>
-            <a:off x="1143000" y="4892040"/>
-            <a:ext cx="1600200" cy="685800"/>
+          <p:cNvPr id="30" name="Text 20"/>
+          <p:cNvSpPr txBox="1"/>
+          <p:nvPr/>
+        </p:nvSpPr>
+        <p:spPr>
+          <a:xfrm>
+            <a:off x="1463040" y="4937760"/>
+            <a:ext cx="2560320" cy="868680"/>
           </a:xfrm>
           <a:prstGeom prst="rect">
             <a:avLst/>
@@ -4100,14 +4127,14 @@
               <a:buNone/>
             </a:pPr>
             <a:r>
-              <a:rPr lang="en-US" sz="1300" b="1" dirty="0">
+              <a:rPr lang="en-US" sz="1400" b="1" dirty="0">
                 <a:solidFill>
                   <a:srgbClr val="071D41"/>
                 </a:solidFill>
               </a:rPr>
-              <a:t>App e site</a:t>
-            </a:r>
-            <a:endParaRPr lang="en-US" sz="1300" dirty="0"/>
+              <a:t>Com internet</a:t>
+            </a:r>
+            <a:endParaRPr lang="en-US" sz="1400" dirty="0"/>
           </a:p>
           <a:p>
             <a:pPr indent="0" marL="0">
@@ -4116,43 +4143,70 @@
             <a:r>
               <a:rPr lang="en-US" sz="1150" dirty="0">
                 <a:solidFill>
-                  <a:srgbClr val="5D6673"/>
-                </a:solidFill>
-              </a:rPr>
-              <a:t>celular e computador</a:t>
-            </a:r>
-            <a:endParaRPr lang="en-US" sz="1300" dirty="0"/>
-          </a:p>
-        </p:txBody>
-      </p:sp>
-      <p:sp>
-        <p:nvSpPr>
-          <p:cNvPr id="30" name="Shape 20"/>
+                  <a:srgbClr val="1B1B1B"/>
+                </a:solidFill>
+              </a:rPr>
+              <a:t>Tudo em tempo real: status, locais com lotação e pedidos de ajuda.</a:t>
+            </a:r>
+            <a:endParaRPr lang="en-US" sz="1400" dirty="0"/>
+          </a:p>
+        </p:txBody>
+      </p:sp>
+      <p:sp>
+        <p:nvSpPr>
+          <p:cNvPr id="31" name="Shape 21"/>
           <p:cNvSpPr/>
           <p:nvPr/>
         </p:nvSpPr>
         <p:spPr>
           <a:xfrm>
-            <a:off x="2770632" y="4892040"/>
-            <a:ext cx="548640" cy="548640"/>
-          </a:xfrm>
-          <a:prstGeom prst="ellipse">
-            <a:avLst/>
+            <a:off x="4297680" y="4846320"/>
+            <a:ext cx="3611880" cy="1005840"/>
+          </a:xfrm>
+          <a:prstGeom prst="roundRect">
+            <a:avLst>
+              <a:gd name="adj" fmla="val 10909"/>
+            </a:avLst>
           </a:prstGeom>
           <a:solidFill>
-            <a:srgbClr val="DBE8FB"/>
+            <a:srgbClr val="F2F5FA"/>
           </a:solidFill>
           <a:ln w="12700">
             <a:solidFill>
-              <a:srgbClr val="DBE8FB"/>
+              <a:srgbClr val="F2F5FA"/>
             </a:solidFill>
             <a:prstDash val="solid"/>
           </a:ln>
         </p:spPr>
       </p:sp>
+      <p:sp>
+        <p:nvSpPr>
+          <p:cNvPr id="32" name="Shape 22"/>
+          <p:cNvSpPr/>
+          <p:nvPr/>
+        </p:nvSpPr>
+        <p:spPr>
+          <a:xfrm>
+            <a:off x="4480560" y="5010912"/>
+            <a:ext cx="640080" cy="640080"/>
+          </a:xfrm>
+          <a:prstGeom prst="ellipse">
+            <a:avLst/>
+          </a:prstGeom>
+          <a:solidFill>
+            <a:srgbClr val="FFFFFF"/>
+          </a:solidFill>
+          <a:ln w="12700">
+            <a:solidFill>
+              <a:srgbClr val="FFFFFF"/>
+            </a:solidFill>
+            <a:prstDash val="solid"/>
+          </a:ln>
+        </p:spPr>
+      </p:sp>
       <p:pic>
         <p:nvPicPr>
-          <p:cNvPr id="31" name="Image 8" descr="preencoded.png">    </p:cNvPr>
+          <p:cNvPr id="33" name="Image 8" descr="preencoded.png">    </p:cNvPr>
           <p:cNvPicPr>
             <a:picLocks noChangeAspect="1"/>
           </p:cNvPicPr>
@@ -4166,8 +4220,8 @@
         </p:blipFill>
         <p:spPr>
           <a:xfrm>
-            <a:off x="2907792" y="5029200"/>
-            <a:ext cx="274320" cy="274320"/>
+            <a:off x="4640580" y="5170932"/>
+            <a:ext cx="320040" cy="320040"/>
           </a:xfrm>
           <a:prstGeom prst="rect">
             <a:avLst/>
@@ -4176,14 +4230,14 @@
       </p:pic>
       <p:sp>
         <p:nvSpPr>
-          <p:cNvPr id="32" name="Text 21"/>
-          <p:cNvSpPr txBox="1"/>
-          <p:nvPr/>
-        </p:nvSpPr>
-        <p:spPr>
-          <a:xfrm>
-            <a:off x="3410712" y="4892040"/>
-            <a:ext cx="1600200" cy="685800"/>
+          <p:cNvPr id="34" name="Text 23"/>
+          <p:cNvSpPr txBox="1"/>
+          <p:nvPr/>
+        </p:nvSpPr>
+        <p:spPr>
+          <a:xfrm>
+            <a:off x="5257800" y="4937760"/>
+            <a:ext cx="2560320" cy="868680"/>
           </a:xfrm>
           <a:prstGeom prst="rect">
             <a:avLst/>
@@ -4199,14 +4253,14 @@
               <a:buNone/>
             </a:pPr>
             <a:r>
-              <a:rPr lang="en-US" sz="1300" b="1" dirty="0">
+              <a:rPr lang="en-US" sz="1400" b="1" dirty="0">
                 <a:solidFill>
                   <a:srgbClr val="071D41"/>
                 </a:solidFill>
               </a:rPr>
-              <a:t>SMS</a:t>
-            </a:r>
-            <a:endParaRPr lang="en-US" sz="1300" dirty="0"/>
+              <a:t>Sem internet, com sinal</a:t>
+            </a:r>
+            <a:endParaRPr lang="en-US" sz="1400" dirty="0"/>
           </a:p>
           <a:p>
             <a:pPr indent="0" marL="0">
@@ -4215,43 +4269,70 @@
             <a:r>
               <a:rPr lang="en-US" sz="1150" dirty="0">
                 <a:solidFill>
-                  <a:srgbClr val="5D6673"/>
-                </a:solidFill>
-              </a:rPr>
-              <a:t>aviso e resposta simples</a:t>
-            </a:r>
-            <a:endParaRPr lang="en-US" sz="1300" dirty="0"/>
-          </a:p>
-        </p:txBody>
-      </p:sp>
-      <p:sp>
-        <p:nvSpPr>
-          <p:cNvPr id="33" name="Shape 22"/>
+                  <a:srgbClr val="1B1B1B"/>
+                </a:solidFill>
+              </a:rPr>
+              <a:t>O alerta da Defesa Civil chega como hoje; o app mostra os passos e locais salvos.</a:t>
+            </a:r>
+            <a:endParaRPr lang="en-US" sz="1400" dirty="0"/>
+          </a:p>
+        </p:txBody>
+      </p:sp>
+      <p:sp>
+        <p:nvSpPr>
+          <p:cNvPr id="35" name="Shape 24"/>
           <p:cNvSpPr/>
           <p:nvPr/>
         </p:nvSpPr>
         <p:spPr>
           <a:xfrm>
-            <a:off x="5038344" y="4892040"/>
-            <a:ext cx="548640" cy="548640"/>
-          </a:xfrm>
-          <a:prstGeom prst="ellipse">
-            <a:avLst/>
+            <a:off x="8092440" y="4846320"/>
+            <a:ext cx="3611880" cy="1005840"/>
+          </a:xfrm>
+          <a:prstGeom prst="roundRect">
+            <a:avLst>
+              <a:gd name="adj" fmla="val 10909"/>
+            </a:avLst>
           </a:prstGeom>
           <a:solidFill>
-            <a:srgbClr val="DBE8FB"/>
+            <a:srgbClr val="F2F5FA"/>
           </a:solidFill>
           <a:ln w="12700">
             <a:solidFill>
-              <a:srgbClr val="DBE8FB"/>
+              <a:srgbClr val="F2F5FA"/>
             </a:solidFill>
             <a:prstDash val="solid"/>
           </a:ln>
         </p:spPr>
       </p:sp>
+      <p:sp>
+        <p:nvSpPr>
+          <p:cNvPr id="36" name="Shape 25"/>
+          <p:cNvSpPr/>
+          <p:nvPr/>
+        </p:nvSpPr>
+        <p:spPr>
+          <a:xfrm>
+            <a:off x="8275320" y="5010912"/>
+            <a:ext cx="640080" cy="640080"/>
+          </a:xfrm>
+          <a:prstGeom prst="ellipse">
+            <a:avLst/>
+          </a:prstGeom>
+          <a:solidFill>
+            <a:srgbClr val="FFFFFF"/>
+          </a:solidFill>
+          <a:ln w="12700">
+            <a:solidFill>
+              <a:srgbClr val="FFFFFF"/>
+            </a:solidFill>
+            <a:prstDash val="solid"/>
+          </a:ln>
+        </p:spPr>
+      </p:sp>
       <p:pic>
         <p:nvPicPr>
-          <p:cNvPr id="34" name="Image 9" descr="preencoded.png">    </p:cNvPr>
+          <p:cNvPr id="37" name="Image 9" descr="preencoded.png">    </p:cNvPr>
           <p:cNvPicPr>
             <a:picLocks noChangeAspect="1"/>
           </p:cNvPicPr>
@@ -4265,8 +4346,8 @@
         </p:blipFill>
         <p:spPr>
           <a:xfrm>
-            <a:off x="5175504" y="5029200"/>
-            <a:ext cx="274320" cy="274320"/>
+            <a:off x="8435340" y="5170932"/>
+            <a:ext cx="320040" cy="320040"/>
           </a:xfrm>
           <a:prstGeom prst="rect">
             <a:avLst/>
@@ -4275,14 +4356,14 @@
       </p:pic>
       <p:sp>
         <p:nvSpPr>
-          <p:cNvPr id="35" name="Text 23"/>
-          <p:cNvSpPr txBox="1"/>
-          <p:nvPr/>
-        </p:nvSpPr>
-        <p:spPr>
-          <a:xfrm>
-            <a:off x="5678424" y="4892040"/>
-            <a:ext cx="1600200" cy="685800"/>
+          <p:cNvPr id="38" name="Text 26"/>
+          <p:cNvSpPr txBox="1"/>
+          <p:nvPr/>
+        </p:nvSpPr>
+        <p:spPr>
+          <a:xfrm>
+            <a:off x="9052560" y="4937760"/>
+            <a:ext cx="2560320" cy="868680"/>
           </a:xfrm>
           <a:prstGeom prst="rect">
             <a:avLst/>
@@ -4298,14 +4379,14 @@
               <a:buNone/>
             </a:pPr>
             <a:r>
-              <a:rPr lang="en-US" sz="1300" b="1" dirty="0">
+              <a:rPr lang="en-US" sz="1400" b="1" dirty="0">
                 <a:solidFill>
                   <a:srgbClr val="071D41"/>
                 </a:solidFill>
               </a:rPr>
-              <a:t>Offline</a:t>
-            </a:r>
-            <a:endParaRPr lang="en-US" sz="1300" dirty="0"/>
+              <a:t>Sem sinal nenhum</a:t>
+            </a:r>
+            <a:endParaRPr lang="en-US" sz="1400" dirty="0"/>
           </a:p>
           <a:p>
             <a:pPr indent="0" marL="0">
@@ -4314,210 +4395,12 @@
             <a:r>
               <a:rPr lang="en-US" sz="1150" dirty="0">
                 <a:solidFill>
-                  <a:srgbClr val="5D6673"/>
-                </a:solidFill>
-              </a:rPr>
-              <a:t>guias e mapa já salvos</a:t>
-            </a:r>
-            <a:endParaRPr lang="en-US" sz="1300" dirty="0"/>
-          </a:p>
-        </p:txBody>
-      </p:sp>
-      <p:sp>
-        <p:nvSpPr>
-          <p:cNvPr id="36" name="Shape 24"/>
-          <p:cNvSpPr/>
-          <p:nvPr/>
-        </p:nvSpPr>
-        <p:spPr>
-          <a:xfrm>
-            <a:off x="7306056" y="4892040"/>
-            <a:ext cx="548640" cy="548640"/>
-          </a:xfrm>
-          <a:prstGeom prst="ellipse">
-            <a:avLst/>
-          </a:prstGeom>
-          <a:solidFill>
-            <a:srgbClr val="DBE8FB"/>
-          </a:solidFill>
-          <a:ln w="12700">
-            <a:solidFill>
-              <a:srgbClr val="DBE8FB"/>
-            </a:solidFill>
-            <a:prstDash val="solid"/>
-          </a:ln>
-        </p:spPr>
-      </p:sp>
-      <p:pic>
-        <p:nvPicPr>
-          <p:cNvPr id="37" name="Image 10" descr="preencoded.png">    </p:cNvPr>
-          <p:cNvPicPr>
-            <a:picLocks noChangeAspect="1"/>
-          </p:cNvPicPr>
-          <p:nvPr/>
-        </p:nvPicPr>
-        <p:blipFill>
-          <a:blip r:embed="rId11"/>
-          <a:stretch>
-            <a:fillRect/>
-          </a:stretch>
-        </p:blipFill>
-        <p:spPr>
-          <a:xfrm>
-            <a:off x="7443216" y="5029200"/>
-            <a:ext cx="274320" cy="274320"/>
-          </a:xfrm>
-          <a:prstGeom prst="rect">
-            <a:avLst/>
-          </a:prstGeom>
-        </p:spPr>
-      </p:pic>
-      <p:sp>
-        <p:nvSpPr>
-          <p:cNvPr id="38" name="Text 25"/>
-          <p:cNvSpPr txBox="1"/>
-          <p:nvPr/>
-        </p:nvSpPr>
-        <p:spPr>
-          <a:xfrm>
-            <a:off x="7946136" y="4892040"/>
-            <a:ext cx="1600200" cy="685800"/>
-          </a:xfrm>
-          <a:prstGeom prst="rect">
-            <a:avLst/>
-          </a:prstGeom>
-          <a:noFill/>
-          <a:ln/>
-        </p:spPr>
-        <p:txBody>
-          <a:bodyPr wrap="square" lIns="0" tIns="0" rIns="0" bIns="0" rtlCol="0" anchor="t"/>
-          <a:lstStyle/>
-          <a:p>
-            <a:pPr indent="0" marL="0">
-              <a:buNone/>
-            </a:pPr>
-            <a:r>
-              <a:rPr lang="en-US" sz="1300" b="1" dirty="0">
-                <a:solidFill>
-                  <a:srgbClr val="071D41"/>
-                </a:solidFill>
-              </a:rPr>
-              <a:t>Celular a celular</a:t>
-            </a:r>
-            <a:endParaRPr lang="en-US" sz="1300" dirty="0"/>
-          </a:p>
-          <a:p>
-            <a:pPr indent="0" marL="0">
-              <a:buNone/>
-            </a:pPr>
-            <a:r>
-              <a:rPr lang="en-US" sz="1150" dirty="0">
-                <a:solidFill>
-                  <a:srgbClr val="5D6673"/>
-                </a:solidFill>
-              </a:rPr>
-              <a:t>sem antena</a:t>
-            </a:r>
-            <a:endParaRPr lang="en-US" sz="1300" dirty="0"/>
-          </a:p>
-        </p:txBody>
-      </p:sp>
-      <p:sp>
-        <p:nvSpPr>
-          <p:cNvPr id="39" name="Shape 26"/>
-          <p:cNvSpPr/>
-          <p:nvPr/>
-        </p:nvSpPr>
-        <p:spPr>
-          <a:xfrm>
-            <a:off x="9573768" y="4892040"/>
-            <a:ext cx="548640" cy="548640"/>
-          </a:xfrm>
-          <a:prstGeom prst="ellipse">
-            <a:avLst/>
-          </a:prstGeom>
-          <a:solidFill>
-            <a:srgbClr val="DBE8FB"/>
-          </a:solidFill>
-          <a:ln w="12700">
-            <a:solidFill>
-              <a:srgbClr val="DBE8FB"/>
-            </a:solidFill>
-            <a:prstDash val="solid"/>
-          </a:ln>
-        </p:spPr>
-      </p:sp>
-      <p:pic>
-        <p:nvPicPr>
-          <p:cNvPr id="40" name="Image 11" descr="preencoded.png">    </p:cNvPr>
-          <p:cNvPicPr>
-            <a:picLocks noChangeAspect="1"/>
-          </p:cNvPicPr>
-          <p:nvPr/>
-        </p:nvPicPr>
-        <p:blipFill>
-          <a:blip r:embed="rId12"/>
-          <a:stretch>
-            <a:fillRect/>
-          </a:stretch>
-        </p:blipFill>
-        <p:spPr>
-          <a:xfrm>
-            <a:off x="9710928" y="5029200"/>
-            <a:ext cx="274320" cy="274320"/>
-          </a:xfrm>
-          <a:prstGeom prst="rect">
-            <a:avLst/>
-          </a:prstGeom>
-        </p:spPr>
-      </p:pic>
-      <p:sp>
-        <p:nvSpPr>
-          <p:cNvPr id="41" name="Text 27"/>
-          <p:cNvSpPr txBox="1"/>
-          <p:nvPr/>
-        </p:nvSpPr>
-        <p:spPr>
-          <a:xfrm>
-            <a:off x="10213848" y="4892040"/>
-            <a:ext cx="1600200" cy="685800"/>
-          </a:xfrm>
-          <a:prstGeom prst="rect">
-            <a:avLst/>
-          </a:prstGeom>
-          <a:noFill/>
-          <a:ln/>
-        </p:spPr>
-        <p:txBody>
-          <a:bodyPr wrap="square" lIns="0" tIns="0" rIns="0" bIns="0" rtlCol="0" anchor="t"/>
-          <a:lstStyle/>
-          <a:p>
-            <a:pPr indent="0" marL="0">
-              <a:buNone/>
-            </a:pPr>
-            <a:r>
-              <a:rPr lang="en-US" sz="1300" b="1" dirty="0">
-                <a:solidFill>
-                  <a:srgbClr val="071D41"/>
-                </a:solidFill>
-              </a:rPr>
-              <a:t>Áudio e Libras</a:t>
-            </a:r>
-            <a:endParaRPr lang="en-US" sz="1300" dirty="0"/>
-          </a:p>
-          <a:p>
-            <a:pPr indent="0" marL="0">
-              <a:buNone/>
-            </a:pPr>
-            <a:r>
-              <a:rPr lang="en-US" sz="1150" dirty="0">
-                <a:solidFill>
-                  <a:srgbClr val="5D6673"/>
-                </a:solidFill>
-              </a:rPr>
-              <a:t>para todos</a:t>
-            </a:r>
-            <a:endParaRPr lang="en-US" sz="1300" dirty="0"/>
+                  <a:srgbClr val="1B1B1B"/>
+                </a:solidFill>
+              </a:rPr>
+              <a:t>Continua vendo o que está salvo; o pedido de ajuda é enviado quando o sinal voltar.</a:t>
+            </a:r>
+            <a:endParaRPr lang="en-US" sz="1400" dirty="0"/>
           </a:p>
         </p:txBody>
       </p:sp>
